--- a/homepage2026/Document/2학기/1주차/1~3주차 수업자료.pptx
+++ b/homepage2026/Document/2학기/1주차/1~3주차 수업자료.pptx
@@ -6,32 +6,35 @@
   </p:sldMasterIdLst>
   <p:sldIdLst>
     <p:sldId id="275" r:id="rId2"/>
-    <p:sldId id="262" r:id="rId3"/>
-    <p:sldId id="284" r:id="rId4"/>
-    <p:sldId id="268" r:id="rId5"/>
-    <p:sldId id="264" r:id="rId6"/>
-    <p:sldId id="265" r:id="rId7"/>
-    <p:sldId id="266" r:id="rId8"/>
-    <p:sldId id="267" r:id="rId9"/>
-    <p:sldId id="269" r:id="rId10"/>
-    <p:sldId id="258" r:id="rId11"/>
-    <p:sldId id="270" r:id="rId12"/>
-    <p:sldId id="271" r:id="rId13"/>
-    <p:sldId id="273" r:id="rId14"/>
-    <p:sldId id="256" r:id="rId15"/>
-    <p:sldId id="272" r:id="rId16"/>
-    <p:sldId id="274" r:id="rId17"/>
-    <p:sldId id="260" r:id="rId18"/>
-    <p:sldId id="283" r:id="rId19"/>
-    <p:sldId id="261" r:id="rId20"/>
-    <p:sldId id="276" r:id="rId21"/>
-    <p:sldId id="263" r:id="rId22"/>
-    <p:sldId id="277" r:id="rId23"/>
-    <p:sldId id="278" r:id="rId24"/>
-    <p:sldId id="279" r:id="rId25"/>
-    <p:sldId id="280" r:id="rId26"/>
-    <p:sldId id="281" r:id="rId27"/>
-    <p:sldId id="282" r:id="rId28"/>
+    <p:sldId id="285" r:id="rId3"/>
+    <p:sldId id="286" r:id="rId4"/>
+    <p:sldId id="287" r:id="rId5"/>
+    <p:sldId id="262" r:id="rId6"/>
+    <p:sldId id="284" r:id="rId7"/>
+    <p:sldId id="268" r:id="rId8"/>
+    <p:sldId id="264" r:id="rId9"/>
+    <p:sldId id="288" r:id="rId10"/>
+    <p:sldId id="267" r:id="rId11"/>
+    <p:sldId id="265" r:id="rId12"/>
+    <p:sldId id="269" r:id="rId13"/>
+    <p:sldId id="258" r:id="rId14"/>
+    <p:sldId id="270" r:id="rId15"/>
+    <p:sldId id="271" r:id="rId16"/>
+    <p:sldId id="273" r:id="rId17"/>
+    <p:sldId id="256" r:id="rId18"/>
+    <p:sldId id="272" r:id="rId19"/>
+    <p:sldId id="274" r:id="rId20"/>
+    <p:sldId id="260" r:id="rId21"/>
+    <p:sldId id="283" r:id="rId22"/>
+    <p:sldId id="261" r:id="rId23"/>
+    <p:sldId id="276" r:id="rId24"/>
+    <p:sldId id="263" r:id="rId25"/>
+    <p:sldId id="277" r:id="rId26"/>
+    <p:sldId id="278" r:id="rId27"/>
+    <p:sldId id="279" r:id="rId28"/>
+    <p:sldId id="280" r:id="rId29"/>
+    <p:sldId id="281" r:id="rId30"/>
+    <p:sldId id="282" r:id="rId31"/>
   </p:sldIdLst>
   <p:sldSz cx="12192000" cy="6858000"/>
   <p:notesSz cx="6858000" cy="9144000"/>
@@ -138,7 +141,18 @@
             <p14:sldId id="275"/>
           </p14:sldIdLst>
         </p14:section>
-        <p14:section name="회원목록" id="{0F599975-0601-4690-AD5E-0069A931915F}">
+        <p14:section name="아이디/비밀번호찾기" id="{E39B9EB5-2381-4265-B0B6-2D5A723E9A36}">
+          <p14:sldIdLst>
+            <p14:sldId id="285"/>
+          </p14:sldIdLst>
+        </p14:section>
+        <p14:section name="로그아웃" id="{FABEFEC3-82FB-4D09-AFA7-F6EB9A926447}">
+          <p14:sldIdLst>
+            <p14:sldId id="286"/>
+            <p14:sldId id="287"/>
+          </p14:sldIdLst>
+        </p14:section>
+        <p14:section name="회원목록(관리자)" id="{0F599975-0601-4690-AD5E-0069A931915F}">
           <p14:sldIdLst>
             <p14:sldId id="262"/>
             <p14:sldId id="284"/>
@@ -148,9 +162,9 @@
           <p14:sldIdLst>
             <p14:sldId id="268"/>
             <p14:sldId id="264"/>
+            <p14:sldId id="288"/>
+            <p14:sldId id="267"/>
             <p14:sldId id="265"/>
-            <p14:sldId id="266"/>
-            <p14:sldId id="267"/>
             <p14:sldId id="269"/>
           </p14:sldIdLst>
         </p14:section>
@@ -336,7 +350,7 @@
           <a:p>
             <a:fld id="{222A62F8-8934-400B-92CC-45AD0BC8A7BC}" type="datetimeFigureOut">
               <a:rPr lang="ko-KR" altLang="en-US" smtClean="0"/>
-              <a:t>2025-09-03</a:t>
+              <a:t>2026-08-25</a:t>
             </a:fld>
             <a:endParaRPr lang="ko-KR" altLang="en-US"/>
           </a:p>
@@ -534,7 +548,7 @@
           <a:p>
             <a:fld id="{222A62F8-8934-400B-92CC-45AD0BC8A7BC}" type="datetimeFigureOut">
               <a:rPr lang="ko-KR" altLang="en-US" smtClean="0"/>
-              <a:t>2025-09-03</a:t>
+              <a:t>2026-08-25</a:t>
             </a:fld>
             <a:endParaRPr lang="ko-KR" altLang="en-US"/>
           </a:p>
@@ -742,7 +756,7 @@
           <a:p>
             <a:fld id="{222A62F8-8934-400B-92CC-45AD0BC8A7BC}" type="datetimeFigureOut">
               <a:rPr lang="ko-KR" altLang="en-US" smtClean="0"/>
-              <a:t>2025-09-03</a:t>
+              <a:t>2026-08-25</a:t>
             </a:fld>
             <a:endParaRPr lang="ko-KR" altLang="en-US"/>
           </a:p>
@@ -940,7 +954,7 @@
           <a:p>
             <a:fld id="{222A62F8-8934-400B-92CC-45AD0BC8A7BC}" type="datetimeFigureOut">
               <a:rPr lang="ko-KR" altLang="en-US" smtClean="0"/>
-              <a:t>2025-09-03</a:t>
+              <a:t>2026-08-25</a:t>
             </a:fld>
             <a:endParaRPr lang="ko-KR" altLang="en-US"/>
           </a:p>
@@ -1215,7 +1229,7 @@
           <a:p>
             <a:fld id="{222A62F8-8934-400B-92CC-45AD0BC8A7BC}" type="datetimeFigureOut">
               <a:rPr lang="ko-KR" altLang="en-US" smtClean="0"/>
-              <a:t>2025-09-03</a:t>
+              <a:t>2026-08-25</a:t>
             </a:fld>
             <a:endParaRPr lang="ko-KR" altLang="en-US"/>
           </a:p>
@@ -1480,7 +1494,7 @@
           <a:p>
             <a:fld id="{222A62F8-8934-400B-92CC-45AD0BC8A7BC}" type="datetimeFigureOut">
               <a:rPr lang="ko-KR" altLang="en-US" smtClean="0"/>
-              <a:t>2025-09-03</a:t>
+              <a:t>2026-08-25</a:t>
             </a:fld>
             <a:endParaRPr lang="ko-KR" altLang="en-US"/>
           </a:p>
@@ -1892,7 +1906,7 @@
           <a:p>
             <a:fld id="{222A62F8-8934-400B-92CC-45AD0BC8A7BC}" type="datetimeFigureOut">
               <a:rPr lang="ko-KR" altLang="en-US" smtClean="0"/>
-              <a:t>2025-09-03</a:t>
+              <a:t>2026-08-25</a:t>
             </a:fld>
             <a:endParaRPr lang="ko-KR" altLang="en-US"/>
           </a:p>
@@ -2033,7 +2047,7 @@
           <a:p>
             <a:fld id="{222A62F8-8934-400B-92CC-45AD0BC8A7BC}" type="datetimeFigureOut">
               <a:rPr lang="ko-KR" altLang="en-US" smtClean="0"/>
-              <a:t>2025-09-03</a:t>
+              <a:t>2026-08-25</a:t>
             </a:fld>
             <a:endParaRPr lang="ko-KR" altLang="en-US"/>
           </a:p>
@@ -2146,7 +2160,7 @@
           <a:p>
             <a:fld id="{222A62F8-8934-400B-92CC-45AD0BC8A7BC}" type="datetimeFigureOut">
               <a:rPr lang="ko-KR" altLang="en-US" smtClean="0"/>
-              <a:t>2025-09-03</a:t>
+              <a:t>2026-08-25</a:t>
             </a:fld>
             <a:endParaRPr lang="ko-KR" altLang="en-US"/>
           </a:p>
@@ -2457,7 +2471,7 @@
           <a:p>
             <a:fld id="{222A62F8-8934-400B-92CC-45AD0BC8A7BC}" type="datetimeFigureOut">
               <a:rPr lang="ko-KR" altLang="en-US" smtClean="0"/>
-              <a:t>2025-09-03</a:t>
+              <a:t>2026-08-25</a:t>
             </a:fld>
             <a:endParaRPr lang="ko-KR" altLang="en-US"/>
           </a:p>
@@ -2745,7 +2759,7 @@
           <a:p>
             <a:fld id="{222A62F8-8934-400B-92CC-45AD0BC8A7BC}" type="datetimeFigureOut">
               <a:rPr lang="ko-KR" altLang="en-US" smtClean="0"/>
-              <a:t>2025-09-03</a:t>
+              <a:t>2026-08-25</a:t>
             </a:fld>
             <a:endParaRPr lang="ko-KR" altLang="en-US"/>
           </a:p>
@@ -2986,7 +3000,7 @@
           <a:p>
             <a:fld id="{222A62F8-8934-400B-92CC-45AD0BC8A7BC}" type="datetimeFigureOut">
               <a:rPr lang="ko-KR" altLang="en-US" smtClean="0"/>
-              <a:t>2025-09-03</a:t>
+              <a:t>2026-08-25</a:t>
             </a:fld>
             <a:endParaRPr lang="ko-KR" altLang="en-US"/>
           </a:p>
@@ -3510,309 +3524,12 @@
           <a:chExt cx="0" cy="0"/>
         </a:xfrm>
       </p:grpSpPr>
-      <p:sp>
-        <p:nvSpPr>
-          <p:cNvPr id="4" name="TextBox 3">
-            <a:extLst>
-              <a:ext uri="{FF2B5EF4-FFF2-40B4-BE49-F238E27FC236}">
-                <a16:creationId xmlns:a16="http://schemas.microsoft.com/office/drawing/2014/main" id="{781FA339-0440-4BFC-8D9B-82B268212157}"/>
-              </a:ext>
-            </a:extLst>
-          </p:cNvPr>
-          <p:cNvSpPr txBox="1"/>
-          <p:nvPr/>
-        </p:nvSpPr>
-        <p:spPr>
-          <a:xfrm>
-            <a:off x="386499" y="405352"/>
-            <a:ext cx="6210546" cy="369332"/>
-          </a:xfrm>
-          <a:prstGeom prst="rect">
-            <a:avLst/>
-          </a:prstGeom>
-          <a:noFill/>
-        </p:spPr>
-        <p:txBody>
-          <a:bodyPr wrap="none" rtlCol="0">
-            <a:spAutoFit/>
-          </a:bodyPr>
-          <a:lstStyle/>
-          <a:p>
-            <a:r>
-              <a:rPr lang="ko-KR" altLang="en-US" dirty="0"/>
-              <a:t>카카오개발자 사이트 </a:t>
-            </a:r>
-            <a:r>
-              <a:rPr lang="en-US" altLang="ko-KR" dirty="0"/>
-              <a:t>URL : https://developers.kakao.com/</a:t>
-            </a:r>
-          </a:p>
-        </p:txBody>
-      </p:sp>
-      <p:sp>
-        <p:nvSpPr>
-          <p:cNvPr id="11" name="TextBox 10">
-            <a:extLst>
-              <a:ext uri="{FF2B5EF4-FFF2-40B4-BE49-F238E27FC236}">
-                <a16:creationId xmlns:a16="http://schemas.microsoft.com/office/drawing/2014/main" id="{5238BEDB-3067-1344-20DE-A4C0704807E3}"/>
-              </a:ext>
-            </a:extLst>
-          </p:cNvPr>
-          <p:cNvSpPr txBox="1"/>
-          <p:nvPr/>
-        </p:nvSpPr>
-        <p:spPr>
-          <a:xfrm>
-            <a:off x="500584" y="954447"/>
-            <a:ext cx="2372765" cy="369332"/>
-          </a:xfrm>
-          <a:prstGeom prst="rect">
-            <a:avLst/>
-          </a:prstGeom>
-          <a:noFill/>
-        </p:spPr>
-        <p:txBody>
-          <a:bodyPr wrap="none" rtlCol="0">
-            <a:spAutoFit/>
-          </a:bodyPr>
-          <a:lstStyle/>
-          <a:p>
-            <a:r>
-              <a:rPr lang="en-US" altLang="ko-KR" dirty="0"/>
-              <a:t>1. </a:t>
-            </a:r>
-            <a:r>
-              <a:rPr lang="ko-KR" altLang="en-US" dirty="0"/>
-              <a:t>애플리케이션 추가</a:t>
-            </a:r>
-          </a:p>
-        </p:txBody>
-      </p:sp>
-      <p:sp>
-        <p:nvSpPr>
-          <p:cNvPr id="12" name="TextBox 11">
-            <a:extLst>
-              <a:ext uri="{FF2B5EF4-FFF2-40B4-BE49-F238E27FC236}">
-                <a16:creationId xmlns:a16="http://schemas.microsoft.com/office/drawing/2014/main" id="{EC393B13-4666-FEFF-AE54-E2AE4C9EABA3}"/>
-              </a:ext>
-            </a:extLst>
-          </p:cNvPr>
-          <p:cNvSpPr txBox="1"/>
-          <p:nvPr/>
-        </p:nvSpPr>
-        <p:spPr>
-          <a:xfrm>
-            <a:off x="4318209" y="954447"/>
-            <a:ext cx="8163197" cy="369332"/>
-          </a:xfrm>
-          <a:prstGeom prst="rect">
-            <a:avLst/>
-          </a:prstGeom>
-          <a:noFill/>
-        </p:spPr>
-        <p:txBody>
-          <a:bodyPr wrap="none" rtlCol="0">
-            <a:spAutoFit/>
-          </a:bodyPr>
-          <a:lstStyle/>
-          <a:p>
-            <a:r>
-              <a:rPr lang="en-US" altLang="ko-KR" dirty="0"/>
-              <a:t>2. </a:t>
-            </a:r>
-            <a:r>
-              <a:rPr lang="ko-KR" altLang="en-US" dirty="0" err="1"/>
-              <a:t>앱설정</a:t>
-            </a:r>
-            <a:r>
-              <a:rPr lang="ko-KR" altLang="en-US" dirty="0"/>
-              <a:t> </a:t>
-            </a:r>
-            <a:r>
-              <a:rPr lang="en-US" altLang="ko-KR" dirty="0"/>
-              <a:t>&gt; </a:t>
-            </a:r>
-            <a:r>
-              <a:rPr lang="ko-KR" altLang="en-US" dirty="0"/>
-              <a:t>앱 </a:t>
-            </a:r>
-            <a:r>
-              <a:rPr lang="en-US" altLang="ko-KR" dirty="0"/>
-              <a:t>&gt; </a:t>
-            </a:r>
-            <a:r>
-              <a:rPr lang="ko-KR" altLang="en-US" dirty="0"/>
-              <a:t>일반 </a:t>
-            </a:r>
-            <a:r>
-              <a:rPr lang="en-US" altLang="ko-KR" dirty="0"/>
-              <a:t>&gt; web</a:t>
-            </a:r>
-            <a:r>
-              <a:rPr lang="ko-KR" altLang="en-US" dirty="0"/>
-              <a:t>플랫폼등록</a:t>
-            </a:r>
-            <a:r>
-              <a:rPr lang="en-US" altLang="ko-KR" dirty="0"/>
-              <a:t>(80, 443</a:t>
-            </a:r>
-            <a:r>
-              <a:rPr lang="ko-KR" altLang="en-US" dirty="0"/>
-              <a:t>포트가 아니면 포트 작성 필</a:t>
-            </a:r>
-            <a:r>
-              <a:rPr lang="en-US" altLang="ko-KR" dirty="0"/>
-              <a:t>)</a:t>
-            </a:r>
-            <a:endParaRPr lang="ko-KR" altLang="en-US" dirty="0"/>
-          </a:p>
-        </p:txBody>
-      </p:sp>
-      <p:sp>
-        <p:nvSpPr>
-          <p:cNvPr id="13" name="TextBox 12">
-            <a:extLst>
-              <a:ext uri="{FF2B5EF4-FFF2-40B4-BE49-F238E27FC236}">
-                <a16:creationId xmlns:a16="http://schemas.microsoft.com/office/drawing/2014/main" id="{A9B63EE4-E015-378A-A7E0-60BFA990B161}"/>
-              </a:ext>
-            </a:extLst>
-          </p:cNvPr>
-          <p:cNvSpPr txBox="1"/>
-          <p:nvPr/>
-        </p:nvSpPr>
-        <p:spPr>
-          <a:xfrm>
-            <a:off x="180211" y="3839072"/>
-            <a:ext cx="5484194" cy="369332"/>
-          </a:xfrm>
-          <a:prstGeom prst="rect">
-            <a:avLst/>
-          </a:prstGeom>
-          <a:noFill/>
-        </p:spPr>
-        <p:txBody>
-          <a:bodyPr wrap="none" rtlCol="0">
-            <a:spAutoFit/>
-          </a:bodyPr>
-          <a:lstStyle/>
-          <a:p>
-            <a:r>
-              <a:rPr lang="en-US" altLang="ko-KR" dirty="0"/>
-              <a:t>3. </a:t>
-            </a:r>
-            <a:r>
-              <a:rPr lang="ko-KR" altLang="en-US" dirty="0"/>
-              <a:t>제품설정 </a:t>
-            </a:r>
-            <a:r>
-              <a:rPr lang="en-US" altLang="ko-KR" dirty="0"/>
-              <a:t>&gt; </a:t>
-            </a:r>
-            <a:r>
-              <a:rPr lang="ko-KR" altLang="en-US" dirty="0"/>
-              <a:t>카카오로그인 </a:t>
-            </a:r>
-            <a:r>
-              <a:rPr lang="en-US" altLang="ko-KR" dirty="0"/>
-              <a:t>&gt; OFF</a:t>
-            </a:r>
-            <a:r>
-              <a:rPr lang="ko-KR" altLang="en-US" dirty="0"/>
-              <a:t>를 </a:t>
-            </a:r>
-            <a:r>
-              <a:rPr lang="en-US" altLang="ko-KR" dirty="0"/>
-              <a:t>ON</a:t>
-            </a:r>
-            <a:r>
-              <a:rPr lang="ko-KR" altLang="en-US" dirty="0"/>
-              <a:t>으로 설정</a:t>
-            </a:r>
-          </a:p>
-        </p:txBody>
-      </p:sp>
-      <p:sp>
-        <p:nvSpPr>
-          <p:cNvPr id="15" name="TextBox 14">
-            <a:extLst>
-              <a:ext uri="{FF2B5EF4-FFF2-40B4-BE49-F238E27FC236}">
-                <a16:creationId xmlns:a16="http://schemas.microsoft.com/office/drawing/2014/main" id="{34682E1F-59A5-37F3-B77B-732CB560EC6F}"/>
-              </a:ext>
-            </a:extLst>
-          </p:cNvPr>
-          <p:cNvSpPr txBox="1"/>
-          <p:nvPr/>
-        </p:nvSpPr>
-        <p:spPr>
-          <a:xfrm>
-            <a:off x="5807876" y="3839072"/>
-            <a:ext cx="6529352" cy="369332"/>
-          </a:xfrm>
-          <a:prstGeom prst="rect">
-            <a:avLst/>
-          </a:prstGeom>
-          <a:noFill/>
-        </p:spPr>
-        <p:txBody>
-          <a:bodyPr wrap="none" rtlCol="0">
-            <a:spAutoFit/>
-          </a:bodyPr>
-          <a:lstStyle/>
-          <a:p>
-            <a:r>
-              <a:rPr lang="en-US" altLang="ko-KR" dirty="0"/>
-              <a:t>4. </a:t>
-            </a:r>
-            <a:r>
-              <a:rPr lang="ko-KR" altLang="en-US" dirty="0"/>
-              <a:t>제품설명 </a:t>
-            </a:r>
-            <a:r>
-              <a:rPr lang="en-US" altLang="ko-KR" dirty="0"/>
-              <a:t>&gt; </a:t>
-            </a:r>
-            <a:r>
-              <a:rPr lang="ko-KR" altLang="en-US" dirty="0"/>
-              <a:t>카카오로그인 </a:t>
-            </a:r>
-            <a:r>
-              <a:rPr lang="en-US" altLang="ko-KR" dirty="0"/>
-              <a:t>&gt; </a:t>
-            </a:r>
-            <a:r>
-              <a:rPr lang="ko-KR" altLang="en-US" dirty="0"/>
-              <a:t>동의항목 설정</a:t>
-            </a:r>
-            <a:r>
-              <a:rPr lang="en-US" altLang="ko-KR" dirty="0"/>
-              <a:t>(</a:t>
-            </a:r>
-            <a:r>
-              <a:rPr lang="ko-KR" altLang="en-US" dirty="0"/>
-              <a:t>닉네임</a:t>
-            </a:r>
-            <a:r>
-              <a:rPr lang="en-US" altLang="ko-KR" dirty="0"/>
-              <a:t>, </a:t>
-            </a:r>
-            <a:r>
-              <a:rPr lang="ko-KR" altLang="en-US" dirty="0"/>
-              <a:t>이메일</a:t>
-            </a:r>
-            <a:r>
-              <a:rPr lang="en-US" altLang="ko-KR" dirty="0"/>
-              <a:t>)</a:t>
-            </a:r>
-            <a:endParaRPr lang="ko-KR" altLang="en-US" dirty="0"/>
-          </a:p>
-        </p:txBody>
-      </p:sp>
       <p:pic>
         <p:nvPicPr>
-          <p:cNvPr id="9" name="그림 8">
-            <a:extLst>
-              <a:ext uri="{FF2B5EF4-FFF2-40B4-BE49-F238E27FC236}">
-                <a16:creationId xmlns:a16="http://schemas.microsoft.com/office/drawing/2014/main" id="{D8A37F80-E292-2F0F-5632-A420E588B0DC}"/>
+          <p:cNvPr id="2" name="그림 1">
+            <a:extLst>
+              <a:ext uri="{FF2B5EF4-FFF2-40B4-BE49-F238E27FC236}">
+                <a16:creationId xmlns:a16="http://schemas.microsoft.com/office/drawing/2014/main" id="{D03804D6-52D7-5A26-D71F-F3B40CEE3707}"/>
               </a:ext>
             </a:extLst>
           </p:cNvPr>
@@ -3829,63 +3546,20 @@
         </p:blipFill>
         <p:spPr>
           <a:xfrm>
-            <a:off x="664169" y="1363871"/>
-            <a:ext cx="2267783" cy="2267783"/>
+            <a:off x="2300066" y="1494569"/>
+            <a:ext cx="3177546" cy="4050800"/>
           </a:xfrm>
           <a:prstGeom prst="rect">
             <a:avLst/>
           </a:prstGeom>
         </p:spPr>
       </p:pic>
-      <p:sp>
-        <p:nvSpPr>
-          <p:cNvPr id="18" name="TextBox 17">
-            <a:extLst>
-              <a:ext uri="{FF2B5EF4-FFF2-40B4-BE49-F238E27FC236}">
-                <a16:creationId xmlns:a16="http://schemas.microsoft.com/office/drawing/2014/main" id="{4D7EC613-9D28-BC6A-383E-707A67543077}"/>
-              </a:ext>
-            </a:extLst>
-          </p:cNvPr>
-          <p:cNvSpPr txBox="1"/>
-          <p:nvPr/>
-        </p:nvSpPr>
-        <p:spPr>
-          <a:xfrm>
-            <a:off x="9979502" y="5722187"/>
-            <a:ext cx="2323068" cy="400110"/>
-          </a:xfrm>
-          <a:prstGeom prst="rect">
-            <a:avLst/>
-          </a:prstGeom>
-          <a:noFill/>
-        </p:spPr>
-        <p:txBody>
-          <a:bodyPr wrap="square">
-            <a:spAutoFit/>
-          </a:bodyPr>
-          <a:lstStyle/>
-          <a:p>
-            <a:r>
-              <a:rPr lang="ko-KR" altLang="en-US" sz="1000" dirty="0"/>
-              <a:t>회원 닉네임 설정</a:t>
-            </a:r>
-            <a:endParaRPr lang="en-US" altLang="ko-KR" sz="1000" dirty="0"/>
-          </a:p>
-          <a:p>
-            <a:r>
-              <a:rPr lang="ko-KR" altLang="en-US" sz="1000" dirty="0"/>
-              <a:t>회원가입 시 프로필 사진 자동 제공</a:t>
-            </a:r>
-            <a:endParaRPr lang="en-US" altLang="ko-KR" sz="1000" dirty="0"/>
-          </a:p>
-        </p:txBody>
-      </p:sp>
       <p:pic>
         <p:nvPicPr>
-          <p:cNvPr id="20" name="그림 19">
-            <a:extLst>
-              <a:ext uri="{FF2B5EF4-FFF2-40B4-BE49-F238E27FC236}">
-                <a16:creationId xmlns:a16="http://schemas.microsoft.com/office/drawing/2014/main" id="{062F8C78-C6DB-B01B-9193-CF8E72E32A3F}"/>
+          <p:cNvPr id="6" name="그림 5">
+            <a:extLst>
+              <a:ext uri="{FF2B5EF4-FFF2-40B4-BE49-F238E27FC236}">
+                <a16:creationId xmlns:a16="http://schemas.microsoft.com/office/drawing/2014/main" id="{7FBCE964-CE00-EC73-6D02-CB5CD2067D7E}"/>
               </a:ext>
             </a:extLst>
           </p:cNvPr>
@@ -3902,224 +3576,8 @@
         </p:blipFill>
         <p:spPr>
           <a:xfrm>
-            <a:off x="5865131" y="4208404"/>
-            <a:ext cx="4169672" cy="2231140"/>
-          </a:xfrm>
-          <a:prstGeom prst="rect">
-            <a:avLst/>
-          </a:prstGeom>
-        </p:spPr>
-      </p:pic>
-      <p:sp>
-        <p:nvSpPr>
-          <p:cNvPr id="8" name="직사각형 7">
-            <a:extLst>
-              <a:ext uri="{FF2B5EF4-FFF2-40B4-BE49-F238E27FC236}">
-                <a16:creationId xmlns:a16="http://schemas.microsoft.com/office/drawing/2014/main" id="{3E4DDC40-1DB1-498D-80DD-2D45C3ABEA03}"/>
-              </a:ext>
-            </a:extLst>
-          </p:cNvPr>
-          <p:cNvSpPr/>
-          <p:nvPr/>
-        </p:nvSpPr>
-        <p:spPr>
-          <a:xfrm>
-            <a:off x="7581313" y="5704522"/>
-            <a:ext cx="2368030" cy="549440"/>
-          </a:xfrm>
-          <a:prstGeom prst="rect">
-            <a:avLst/>
-          </a:prstGeom>
-          <a:noFill/>
-          <a:ln>
-            <a:solidFill>
-              <a:srgbClr val="FF0000"/>
-            </a:solidFill>
-          </a:ln>
-        </p:spPr>
-        <p:style>
-          <a:lnRef idx="2">
-            <a:schemeClr val="accent1">
-              <a:shade val="50000"/>
-            </a:schemeClr>
-          </a:lnRef>
-          <a:fillRef idx="1">
-            <a:schemeClr val="accent1"/>
-          </a:fillRef>
-          <a:effectRef idx="0">
-            <a:schemeClr val="accent1"/>
-          </a:effectRef>
-          <a:fontRef idx="minor">
-            <a:schemeClr val="lt1"/>
-          </a:fontRef>
-        </p:style>
-        <p:txBody>
-          <a:bodyPr rtlCol="0" anchor="ctr"/>
-          <a:lstStyle/>
-          <a:p>
-            <a:pPr algn="ctr"/>
-            <a:endParaRPr lang="ko-KR" altLang="en-US"/>
-          </a:p>
-        </p:txBody>
-      </p:sp>
-      <p:pic>
-        <p:nvPicPr>
-          <p:cNvPr id="22" name="그림 21">
-            <a:extLst>
-              <a:ext uri="{FF2B5EF4-FFF2-40B4-BE49-F238E27FC236}">
-                <a16:creationId xmlns:a16="http://schemas.microsoft.com/office/drawing/2014/main" id="{E1948A93-5E40-3C3D-C786-F1360F70245D}"/>
-              </a:ext>
-            </a:extLst>
-          </p:cNvPr>
-          <p:cNvPicPr>
-            <a:picLocks noChangeAspect="1"/>
-          </p:cNvPicPr>
-          <p:nvPr/>
-        </p:nvPicPr>
-        <p:blipFill>
-          <a:blip r:embed="rId4"/>
-          <a:stretch>
-            <a:fillRect/>
-          </a:stretch>
-        </p:blipFill>
-        <p:spPr>
-          <a:xfrm>
-            <a:off x="5020810" y="1307068"/>
-            <a:ext cx="2501509" cy="2519351"/>
-          </a:xfrm>
-          <a:prstGeom prst="rect">
-            <a:avLst/>
-          </a:prstGeom>
-        </p:spPr>
-      </p:pic>
-      <p:sp>
-        <p:nvSpPr>
-          <p:cNvPr id="6" name="직사각형 5">
-            <a:extLst>
-              <a:ext uri="{FF2B5EF4-FFF2-40B4-BE49-F238E27FC236}">
-                <a16:creationId xmlns:a16="http://schemas.microsoft.com/office/drawing/2014/main" id="{419045AA-F51D-4FDA-B6BC-43E45FCCAC2D}"/>
-              </a:ext>
-            </a:extLst>
-          </p:cNvPr>
-          <p:cNvSpPr/>
-          <p:nvPr/>
-        </p:nvSpPr>
-        <p:spPr>
-          <a:xfrm>
-            <a:off x="5258156" y="2186322"/>
-            <a:ext cx="606975" cy="241111"/>
-          </a:xfrm>
-          <a:prstGeom prst="rect">
-            <a:avLst/>
-          </a:prstGeom>
-          <a:noFill/>
-          <a:ln>
-            <a:solidFill>
-              <a:srgbClr val="FF0000"/>
-            </a:solidFill>
-          </a:ln>
-        </p:spPr>
-        <p:style>
-          <a:lnRef idx="2">
-            <a:schemeClr val="accent1">
-              <a:shade val="50000"/>
-            </a:schemeClr>
-          </a:lnRef>
-          <a:fillRef idx="1">
-            <a:schemeClr val="accent1"/>
-          </a:fillRef>
-          <a:effectRef idx="0">
-            <a:schemeClr val="accent1"/>
-          </a:effectRef>
-          <a:fontRef idx="minor">
-            <a:schemeClr val="lt1"/>
-          </a:fontRef>
-        </p:style>
-        <p:txBody>
-          <a:bodyPr rtlCol="0" anchor="ctr"/>
-          <a:lstStyle/>
-          <a:p>
-            <a:pPr algn="ctr"/>
-            <a:endParaRPr lang="ko-KR" altLang="en-US"/>
-          </a:p>
-        </p:txBody>
-      </p:sp>
-      <p:sp>
-        <p:nvSpPr>
-          <p:cNvPr id="14" name="직사각형 13">
-            <a:extLst>
-              <a:ext uri="{FF2B5EF4-FFF2-40B4-BE49-F238E27FC236}">
-                <a16:creationId xmlns:a16="http://schemas.microsoft.com/office/drawing/2014/main" id="{F75F3696-0629-9849-34B9-885CB1AA2C1D}"/>
-              </a:ext>
-            </a:extLst>
-          </p:cNvPr>
-          <p:cNvSpPr/>
-          <p:nvPr/>
-        </p:nvSpPr>
-        <p:spPr>
-          <a:xfrm>
-            <a:off x="5258156" y="3114928"/>
-            <a:ext cx="2061238" cy="241111"/>
-          </a:xfrm>
-          <a:prstGeom prst="rect">
-            <a:avLst/>
-          </a:prstGeom>
-          <a:noFill/>
-          <a:ln>
-            <a:solidFill>
-              <a:srgbClr val="FF0000"/>
-            </a:solidFill>
-          </a:ln>
-        </p:spPr>
-        <p:style>
-          <a:lnRef idx="2">
-            <a:schemeClr val="accent1">
-              <a:shade val="50000"/>
-            </a:schemeClr>
-          </a:lnRef>
-          <a:fillRef idx="1">
-            <a:schemeClr val="accent1"/>
-          </a:fillRef>
-          <a:effectRef idx="0">
-            <a:schemeClr val="accent1"/>
-          </a:effectRef>
-          <a:fontRef idx="minor">
-            <a:schemeClr val="lt1"/>
-          </a:fontRef>
-        </p:style>
-        <p:txBody>
-          <a:bodyPr rtlCol="0" anchor="ctr"/>
-          <a:lstStyle/>
-          <a:p>
-            <a:pPr algn="ctr"/>
-            <a:endParaRPr lang="ko-KR" altLang="en-US"/>
-          </a:p>
-        </p:txBody>
-      </p:sp>
-      <p:pic>
-        <p:nvPicPr>
-          <p:cNvPr id="5" name="그림 4">
-            <a:extLst>
-              <a:ext uri="{FF2B5EF4-FFF2-40B4-BE49-F238E27FC236}">
-                <a16:creationId xmlns:a16="http://schemas.microsoft.com/office/drawing/2014/main" id="{20E0CAC4-6D46-8008-D662-EE7EEB335C87}"/>
-              </a:ext>
-            </a:extLst>
-          </p:cNvPr>
-          <p:cNvPicPr>
-            <a:picLocks noChangeAspect="1"/>
-          </p:cNvPicPr>
-          <p:nvPr/>
-        </p:nvPicPr>
-        <p:blipFill>
-          <a:blip r:embed="rId5"/>
-          <a:stretch>
-            <a:fillRect/>
-          </a:stretch>
-        </p:blipFill>
-        <p:spPr>
-          <a:xfrm>
-            <a:off x="286384" y="4308429"/>
-            <a:ext cx="5142865" cy="2257843"/>
+            <a:off x="6394060" y="1425038"/>
+            <a:ext cx="3417356" cy="4279990"/>
           </a:xfrm>
           <a:prstGeom prst="rect">
             <a:avLst/>
@@ -4129,7 +3587,7 @@
     </p:spTree>
     <p:extLst>
       <p:ext uri="{BB962C8B-B14F-4D97-AF65-F5344CB8AC3E}">
-        <p14:creationId xmlns:p14="http://schemas.microsoft.com/office/powerpoint/2010/main" val="1727405086"/>
+        <p14:creationId xmlns:p14="http://schemas.microsoft.com/office/powerpoint/2010/main" val="2936461964"/>
       </p:ext>
     </p:extLst>
   </p:cSld>
@@ -4158,10 +3616,10 @@
       </p:grpSpPr>
       <p:pic>
         <p:nvPicPr>
-          <p:cNvPr id="4" name="그림 3">
-            <a:extLst>
-              <a:ext uri="{FF2B5EF4-FFF2-40B4-BE49-F238E27FC236}">
-                <a16:creationId xmlns:a16="http://schemas.microsoft.com/office/drawing/2014/main" id="{E21EF111-EA5C-AF8A-E358-446782531D47}"/>
+          <p:cNvPr id="3" name="그림 2">
+            <a:extLst>
+              <a:ext uri="{FF2B5EF4-FFF2-40B4-BE49-F238E27FC236}">
+                <a16:creationId xmlns:a16="http://schemas.microsoft.com/office/drawing/2014/main" id="{D7CDF24F-3B76-8330-F151-1CE98F62E33E}"/>
               </a:ext>
             </a:extLst>
           </p:cNvPr>
@@ -4178,8 +3636,8 @@
         </p:blipFill>
         <p:spPr>
           <a:xfrm>
-            <a:off x="7908886" y="1513007"/>
-            <a:ext cx="2299721" cy="3273558"/>
+            <a:off x="6010589" y="0"/>
+            <a:ext cx="5134708" cy="6858000"/>
           </a:xfrm>
           <a:prstGeom prst="rect">
             <a:avLst/>
@@ -4188,10 +3646,10 @@
       </p:pic>
       <p:sp>
         <p:nvSpPr>
-          <p:cNvPr id="5" name="TextBox 4">
-            <a:extLst>
-              <a:ext uri="{FF2B5EF4-FFF2-40B4-BE49-F238E27FC236}">
-                <a16:creationId xmlns:a16="http://schemas.microsoft.com/office/drawing/2014/main" id="{E301BB7B-FCA1-5632-2F52-D18E4947F7B7}"/>
+          <p:cNvPr id="2" name="TextBox 1">
+            <a:extLst>
+              <a:ext uri="{FF2B5EF4-FFF2-40B4-BE49-F238E27FC236}">
+                <a16:creationId xmlns:a16="http://schemas.microsoft.com/office/drawing/2014/main" id="{FC8C3871-F913-55CF-A7FE-C4AAA8573196}"/>
               </a:ext>
             </a:extLst>
           </p:cNvPr>
@@ -4200,8 +3658,8 @@
         </p:nvSpPr>
         <p:spPr>
           <a:xfrm>
-            <a:off x="386499" y="405352"/>
-            <a:ext cx="5604419" cy="369332"/>
+            <a:off x="225631" y="368135"/>
+            <a:ext cx="3974165" cy="646331"/>
           </a:xfrm>
           <a:prstGeom prst="rect">
             <a:avLst/>
@@ -4216,18 +3674,24 @@
           <a:p>
             <a:r>
               <a:rPr lang="ko-KR" altLang="en-US" dirty="0"/>
-              <a:t>동의화면 미리보기 후 개발 시 이렇게 나오는지 확인</a:t>
+              <a:t>앱 비밀번호 안 보이는 사람은</a:t>
             </a:r>
             <a:endParaRPr lang="en-US" altLang="ko-KR" dirty="0"/>
+          </a:p>
+          <a:p>
+            <a:r>
+              <a:rPr lang="ko-KR" altLang="en-US" dirty="0"/>
+              <a:t>상단 검색에서 앱 비밀번호라고 검색</a:t>
+            </a:r>
           </a:p>
         </p:txBody>
       </p:sp>
       <p:pic>
         <p:nvPicPr>
-          <p:cNvPr id="3" name="그림 2">
-            <a:extLst>
-              <a:ext uri="{FF2B5EF4-FFF2-40B4-BE49-F238E27FC236}">
-                <a16:creationId xmlns:a16="http://schemas.microsoft.com/office/drawing/2014/main" id="{4F283734-B6B3-588E-0F51-ADADA6297C87}"/>
+          <p:cNvPr id="7" name="그림 6">
+            <a:extLst>
+              <a:ext uri="{FF2B5EF4-FFF2-40B4-BE49-F238E27FC236}">
+                <a16:creationId xmlns:a16="http://schemas.microsoft.com/office/drawing/2014/main" id="{0D585FB8-0383-B606-7966-90278C5F62F7}"/>
               </a:ext>
             </a:extLst>
           </p:cNvPr>
@@ -4244,64 +3708,18 @@
         </p:blipFill>
         <p:spPr>
           <a:xfrm>
-            <a:off x="838200" y="1576135"/>
-            <a:ext cx="4898141" cy="3000411"/>
+            <a:off x="469527" y="1061028"/>
+            <a:ext cx="4270256" cy="2254000"/>
           </a:xfrm>
           <a:prstGeom prst="rect">
             <a:avLst/>
           </a:prstGeom>
         </p:spPr>
       </p:pic>
-      <p:sp>
-        <p:nvSpPr>
-          <p:cNvPr id="6" name="화살표: 오른쪽 5">
-            <a:extLst>
-              <a:ext uri="{FF2B5EF4-FFF2-40B4-BE49-F238E27FC236}">
-                <a16:creationId xmlns:a16="http://schemas.microsoft.com/office/drawing/2014/main" id="{51321D32-8B08-2AB1-8B1D-CEB1F72CB4E4}"/>
-              </a:ext>
-            </a:extLst>
-          </p:cNvPr>
-          <p:cNvSpPr/>
-          <p:nvPr/>
-        </p:nvSpPr>
-        <p:spPr>
-          <a:xfrm>
-            <a:off x="6160770" y="2754630"/>
-            <a:ext cx="731520" cy="419100"/>
-          </a:xfrm>
-          <a:prstGeom prst="rightArrow">
-            <a:avLst/>
-          </a:prstGeom>
-        </p:spPr>
-        <p:style>
-          <a:lnRef idx="2">
-            <a:schemeClr val="accent1">
-              <a:shade val="15000"/>
-            </a:schemeClr>
-          </a:lnRef>
-          <a:fillRef idx="1">
-            <a:schemeClr val="accent1"/>
-          </a:fillRef>
-          <a:effectRef idx="0">
-            <a:schemeClr val="accent1"/>
-          </a:effectRef>
-          <a:fontRef idx="minor">
-            <a:schemeClr val="lt1"/>
-          </a:fontRef>
-        </p:style>
-        <p:txBody>
-          <a:bodyPr rtlCol="0" anchor="ctr"/>
-          <a:lstStyle/>
-          <a:p>
-            <a:pPr algn="ctr"/>
-            <a:endParaRPr lang="ko-KR" altLang="en-US"/>
-          </a:p>
-        </p:txBody>
-      </p:sp>
     </p:spTree>
     <p:extLst>
       <p:ext uri="{BB962C8B-B14F-4D97-AF65-F5344CB8AC3E}">
-        <p14:creationId xmlns:p14="http://schemas.microsoft.com/office/powerpoint/2010/main" val="1127450149"/>
+        <p14:creationId xmlns:p14="http://schemas.microsoft.com/office/powerpoint/2010/main" val="3022636693"/>
       </p:ext>
     </p:extLst>
   </p:cSld>
@@ -4328,48 +3746,12 @@
           <a:chExt cx="0" cy="0"/>
         </a:xfrm>
       </p:grpSpPr>
-      <p:sp>
-        <p:nvSpPr>
-          <p:cNvPr id="3" name="TextBox 2">
-            <a:extLst>
-              <a:ext uri="{FF2B5EF4-FFF2-40B4-BE49-F238E27FC236}">
-                <a16:creationId xmlns:a16="http://schemas.microsoft.com/office/drawing/2014/main" id="{7C491AA6-18F5-80C3-2DE7-18544442ECAE}"/>
-              </a:ext>
-            </a:extLst>
-          </p:cNvPr>
-          <p:cNvSpPr txBox="1"/>
-          <p:nvPr/>
-        </p:nvSpPr>
-        <p:spPr>
-          <a:xfrm>
-            <a:off x="452194" y="327209"/>
-            <a:ext cx="6097112" cy="369332"/>
-          </a:xfrm>
-          <a:prstGeom prst="rect">
-            <a:avLst/>
-          </a:prstGeom>
-          <a:noFill/>
-        </p:spPr>
-        <p:txBody>
-          <a:bodyPr wrap="square">
-            <a:spAutoFit/>
-          </a:bodyPr>
-          <a:lstStyle/>
-          <a:p>
-            <a:r>
-              <a:rPr lang="ko-KR" altLang="en-US" dirty="0" err="1"/>
-              <a:t>JoinController</a:t>
-            </a:r>
-            <a:endParaRPr lang="ko-KR" altLang="en-US" dirty="0"/>
-          </a:p>
-        </p:txBody>
-      </p:sp>
       <p:pic>
         <p:nvPicPr>
-          <p:cNvPr id="6" name="그림 5">
-            <a:extLst>
-              <a:ext uri="{FF2B5EF4-FFF2-40B4-BE49-F238E27FC236}">
-                <a16:creationId xmlns:a16="http://schemas.microsoft.com/office/drawing/2014/main" id="{595971F8-5E14-A1F5-FD93-A0F72D89B6DA}"/>
+          <p:cNvPr id="5" name="그림 4">
+            <a:extLst>
+              <a:ext uri="{FF2B5EF4-FFF2-40B4-BE49-F238E27FC236}">
+                <a16:creationId xmlns:a16="http://schemas.microsoft.com/office/drawing/2014/main" id="{9793FC15-83C5-D005-9EAD-2EEC48E0FF7F}"/>
               </a:ext>
             </a:extLst>
           </p:cNvPr>
@@ -4386,70 +3768,83 @@
         </p:blipFill>
         <p:spPr>
           <a:xfrm>
-            <a:off x="477153" y="785444"/>
-            <a:ext cx="8580079" cy="4005574"/>
+            <a:off x="493238" y="696356"/>
+            <a:ext cx="2457450" cy="695325"/>
           </a:xfrm>
           <a:prstGeom prst="rect">
             <a:avLst/>
           </a:prstGeom>
         </p:spPr>
       </p:pic>
-      <p:sp>
-        <p:nvSpPr>
-          <p:cNvPr id="8" name="직사각형 7">
-            <a:extLst>
-              <a:ext uri="{FF2B5EF4-FFF2-40B4-BE49-F238E27FC236}">
-                <a16:creationId xmlns:a16="http://schemas.microsoft.com/office/drawing/2014/main" id="{F9474E48-6DA4-65E8-CF5D-2F93A4F3A080}"/>
-              </a:ext>
-            </a:extLst>
-          </p:cNvPr>
-          <p:cNvSpPr/>
-          <p:nvPr/>
-        </p:nvSpPr>
-        <p:spPr>
-          <a:xfrm>
-            <a:off x="692669" y="1237440"/>
-            <a:ext cx="4279797" cy="1298852"/>
+      <p:pic>
+        <p:nvPicPr>
+          <p:cNvPr id="7" name="그림 6">
+            <a:extLst>
+              <a:ext uri="{FF2B5EF4-FFF2-40B4-BE49-F238E27FC236}">
+                <a16:creationId xmlns:a16="http://schemas.microsoft.com/office/drawing/2014/main" id="{AB07FEA3-F0CF-B112-E733-055D6498898E}"/>
+              </a:ext>
+            </a:extLst>
+          </p:cNvPr>
+          <p:cNvPicPr>
+            <a:picLocks noChangeAspect="1"/>
+          </p:cNvPicPr>
+          <p:nvPr/>
+        </p:nvPicPr>
+        <p:blipFill>
+          <a:blip r:embed="rId3"/>
+          <a:stretch>
+            <a:fillRect/>
+          </a:stretch>
+        </p:blipFill>
+        <p:spPr>
+          <a:xfrm>
+            <a:off x="493238" y="2189866"/>
+            <a:ext cx="5010150" cy="819150"/>
+          </a:xfrm>
+          <a:prstGeom prst="rect">
+            <a:avLst/>
+          </a:prstGeom>
+        </p:spPr>
+      </p:pic>
+      <p:sp>
+        <p:nvSpPr>
+          <p:cNvPr id="2" name="TextBox 1">
+            <a:extLst>
+              <a:ext uri="{FF2B5EF4-FFF2-40B4-BE49-F238E27FC236}">
+                <a16:creationId xmlns:a16="http://schemas.microsoft.com/office/drawing/2014/main" id="{2516FD90-7369-EE0C-318A-7765978447E6}"/>
+              </a:ext>
+            </a:extLst>
+          </p:cNvPr>
+          <p:cNvSpPr txBox="1"/>
+          <p:nvPr/>
+        </p:nvSpPr>
+        <p:spPr>
+          <a:xfrm>
+            <a:off x="493238" y="3244334"/>
+            <a:ext cx="3281668" cy="369332"/>
           </a:xfrm>
           <a:prstGeom prst="rect">
             <a:avLst/>
           </a:prstGeom>
           <a:noFill/>
-          <a:ln>
-            <a:solidFill>
-              <a:srgbClr val="FF0000"/>
-            </a:solidFill>
-          </a:ln>
-        </p:spPr>
-        <p:style>
-          <a:lnRef idx="2">
-            <a:schemeClr val="accent1">
-              <a:shade val="50000"/>
-            </a:schemeClr>
-          </a:lnRef>
-          <a:fillRef idx="1">
-            <a:schemeClr val="accent1"/>
-          </a:fillRef>
-          <a:effectRef idx="0">
-            <a:schemeClr val="accent1"/>
-          </a:effectRef>
-          <a:fontRef idx="minor">
-            <a:schemeClr val="lt1"/>
-          </a:fontRef>
-        </p:style>
-        <p:txBody>
-          <a:bodyPr rtlCol="0" anchor="ctr"/>
-          <a:lstStyle/>
-          <a:p>
-            <a:pPr algn="ctr"/>
-            <a:endParaRPr lang="ko-KR" altLang="en-US"/>
+        </p:spPr>
+        <p:txBody>
+          <a:bodyPr wrap="none" rtlCol="0">
+            <a:spAutoFit/>
+          </a:bodyPr>
+          <a:lstStyle/>
+          <a:p>
+            <a:r>
+              <a:rPr lang="ko-KR" altLang="en-US"/>
+              <a:t>키는 띄어쓰기 없이 넣어야 함</a:t>
+            </a:r>
           </a:p>
         </p:txBody>
       </p:sp>
     </p:spTree>
     <p:extLst>
       <p:ext uri="{BB962C8B-B14F-4D97-AF65-F5344CB8AC3E}">
-        <p14:creationId xmlns:p14="http://schemas.microsoft.com/office/powerpoint/2010/main" val="601723413"/>
+        <p14:creationId xmlns:p14="http://schemas.microsoft.com/office/powerpoint/2010/main" val="675764092"/>
       </p:ext>
     </p:extLst>
   </p:cSld>
@@ -4476,12 +3871,387 @@
           <a:chExt cx="0" cy="0"/>
         </a:xfrm>
       </p:grpSpPr>
+      <p:sp>
+        <p:nvSpPr>
+          <p:cNvPr id="4" name="TextBox 3">
+            <a:extLst>
+              <a:ext uri="{FF2B5EF4-FFF2-40B4-BE49-F238E27FC236}">
+                <a16:creationId xmlns:a16="http://schemas.microsoft.com/office/drawing/2014/main" id="{781FA339-0440-4BFC-8D9B-82B268212157}"/>
+              </a:ext>
+            </a:extLst>
+          </p:cNvPr>
+          <p:cNvSpPr txBox="1"/>
+          <p:nvPr/>
+        </p:nvSpPr>
+        <p:spPr>
+          <a:xfrm>
+            <a:off x="386499" y="1588"/>
+            <a:ext cx="6210546" cy="369332"/>
+          </a:xfrm>
+          <a:prstGeom prst="rect">
+            <a:avLst/>
+          </a:prstGeom>
+          <a:noFill/>
+        </p:spPr>
+        <p:txBody>
+          <a:bodyPr wrap="none" rtlCol="0">
+            <a:spAutoFit/>
+          </a:bodyPr>
+          <a:lstStyle/>
+          <a:p>
+            <a:r>
+              <a:rPr lang="ko-KR" altLang="en-US" dirty="0"/>
+              <a:t>카카오개발자 사이트 </a:t>
+            </a:r>
+            <a:r>
+              <a:rPr lang="en-US" altLang="ko-KR" dirty="0"/>
+              <a:t>URL : https://developers.kakao.com/</a:t>
+            </a:r>
+          </a:p>
+        </p:txBody>
+      </p:sp>
+      <p:sp>
+        <p:nvSpPr>
+          <p:cNvPr id="11" name="TextBox 10">
+            <a:extLst>
+              <a:ext uri="{FF2B5EF4-FFF2-40B4-BE49-F238E27FC236}">
+                <a16:creationId xmlns:a16="http://schemas.microsoft.com/office/drawing/2014/main" id="{5238BEDB-3067-1344-20DE-A4C0704807E3}"/>
+              </a:ext>
+            </a:extLst>
+          </p:cNvPr>
+          <p:cNvSpPr txBox="1"/>
+          <p:nvPr/>
+        </p:nvSpPr>
+        <p:spPr>
+          <a:xfrm>
+            <a:off x="500584" y="550683"/>
+            <a:ext cx="2372765" cy="369332"/>
+          </a:xfrm>
+          <a:prstGeom prst="rect">
+            <a:avLst/>
+          </a:prstGeom>
+          <a:noFill/>
+        </p:spPr>
+        <p:txBody>
+          <a:bodyPr wrap="none" rtlCol="0">
+            <a:spAutoFit/>
+          </a:bodyPr>
+          <a:lstStyle/>
+          <a:p>
+            <a:r>
+              <a:rPr lang="en-US" altLang="ko-KR" dirty="0"/>
+              <a:t>1. </a:t>
+            </a:r>
+            <a:r>
+              <a:rPr lang="ko-KR" altLang="en-US" dirty="0"/>
+              <a:t>애플리케이션 추가</a:t>
+            </a:r>
+          </a:p>
+        </p:txBody>
+      </p:sp>
+      <p:sp>
+        <p:nvSpPr>
+          <p:cNvPr id="12" name="TextBox 11">
+            <a:extLst>
+              <a:ext uri="{FF2B5EF4-FFF2-40B4-BE49-F238E27FC236}">
+                <a16:creationId xmlns:a16="http://schemas.microsoft.com/office/drawing/2014/main" id="{EC393B13-4666-FEFF-AE54-E2AE4C9EABA3}"/>
+              </a:ext>
+            </a:extLst>
+          </p:cNvPr>
+          <p:cNvSpPr txBox="1"/>
+          <p:nvPr/>
+        </p:nvSpPr>
+        <p:spPr>
+          <a:xfrm>
+            <a:off x="4318209" y="550683"/>
+            <a:ext cx="6964022" cy="646331"/>
+          </a:xfrm>
+          <a:prstGeom prst="rect">
+            <a:avLst/>
+          </a:prstGeom>
+          <a:noFill/>
+        </p:spPr>
+        <p:txBody>
+          <a:bodyPr wrap="none" rtlCol="0">
+            <a:spAutoFit/>
+          </a:bodyPr>
+          <a:lstStyle/>
+          <a:p>
+            <a:r>
+              <a:rPr lang="en-US" altLang="ko-KR" dirty="0"/>
+              <a:t>2. </a:t>
+            </a:r>
+            <a:r>
+              <a:rPr lang="ko-KR" altLang="en-US" dirty="0" err="1"/>
+              <a:t>앱설정</a:t>
+            </a:r>
+            <a:r>
+              <a:rPr lang="ko-KR" altLang="en-US" dirty="0"/>
+              <a:t> </a:t>
+            </a:r>
+            <a:r>
+              <a:rPr lang="en-US" altLang="ko-KR" dirty="0"/>
+              <a:t>&gt; </a:t>
+            </a:r>
+            <a:r>
+              <a:rPr lang="ko-KR" altLang="en-US" dirty="0"/>
+              <a:t>앱 </a:t>
+            </a:r>
+            <a:r>
+              <a:rPr lang="en-US" altLang="ko-KR" dirty="0"/>
+              <a:t>&gt; </a:t>
+            </a:r>
+            <a:r>
+              <a:rPr lang="ko-KR" altLang="en-US" dirty="0"/>
+              <a:t>플랫폼 키 </a:t>
+            </a:r>
+            <a:r>
+              <a:rPr lang="en-US" altLang="ko-KR" dirty="0"/>
+              <a:t>&gt; JavaScript</a:t>
+            </a:r>
+            <a:r>
+              <a:rPr lang="ko-KR" altLang="en-US" dirty="0"/>
+              <a:t>키 수정페이지</a:t>
+            </a:r>
+            <a:endParaRPr lang="en-US" altLang="ko-KR" dirty="0"/>
+          </a:p>
+          <a:p>
+            <a:r>
+              <a:rPr lang="en-US" altLang="ko-KR" dirty="0"/>
+              <a:t>&gt; JavaScript SDK</a:t>
+            </a:r>
+            <a:r>
+              <a:rPr lang="ko-KR" altLang="en-US" dirty="0"/>
+              <a:t>도메인 추가</a:t>
+            </a:r>
+            <a:r>
+              <a:rPr lang="en-US" altLang="ko-KR" dirty="0"/>
+              <a:t>(80, 443</a:t>
+            </a:r>
+            <a:r>
+              <a:rPr lang="ko-KR" altLang="en-US" dirty="0"/>
+              <a:t>포트가 아니면 포트 작성 필</a:t>
+            </a:r>
+            <a:r>
+              <a:rPr lang="en-US" altLang="ko-KR" dirty="0"/>
+              <a:t>)</a:t>
+            </a:r>
+            <a:endParaRPr lang="ko-KR" altLang="en-US" dirty="0"/>
+          </a:p>
+        </p:txBody>
+      </p:sp>
+      <p:sp>
+        <p:nvSpPr>
+          <p:cNvPr id="13" name="TextBox 12">
+            <a:extLst>
+              <a:ext uri="{FF2B5EF4-FFF2-40B4-BE49-F238E27FC236}">
+                <a16:creationId xmlns:a16="http://schemas.microsoft.com/office/drawing/2014/main" id="{A9B63EE4-E015-378A-A7E0-60BFA990B161}"/>
+              </a:ext>
+            </a:extLst>
+          </p:cNvPr>
+          <p:cNvSpPr txBox="1"/>
+          <p:nvPr/>
+        </p:nvSpPr>
+        <p:spPr>
+          <a:xfrm>
+            <a:off x="180211" y="3839072"/>
+            <a:ext cx="5250155" cy="323165"/>
+          </a:xfrm>
+          <a:prstGeom prst="rect">
+            <a:avLst/>
+          </a:prstGeom>
+          <a:noFill/>
+        </p:spPr>
+        <p:txBody>
+          <a:bodyPr wrap="none" rtlCol="0">
+            <a:spAutoFit/>
+          </a:bodyPr>
+          <a:lstStyle/>
+          <a:p>
+            <a:r>
+              <a:rPr lang="en-US" altLang="ko-KR" sz="1500" dirty="0"/>
+              <a:t>3. </a:t>
+            </a:r>
+            <a:r>
+              <a:rPr lang="ko-KR" altLang="en-US" sz="1500" dirty="0"/>
+              <a:t>제품설정 </a:t>
+            </a:r>
+            <a:r>
+              <a:rPr lang="en-US" altLang="ko-KR" sz="1500" dirty="0"/>
+              <a:t>&gt; </a:t>
+            </a:r>
+            <a:r>
+              <a:rPr lang="ko-KR" altLang="en-US" sz="1500" dirty="0"/>
+              <a:t>카카오로그인 </a:t>
+            </a:r>
+            <a:r>
+              <a:rPr lang="en-US" altLang="ko-KR" sz="1500" dirty="0"/>
+              <a:t>&gt; </a:t>
+            </a:r>
+            <a:r>
+              <a:rPr lang="ko-KR" altLang="en-US" sz="1500" dirty="0"/>
+              <a:t>일반 </a:t>
+            </a:r>
+            <a:r>
+              <a:rPr lang="en-US" altLang="ko-KR" sz="1500" dirty="0"/>
+              <a:t>&gt; OFF</a:t>
+            </a:r>
+            <a:r>
+              <a:rPr lang="ko-KR" altLang="en-US" sz="1500" dirty="0"/>
+              <a:t>를 </a:t>
+            </a:r>
+            <a:r>
+              <a:rPr lang="en-US" altLang="ko-KR" sz="1500" dirty="0"/>
+              <a:t>ON</a:t>
+            </a:r>
+            <a:r>
+              <a:rPr lang="ko-KR" altLang="en-US" sz="1500" dirty="0"/>
+              <a:t>으로 설정</a:t>
+            </a:r>
+          </a:p>
+        </p:txBody>
+      </p:sp>
+      <p:sp>
+        <p:nvSpPr>
+          <p:cNvPr id="15" name="TextBox 14">
+            <a:extLst>
+              <a:ext uri="{FF2B5EF4-FFF2-40B4-BE49-F238E27FC236}">
+                <a16:creationId xmlns:a16="http://schemas.microsoft.com/office/drawing/2014/main" id="{34682E1F-59A5-37F3-B77B-732CB560EC6F}"/>
+              </a:ext>
+            </a:extLst>
+          </p:cNvPr>
+          <p:cNvSpPr txBox="1"/>
+          <p:nvPr/>
+        </p:nvSpPr>
+        <p:spPr>
+          <a:xfrm>
+            <a:off x="5807876" y="3839072"/>
+            <a:ext cx="6660798" cy="323165"/>
+          </a:xfrm>
+          <a:prstGeom prst="rect">
+            <a:avLst/>
+          </a:prstGeom>
+          <a:noFill/>
+        </p:spPr>
+        <p:txBody>
+          <a:bodyPr wrap="none" rtlCol="0">
+            <a:spAutoFit/>
+          </a:bodyPr>
+          <a:lstStyle/>
+          <a:p>
+            <a:r>
+              <a:rPr lang="en-US" altLang="ko-KR" sz="1500" dirty="0"/>
+              <a:t>4. </a:t>
+            </a:r>
+            <a:r>
+              <a:rPr lang="ko-KR" altLang="en-US" sz="1500" dirty="0"/>
+              <a:t>제품설명 </a:t>
+            </a:r>
+            <a:r>
+              <a:rPr lang="en-US" altLang="ko-KR" sz="1500" dirty="0"/>
+              <a:t>&gt; </a:t>
+            </a:r>
+            <a:r>
+              <a:rPr lang="ko-KR" altLang="en-US" sz="1500" dirty="0"/>
+              <a:t>카카오로그인 </a:t>
+            </a:r>
+            <a:r>
+              <a:rPr lang="en-US" altLang="ko-KR" sz="1500" dirty="0"/>
+              <a:t>&gt; </a:t>
+            </a:r>
+            <a:r>
+              <a:rPr lang="ko-KR" altLang="en-US" sz="1500" dirty="0"/>
+              <a:t>동의항목 설정</a:t>
+            </a:r>
+            <a:r>
+              <a:rPr lang="en-US" altLang="ko-KR" sz="1500" dirty="0"/>
+              <a:t>(</a:t>
+            </a:r>
+            <a:r>
+              <a:rPr lang="ko-KR" altLang="en-US" sz="1500" dirty="0"/>
+              <a:t>닉네임 </a:t>
+            </a:r>
+            <a:r>
+              <a:rPr lang="en-US" altLang="ko-KR" sz="1500" dirty="0"/>
+              <a:t>– </a:t>
+            </a:r>
+            <a:r>
+              <a:rPr lang="ko-KR" altLang="en-US" sz="1500" dirty="0"/>
+              <a:t>필수</a:t>
+            </a:r>
+            <a:r>
+              <a:rPr lang="en-US" altLang="ko-KR" sz="1500" dirty="0"/>
+              <a:t>, </a:t>
+            </a:r>
+            <a:r>
+              <a:rPr lang="ko-KR" altLang="en-US" sz="1500" dirty="0"/>
+              <a:t>이메일 </a:t>
+            </a:r>
+            <a:r>
+              <a:rPr lang="en-US" altLang="ko-KR" sz="1500" dirty="0"/>
+              <a:t>- </a:t>
+            </a:r>
+            <a:r>
+              <a:rPr lang="ko-KR" altLang="en-US" sz="1500" dirty="0"/>
+              <a:t>선택</a:t>
+            </a:r>
+            <a:r>
+              <a:rPr lang="en-US" altLang="ko-KR" sz="1500" dirty="0"/>
+              <a:t>)</a:t>
+            </a:r>
+            <a:endParaRPr lang="ko-KR" altLang="en-US" sz="1500" dirty="0"/>
+          </a:p>
+        </p:txBody>
+      </p:sp>
+      <p:sp>
+        <p:nvSpPr>
+          <p:cNvPr id="18" name="TextBox 17">
+            <a:extLst>
+              <a:ext uri="{FF2B5EF4-FFF2-40B4-BE49-F238E27FC236}">
+                <a16:creationId xmlns:a16="http://schemas.microsoft.com/office/drawing/2014/main" id="{4D7EC613-9D28-BC6A-383E-707A67543077}"/>
+              </a:ext>
+            </a:extLst>
+          </p:cNvPr>
+          <p:cNvSpPr txBox="1"/>
+          <p:nvPr/>
+        </p:nvSpPr>
+        <p:spPr>
+          <a:xfrm>
+            <a:off x="9979502" y="5722187"/>
+            <a:ext cx="2323068" cy="400110"/>
+          </a:xfrm>
+          <a:prstGeom prst="rect">
+            <a:avLst/>
+          </a:prstGeom>
+          <a:noFill/>
+        </p:spPr>
+        <p:txBody>
+          <a:bodyPr wrap="square">
+            <a:spAutoFit/>
+          </a:bodyPr>
+          <a:lstStyle/>
+          <a:p>
+            <a:r>
+              <a:rPr lang="ko-KR" altLang="en-US" sz="1000" dirty="0"/>
+              <a:t>회원 닉네임 설정</a:t>
+            </a:r>
+            <a:endParaRPr lang="en-US" altLang="ko-KR" sz="1000" dirty="0"/>
+          </a:p>
+          <a:p>
+            <a:r>
+              <a:rPr lang="ko-KR" altLang="en-US" sz="1000" dirty="0"/>
+              <a:t>회원가입 시 프로필 사진 자동 제공</a:t>
+            </a:r>
+            <a:endParaRPr lang="en-US" altLang="ko-KR" sz="1000" dirty="0"/>
+          </a:p>
+        </p:txBody>
+      </p:sp>
       <p:pic>
         <p:nvPicPr>
-          <p:cNvPr id="4" name="그림 3">
-            <a:extLst>
-              <a:ext uri="{FF2B5EF4-FFF2-40B4-BE49-F238E27FC236}">
-                <a16:creationId xmlns:a16="http://schemas.microsoft.com/office/drawing/2014/main" id="{1F59B476-2F98-F032-2141-58B317ED1C10}"/>
+          <p:cNvPr id="20" name="그림 19">
+            <a:extLst>
+              <a:ext uri="{FF2B5EF4-FFF2-40B4-BE49-F238E27FC236}">
+                <a16:creationId xmlns:a16="http://schemas.microsoft.com/office/drawing/2014/main" id="{062F8C78-C6DB-B01B-9193-CF8E72E32A3F}"/>
               </a:ext>
             </a:extLst>
           </p:cNvPr>
@@ -4498,8 +4268,8 @@
         </p:blipFill>
         <p:spPr>
           <a:xfrm>
-            <a:off x="436913" y="580677"/>
-            <a:ext cx="4989511" cy="5976972"/>
+            <a:off x="5865131" y="4208404"/>
+            <a:ext cx="4169672" cy="2231140"/>
           </a:xfrm>
           <a:prstGeom prst="rect">
             <a:avLst/>
@@ -4508,44 +4278,202 @@
       </p:pic>
       <p:sp>
         <p:nvSpPr>
-          <p:cNvPr id="7" name="TextBox 6">
-            <a:extLst>
-              <a:ext uri="{FF2B5EF4-FFF2-40B4-BE49-F238E27FC236}">
-                <a16:creationId xmlns:a16="http://schemas.microsoft.com/office/drawing/2014/main" id="{A212E4E6-0668-65CE-11C4-844E29439095}"/>
-              </a:ext>
-            </a:extLst>
-          </p:cNvPr>
-          <p:cNvSpPr txBox="1"/>
-          <p:nvPr/>
-        </p:nvSpPr>
-        <p:spPr>
-          <a:xfrm>
-            <a:off x="378775" y="115685"/>
-            <a:ext cx="6097112" cy="369332"/>
+          <p:cNvPr id="8" name="직사각형 7">
+            <a:extLst>
+              <a:ext uri="{FF2B5EF4-FFF2-40B4-BE49-F238E27FC236}">
+                <a16:creationId xmlns:a16="http://schemas.microsoft.com/office/drawing/2014/main" id="{3E4DDC40-1DB1-498D-80DD-2D45C3ABEA03}"/>
+              </a:ext>
+            </a:extLst>
+          </p:cNvPr>
+          <p:cNvSpPr/>
+          <p:nvPr/>
+        </p:nvSpPr>
+        <p:spPr>
+          <a:xfrm>
+            <a:off x="7581313" y="5704522"/>
+            <a:ext cx="2368030" cy="549440"/>
           </a:xfrm>
           <a:prstGeom prst="rect">
             <a:avLst/>
           </a:prstGeom>
           <a:noFill/>
-        </p:spPr>
-        <p:txBody>
-          <a:bodyPr wrap="square">
-            <a:spAutoFit/>
-          </a:bodyPr>
-          <a:lstStyle/>
-          <a:p>
-            <a:r>
-              <a:rPr lang="ko-KR" altLang="en-US" dirty="0" err="1"/>
-              <a:t>MemberType.jsp</a:t>
-            </a:r>
-            <a:endParaRPr lang="ko-KR" altLang="en-US" dirty="0"/>
+          <a:ln>
+            <a:solidFill>
+              <a:srgbClr val="FF0000"/>
+            </a:solidFill>
+          </a:ln>
+        </p:spPr>
+        <p:style>
+          <a:lnRef idx="2">
+            <a:schemeClr val="accent1">
+              <a:shade val="50000"/>
+            </a:schemeClr>
+          </a:lnRef>
+          <a:fillRef idx="1">
+            <a:schemeClr val="accent1"/>
+          </a:fillRef>
+          <a:effectRef idx="0">
+            <a:schemeClr val="accent1"/>
+          </a:effectRef>
+          <a:fontRef idx="minor">
+            <a:schemeClr val="lt1"/>
+          </a:fontRef>
+        </p:style>
+        <p:txBody>
+          <a:bodyPr rtlCol="0" anchor="ctr"/>
+          <a:lstStyle/>
+          <a:p>
+            <a:pPr algn="ctr"/>
+            <a:endParaRPr lang="ko-KR" altLang="en-US"/>
+          </a:p>
+        </p:txBody>
+      </p:sp>
+      <p:pic>
+        <p:nvPicPr>
+          <p:cNvPr id="5" name="그림 4">
+            <a:extLst>
+              <a:ext uri="{FF2B5EF4-FFF2-40B4-BE49-F238E27FC236}">
+                <a16:creationId xmlns:a16="http://schemas.microsoft.com/office/drawing/2014/main" id="{20E0CAC4-6D46-8008-D662-EE7EEB335C87}"/>
+              </a:ext>
+            </a:extLst>
+          </p:cNvPr>
+          <p:cNvPicPr>
+            <a:picLocks noChangeAspect="1"/>
+          </p:cNvPicPr>
+          <p:nvPr/>
+        </p:nvPicPr>
+        <p:blipFill>
+          <a:blip r:embed="rId3"/>
+          <a:stretch>
+            <a:fillRect/>
+          </a:stretch>
+        </p:blipFill>
+        <p:spPr>
+          <a:xfrm>
+            <a:off x="286384" y="4308429"/>
+            <a:ext cx="5142865" cy="2257843"/>
+          </a:xfrm>
+          <a:prstGeom prst="rect">
+            <a:avLst/>
+          </a:prstGeom>
+        </p:spPr>
+      </p:pic>
+      <p:pic>
+        <p:nvPicPr>
+          <p:cNvPr id="3" name="그림 2">
+            <a:extLst>
+              <a:ext uri="{FF2B5EF4-FFF2-40B4-BE49-F238E27FC236}">
+                <a16:creationId xmlns:a16="http://schemas.microsoft.com/office/drawing/2014/main" id="{37ACDFE2-4E02-42B8-40C3-0CE2A2C89796}"/>
+              </a:ext>
+            </a:extLst>
+          </p:cNvPr>
+          <p:cNvPicPr>
+            <a:picLocks noChangeAspect="1"/>
+          </p:cNvPicPr>
+          <p:nvPr/>
+        </p:nvPicPr>
+        <p:blipFill>
+          <a:blip r:embed="rId4"/>
+          <a:stretch>
+            <a:fillRect/>
+          </a:stretch>
+        </p:blipFill>
+        <p:spPr>
+          <a:xfrm>
+            <a:off x="869937" y="888490"/>
+            <a:ext cx="1885361" cy="2519352"/>
+          </a:xfrm>
+          <a:prstGeom prst="rect">
+            <a:avLst/>
+          </a:prstGeom>
+        </p:spPr>
+      </p:pic>
+      <p:pic>
+        <p:nvPicPr>
+          <p:cNvPr id="10" name="그림 9">
+            <a:extLst>
+              <a:ext uri="{FF2B5EF4-FFF2-40B4-BE49-F238E27FC236}">
+                <a16:creationId xmlns:a16="http://schemas.microsoft.com/office/drawing/2014/main" id="{22C14982-AF9B-310D-EADB-F5543C210182}"/>
+              </a:ext>
+            </a:extLst>
+          </p:cNvPr>
+          <p:cNvPicPr>
+            <a:picLocks noChangeAspect="1"/>
+          </p:cNvPicPr>
+          <p:nvPr/>
+        </p:nvPicPr>
+        <p:blipFill>
+          <a:blip r:embed="rId5"/>
+          <a:stretch>
+            <a:fillRect/>
+          </a:stretch>
+        </p:blipFill>
+        <p:spPr>
+          <a:xfrm>
+            <a:off x="4585337" y="1239922"/>
+            <a:ext cx="3214883" cy="2472385"/>
+          </a:xfrm>
+          <a:prstGeom prst="rect">
+            <a:avLst/>
+          </a:prstGeom>
+        </p:spPr>
+      </p:pic>
+      <p:sp>
+        <p:nvSpPr>
+          <p:cNvPr id="14" name="직사각형 13">
+            <a:extLst>
+              <a:ext uri="{FF2B5EF4-FFF2-40B4-BE49-F238E27FC236}">
+                <a16:creationId xmlns:a16="http://schemas.microsoft.com/office/drawing/2014/main" id="{F75F3696-0629-9849-34B9-885CB1AA2C1D}"/>
+              </a:ext>
+            </a:extLst>
+          </p:cNvPr>
+          <p:cNvSpPr/>
+          <p:nvPr/>
+        </p:nvSpPr>
+        <p:spPr>
+          <a:xfrm>
+            <a:off x="4585337" y="2407002"/>
+            <a:ext cx="2061238" cy="241111"/>
+          </a:xfrm>
+          <a:prstGeom prst="rect">
+            <a:avLst/>
+          </a:prstGeom>
+          <a:noFill/>
+          <a:ln>
+            <a:solidFill>
+              <a:srgbClr val="FF0000"/>
+            </a:solidFill>
+          </a:ln>
+        </p:spPr>
+        <p:style>
+          <a:lnRef idx="2">
+            <a:schemeClr val="accent1">
+              <a:shade val="50000"/>
+            </a:schemeClr>
+          </a:lnRef>
+          <a:fillRef idx="1">
+            <a:schemeClr val="accent1"/>
+          </a:fillRef>
+          <a:effectRef idx="0">
+            <a:schemeClr val="accent1"/>
+          </a:effectRef>
+          <a:fontRef idx="minor">
+            <a:schemeClr val="lt1"/>
+          </a:fontRef>
+        </p:style>
+        <p:txBody>
+          <a:bodyPr rtlCol="0" anchor="ctr"/>
+          <a:lstStyle/>
+          <a:p>
+            <a:pPr algn="ctr"/>
+            <a:endParaRPr lang="ko-KR" altLang="en-US"/>
           </a:p>
         </p:txBody>
       </p:sp>
     </p:spTree>
     <p:extLst>
       <p:ext uri="{BB962C8B-B14F-4D97-AF65-F5344CB8AC3E}">
-        <p14:creationId xmlns:p14="http://schemas.microsoft.com/office/powerpoint/2010/main" val="3446417906"/>
+        <p14:creationId xmlns:p14="http://schemas.microsoft.com/office/powerpoint/2010/main" val="1727405086"/>
       </p:ext>
     </p:extLst>
   </p:cSld>
@@ -4572,47 +4500,108 @@
           <a:chExt cx="0" cy="0"/>
         </a:xfrm>
       </p:grpSpPr>
-      <p:sp>
-        <p:nvSpPr>
-          <p:cNvPr id="2" name="직사각형 1">
-            <a:extLst>
-              <a:ext uri="{FF2B5EF4-FFF2-40B4-BE49-F238E27FC236}">
-                <a16:creationId xmlns:a16="http://schemas.microsoft.com/office/drawing/2014/main" id="{48CE9A20-BE44-4749-A488-40AEF538D1DE}"/>
-              </a:ext>
-            </a:extLst>
-          </p:cNvPr>
-          <p:cNvSpPr/>
-          <p:nvPr/>
-        </p:nvSpPr>
-        <p:spPr>
-          <a:xfrm>
-            <a:off x="181026" y="220807"/>
-            <a:ext cx="1084079" cy="369332"/>
-          </a:xfrm>
-          <a:prstGeom prst="rect">
-            <a:avLst/>
-          </a:prstGeom>
-        </p:spPr>
-        <p:txBody>
-          <a:bodyPr wrap="none">
+      <p:pic>
+        <p:nvPicPr>
+          <p:cNvPr id="4" name="그림 3">
+            <a:extLst>
+              <a:ext uri="{FF2B5EF4-FFF2-40B4-BE49-F238E27FC236}">
+                <a16:creationId xmlns:a16="http://schemas.microsoft.com/office/drawing/2014/main" id="{E21EF111-EA5C-AF8A-E358-446782531D47}"/>
+              </a:ext>
+            </a:extLst>
+          </p:cNvPr>
+          <p:cNvPicPr>
+            <a:picLocks noChangeAspect="1"/>
+          </p:cNvPicPr>
+          <p:nvPr/>
+        </p:nvPicPr>
+        <p:blipFill>
+          <a:blip r:embed="rId2"/>
+          <a:stretch>
+            <a:fillRect/>
+          </a:stretch>
+        </p:blipFill>
+        <p:spPr>
+          <a:xfrm>
+            <a:off x="7908886" y="1513007"/>
+            <a:ext cx="2299721" cy="3273558"/>
+          </a:xfrm>
+          <a:prstGeom prst="rect">
+            <a:avLst/>
+          </a:prstGeom>
+        </p:spPr>
+      </p:pic>
+      <p:sp>
+        <p:nvSpPr>
+          <p:cNvPr id="5" name="TextBox 4">
+            <a:extLst>
+              <a:ext uri="{FF2B5EF4-FFF2-40B4-BE49-F238E27FC236}">
+                <a16:creationId xmlns:a16="http://schemas.microsoft.com/office/drawing/2014/main" id="{E301BB7B-FCA1-5632-2F52-D18E4947F7B7}"/>
+              </a:ext>
+            </a:extLst>
+          </p:cNvPr>
+          <p:cNvSpPr txBox="1"/>
+          <p:nvPr/>
+        </p:nvSpPr>
+        <p:spPr>
+          <a:xfrm>
+            <a:off x="386499" y="405352"/>
+            <a:ext cx="5604419" cy="369332"/>
+          </a:xfrm>
+          <a:prstGeom prst="rect">
+            <a:avLst/>
+          </a:prstGeom>
+          <a:noFill/>
+        </p:spPr>
+        <p:txBody>
+          <a:bodyPr wrap="none" rtlCol="0">
             <a:spAutoFit/>
           </a:bodyPr>
           <a:lstStyle/>
           <a:p>
             <a:r>
-              <a:rPr lang="ko-KR" altLang="en-US" dirty="0" err="1"/>
-              <a:t>LoginVO</a:t>
-            </a:r>
-            <a:endParaRPr lang="ko-KR" altLang="en-US" dirty="0"/>
-          </a:p>
-        </p:txBody>
-      </p:sp>
-      <p:sp>
-        <p:nvSpPr>
-          <p:cNvPr id="6" name="직사각형 5">
-            <a:extLst>
-              <a:ext uri="{FF2B5EF4-FFF2-40B4-BE49-F238E27FC236}">
-                <a16:creationId xmlns:a16="http://schemas.microsoft.com/office/drawing/2014/main" id="{195FE099-2597-4455-A046-E1BFB43DB060}"/>
+              <a:rPr lang="ko-KR" altLang="en-US" dirty="0"/>
+              <a:t>동의화면 미리보기 후 개발 시 이렇게 나오는지 확인</a:t>
+            </a:r>
+            <a:endParaRPr lang="en-US" altLang="ko-KR" dirty="0"/>
+          </a:p>
+        </p:txBody>
+      </p:sp>
+      <p:pic>
+        <p:nvPicPr>
+          <p:cNvPr id="3" name="그림 2">
+            <a:extLst>
+              <a:ext uri="{FF2B5EF4-FFF2-40B4-BE49-F238E27FC236}">
+                <a16:creationId xmlns:a16="http://schemas.microsoft.com/office/drawing/2014/main" id="{4F283734-B6B3-588E-0F51-ADADA6297C87}"/>
+              </a:ext>
+            </a:extLst>
+          </p:cNvPr>
+          <p:cNvPicPr>
+            <a:picLocks noChangeAspect="1"/>
+          </p:cNvPicPr>
+          <p:nvPr/>
+        </p:nvPicPr>
+        <p:blipFill>
+          <a:blip r:embed="rId3"/>
+          <a:stretch>
+            <a:fillRect/>
+          </a:stretch>
+        </p:blipFill>
+        <p:spPr>
+          <a:xfrm>
+            <a:off x="838200" y="1576135"/>
+            <a:ext cx="4898141" cy="3000411"/>
+          </a:xfrm>
+          <a:prstGeom prst="rect">
+            <a:avLst/>
+          </a:prstGeom>
+        </p:spPr>
+      </p:pic>
+      <p:sp>
+        <p:nvSpPr>
+          <p:cNvPr id="6" name="화살표: 오른쪽 5">
+            <a:extLst>
+              <a:ext uri="{FF2B5EF4-FFF2-40B4-BE49-F238E27FC236}">
+                <a16:creationId xmlns:a16="http://schemas.microsoft.com/office/drawing/2014/main" id="{51321D32-8B08-2AB1-8B1D-CEB1F72CB4E4}"/>
               </a:ext>
             </a:extLst>
           </p:cNvPr>
@@ -4621,57 +4610,42 @@
         </p:nvSpPr>
         <p:spPr>
           <a:xfrm>
-            <a:off x="181026" y="723055"/>
-            <a:ext cx="6096000" cy="646331"/>
-          </a:xfrm>
-          <a:prstGeom prst="rect">
-            <a:avLst/>
-          </a:prstGeom>
-        </p:spPr>
-        <p:txBody>
-          <a:bodyPr>
-            <a:spAutoFit/>
-          </a:bodyPr>
-          <a:lstStyle/>
-          <a:p>
-            <a:r>
-              <a:rPr lang="en-US" altLang="ko-KR" dirty="0"/>
-              <a:t>/** </a:t>
-            </a:r>
-            <a:r>
-              <a:rPr lang="ko-KR" altLang="en-US" dirty="0" err="1"/>
-              <a:t>로그인타입</a:t>
-            </a:r>
-            <a:r>
-              <a:rPr lang="ko-KR" altLang="en-US" dirty="0"/>
-              <a:t> *</a:t>
-            </a:r>
-            <a:r>
-              <a:rPr lang="en-US" altLang="ko-KR" dirty="0"/>
-              <a:t>/</a:t>
-            </a:r>
-          </a:p>
-          <a:p>
-            <a:r>
-              <a:rPr lang="en-US" altLang="ko-KR" dirty="0"/>
-              <a:t>private String </a:t>
-            </a:r>
-            <a:r>
-              <a:rPr lang="en-US" altLang="ko-KR" dirty="0" err="1"/>
-              <a:t>loginType</a:t>
-            </a:r>
-            <a:r>
-              <a:rPr lang="en-US" altLang="ko-KR" dirty="0"/>
-              <a:t>;</a:t>
-            </a:r>
-            <a:endParaRPr lang="ko-KR" altLang="en-US" dirty="0"/>
+            <a:off x="6160770" y="2754630"/>
+            <a:ext cx="731520" cy="419100"/>
+          </a:xfrm>
+          <a:prstGeom prst="rightArrow">
+            <a:avLst/>
+          </a:prstGeom>
+        </p:spPr>
+        <p:style>
+          <a:lnRef idx="2">
+            <a:schemeClr val="accent1">
+              <a:shade val="15000"/>
+            </a:schemeClr>
+          </a:lnRef>
+          <a:fillRef idx="1">
+            <a:schemeClr val="accent1"/>
+          </a:fillRef>
+          <a:effectRef idx="0">
+            <a:schemeClr val="accent1"/>
+          </a:effectRef>
+          <a:fontRef idx="minor">
+            <a:schemeClr val="lt1"/>
+          </a:fontRef>
+        </p:style>
+        <p:txBody>
+          <a:bodyPr rtlCol="0" anchor="ctr"/>
+          <a:lstStyle/>
+          <a:p>
+            <a:pPr algn="ctr"/>
+            <a:endParaRPr lang="ko-KR" altLang="en-US"/>
           </a:p>
         </p:txBody>
       </p:sp>
     </p:spTree>
     <p:extLst>
       <p:ext uri="{BB962C8B-B14F-4D97-AF65-F5344CB8AC3E}">
-        <p14:creationId xmlns:p14="http://schemas.microsoft.com/office/powerpoint/2010/main" val="3073481492"/>
+        <p14:creationId xmlns:p14="http://schemas.microsoft.com/office/powerpoint/2010/main" val="1127450149"/>
       </p:ext>
     </p:extLst>
   </p:cSld>
@@ -4698,12 +4672,48 @@
           <a:chExt cx="0" cy="0"/>
         </a:xfrm>
       </p:grpSpPr>
+      <p:sp>
+        <p:nvSpPr>
+          <p:cNvPr id="3" name="TextBox 2">
+            <a:extLst>
+              <a:ext uri="{FF2B5EF4-FFF2-40B4-BE49-F238E27FC236}">
+                <a16:creationId xmlns:a16="http://schemas.microsoft.com/office/drawing/2014/main" id="{7C491AA6-18F5-80C3-2DE7-18544442ECAE}"/>
+              </a:ext>
+            </a:extLst>
+          </p:cNvPr>
+          <p:cNvSpPr txBox="1"/>
+          <p:nvPr/>
+        </p:nvSpPr>
+        <p:spPr>
+          <a:xfrm>
+            <a:off x="452194" y="327209"/>
+            <a:ext cx="6097112" cy="369332"/>
+          </a:xfrm>
+          <a:prstGeom prst="rect">
+            <a:avLst/>
+          </a:prstGeom>
+          <a:noFill/>
+        </p:spPr>
+        <p:txBody>
+          <a:bodyPr wrap="square">
+            <a:spAutoFit/>
+          </a:bodyPr>
+          <a:lstStyle/>
+          <a:p>
+            <a:r>
+              <a:rPr lang="ko-KR" altLang="en-US" dirty="0" err="1"/>
+              <a:t>JoinController</a:t>
+            </a:r>
+            <a:endParaRPr lang="ko-KR" altLang="en-US" dirty="0"/>
+          </a:p>
+        </p:txBody>
+      </p:sp>
       <p:pic>
         <p:nvPicPr>
-          <p:cNvPr id="7" name="그림 6">
-            <a:extLst>
-              <a:ext uri="{FF2B5EF4-FFF2-40B4-BE49-F238E27FC236}">
-                <a16:creationId xmlns:a16="http://schemas.microsoft.com/office/drawing/2014/main" id="{DE876272-2EA5-1D51-5082-EA5EF325187F}"/>
+          <p:cNvPr id="6" name="그림 5">
+            <a:extLst>
+              <a:ext uri="{FF2B5EF4-FFF2-40B4-BE49-F238E27FC236}">
+                <a16:creationId xmlns:a16="http://schemas.microsoft.com/office/drawing/2014/main" id="{595971F8-5E14-A1F5-FD93-A0F72D89B6DA}"/>
               </a:ext>
             </a:extLst>
           </p:cNvPr>
@@ -4720,8 +4730,8 @@
         </p:blipFill>
         <p:spPr>
           <a:xfrm>
-            <a:off x="331984" y="852383"/>
-            <a:ext cx="10687050" cy="3124200"/>
+            <a:off x="477153" y="785444"/>
+            <a:ext cx="8580079" cy="4005574"/>
           </a:xfrm>
           <a:prstGeom prst="rect">
             <a:avLst/>
@@ -4730,44 +4740,60 @@
       </p:pic>
       <p:sp>
         <p:nvSpPr>
-          <p:cNvPr id="9" name="TextBox 8">
-            <a:extLst>
-              <a:ext uri="{FF2B5EF4-FFF2-40B4-BE49-F238E27FC236}">
-                <a16:creationId xmlns:a16="http://schemas.microsoft.com/office/drawing/2014/main" id="{921DFA93-7336-76F6-908D-7458E8B4EF6B}"/>
-              </a:ext>
-            </a:extLst>
-          </p:cNvPr>
-          <p:cNvSpPr txBox="1"/>
-          <p:nvPr/>
-        </p:nvSpPr>
-        <p:spPr>
-          <a:xfrm>
-            <a:off x="331984" y="295894"/>
-            <a:ext cx="6097112" cy="369332"/>
+          <p:cNvPr id="8" name="직사각형 7">
+            <a:extLst>
+              <a:ext uri="{FF2B5EF4-FFF2-40B4-BE49-F238E27FC236}">
+                <a16:creationId xmlns:a16="http://schemas.microsoft.com/office/drawing/2014/main" id="{F9474E48-6DA4-65E8-CF5D-2F93A4F3A080}"/>
+              </a:ext>
+            </a:extLst>
+          </p:cNvPr>
+          <p:cNvSpPr/>
+          <p:nvPr/>
+        </p:nvSpPr>
+        <p:spPr>
+          <a:xfrm>
+            <a:off x="692669" y="1237440"/>
+            <a:ext cx="4279797" cy="1298852"/>
           </a:xfrm>
           <a:prstGeom prst="rect">
             <a:avLst/>
           </a:prstGeom>
           <a:noFill/>
-        </p:spPr>
-        <p:txBody>
-          <a:bodyPr wrap="square">
-            <a:spAutoFit/>
-          </a:bodyPr>
-          <a:lstStyle/>
-          <a:p>
-            <a:r>
-              <a:rPr lang="ko-KR" altLang="en-US" dirty="0" err="1"/>
-              <a:t>LoginController</a:t>
-            </a:r>
-            <a:endParaRPr lang="ko-KR" altLang="en-US" dirty="0"/>
+          <a:ln>
+            <a:solidFill>
+              <a:srgbClr val="FF0000"/>
+            </a:solidFill>
+          </a:ln>
+        </p:spPr>
+        <p:style>
+          <a:lnRef idx="2">
+            <a:schemeClr val="accent1">
+              <a:shade val="50000"/>
+            </a:schemeClr>
+          </a:lnRef>
+          <a:fillRef idx="1">
+            <a:schemeClr val="accent1"/>
+          </a:fillRef>
+          <a:effectRef idx="0">
+            <a:schemeClr val="accent1"/>
+          </a:effectRef>
+          <a:fontRef idx="minor">
+            <a:schemeClr val="lt1"/>
+          </a:fontRef>
+        </p:style>
+        <p:txBody>
+          <a:bodyPr rtlCol="0" anchor="ctr"/>
+          <a:lstStyle/>
+          <a:p>
+            <a:pPr algn="ctr"/>
+            <a:endParaRPr lang="ko-KR" altLang="en-US"/>
           </a:p>
         </p:txBody>
       </p:sp>
     </p:spTree>
     <p:extLst>
       <p:ext uri="{BB962C8B-B14F-4D97-AF65-F5344CB8AC3E}">
-        <p14:creationId xmlns:p14="http://schemas.microsoft.com/office/powerpoint/2010/main" val="2411082277"/>
+        <p14:creationId xmlns:p14="http://schemas.microsoft.com/office/powerpoint/2010/main" val="601723413"/>
       </p:ext>
     </p:extLst>
   </p:cSld>
@@ -4796,10 +4822,10 @@
       </p:grpSpPr>
       <p:pic>
         <p:nvPicPr>
-          <p:cNvPr id="3" name="그림 2">
-            <a:extLst>
-              <a:ext uri="{FF2B5EF4-FFF2-40B4-BE49-F238E27FC236}">
-                <a16:creationId xmlns:a16="http://schemas.microsoft.com/office/drawing/2014/main" id="{8FFC74A9-CCF4-EC4B-2B49-C6887C1454D1}"/>
+          <p:cNvPr id="4" name="그림 3">
+            <a:extLst>
+              <a:ext uri="{FF2B5EF4-FFF2-40B4-BE49-F238E27FC236}">
+                <a16:creationId xmlns:a16="http://schemas.microsoft.com/office/drawing/2014/main" id="{1F59B476-2F98-F032-2141-58B317ED1C10}"/>
               </a:ext>
             </a:extLst>
           </p:cNvPr>
@@ -4816,8 +4842,8 @@
         </p:blipFill>
         <p:spPr>
           <a:xfrm>
-            <a:off x="2247835" y="0"/>
-            <a:ext cx="7696329" cy="6858000"/>
+            <a:off x="436913" y="580677"/>
+            <a:ext cx="4989511" cy="5976972"/>
           </a:xfrm>
           <a:prstGeom prst="rect">
             <a:avLst/>
@@ -4826,10 +4852,10 @@
       </p:pic>
       <p:sp>
         <p:nvSpPr>
-          <p:cNvPr id="5" name="TextBox 4">
-            <a:extLst>
-              <a:ext uri="{FF2B5EF4-FFF2-40B4-BE49-F238E27FC236}">
-                <a16:creationId xmlns:a16="http://schemas.microsoft.com/office/drawing/2014/main" id="{BD48332D-B9EB-B7D2-1C77-36DF37C24CC1}"/>
+          <p:cNvPr id="7" name="TextBox 6">
+            <a:extLst>
+              <a:ext uri="{FF2B5EF4-FFF2-40B4-BE49-F238E27FC236}">
+                <a16:creationId xmlns:a16="http://schemas.microsoft.com/office/drawing/2014/main" id="{A212E4E6-0668-65CE-11C4-844E29439095}"/>
               </a:ext>
             </a:extLst>
           </p:cNvPr>
@@ -4838,7 +4864,7 @@
         </p:nvSpPr>
         <p:spPr>
           <a:xfrm>
-            <a:off x="218588" y="229149"/>
+            <a:off x="378775" y="115685"/>
             <a:ext cx="6097112" cy="369332"/>
           </a:xfrm>
           <a:prstGeom prst="rect">
@@ -4854,7 +4880,7 @@
           <a:p>
             <a:r>
               <a:rPr lang="ko-KR" altLang="en-US" dirty="0" err="1"/>
-              <a:t>Login.jsp</a:t>
+              <a:t>MemberType.jsp</a:t>
             </a:r>
             <a:endParaRPr lang="ko-KR" altLang="en-US" dirty="0"/>
           </a:p>
@@ -4863,7 +4889,7 @@
     </p:spTree>
     <p:extLst>
       <p:ext uri="{BB962C8B-B14F-4D97-AF65-F5344CB8AC3E}">
-        <p14:creationId xmlns:p14="http://schemas.microsoft.com/office/powerpoint/2010/main" val="671763046"/>
+        <p14:creationId xmlns:p14="http://schemas.microsoft.com/office/powerpoint/2010/main" val="3446417906"/>
       </p:ext>
     </p:extLst>
   </p:cSld>
@@ -4890,93 +4916,47 @@
           <a:chExt cx="0" cy="0"/>
         </a:xfrm>
       </p:grpSpPr>
-      <p:cxnSp>
-        <p:nvCxnSpPr>
-          <p:cNvPr id="7" name="직선 화살표 연결선 6">
-            <a:extLst>
-              <a:ext uri="{FF2B5EF4-FFF2-40B4-BE49-F238E27FC236}">
-                <a16:creationId xmlns:a16="http://schemas.microsoft.com/office/drawing/2014/main" id="{DD7B584D-3866-4A67-AD76-209306499FFB}"/>
-              </a:ext>
-            </a:extLst>
-          </p:cNvPr>
-          <p:cNvCxnSpPr>
-            <a:cxnSpLocks/>
-            <a:stCxn id="15" idx="6"/>
-            <a:endCxn id="16" idx="1"/>
-          </p:cNvCxnSpPr>
-          <p:nvPr/>
-        </p:nvCxnSpPr>
-        <p:spPr>
-          <a:xfrm flipV="1">
-            <a:off x="2487930" y="1116330"/>
-            <a:ext cx="1832610" cy="1904"/>
-          </a:xfrm>
-          <a:prstGeom prst="straightConnector1">
-            <a:avLst/>
-          </a:prstGeom>
-          <a:ln>
-            <a:solidFill>
-              <a:srgbClr val="FF0000"/>
-            </a:solidFill>
-            <a:tailEnd type="triangle"/>
-          </a:ln>
-        </p:spPr>
-        <p:style>
-          <a:lnRef idx="1">
-            <a:schemeClr val="accent1"/>
-          </a:lnRef>
-          <a:fillRef idx="0">
-            <a:schemeClr val="accent1"/>
-          </a:fillRef>
-          <a:effectRef idx="0">
-            <a:schemeClr val="accent1"/>
-          </a:effectRef>
-          <a:fontRef idx="minor">
-            <a:schemeClr val="tx1"/>
-          </a:fontRef>
-        </p:style>
-      </p:cxnSp>
-      <p:sp>
-        <p:nvSpPr>
-          <p:cNvPr id="10" name="TextBox 9">
-            <a:extLst>
-              <a:ext uri="{FF2B5EF4-FFF2-40B4-BE49-F238E27FC236}">
-                <a16:creationId xmlns:a16="http://schemas.microsoft.com/office/drawing/2014/main" id="{9D9CD6A6-2AAC-42CA-A8CF-3A6D4ED66081}"/>
-              </a:ext>
-            </a:extLst>
-          </p:cNvPr>
-          <p:cNvSpPr txBox="1"/>
-          <p:nvPr/>
-        </p:nvSpPr>
-        <p:spPr>
-          <a:xfrm>
-            <a:off x="1985010" y="1503164"/>
-            <a:ext cx="2820003" cy="369332"/>
-          </a:xfrm>
-          <a:prstGeom prst="rect">
-            <a:avLst/>
-          </a:prstGeom>
-          <a:noFill/>
-        </p:spPr>
-        <p:txBody>
-          <a:bodyPr wrap="none" rtlCol="0">
+      <p:sp>
+        <p:nvSpPr>
+          <p:cNvPr id="2" name="직사각형 1">
+            <a:extLst>
+              <a:ext uri="{FF2B5EF4-FFF2-40B4-BE49-F238E27FC236}">
+                <a16:creationId xmlns:a16="http://schemas.microsoft.com/office/drawing/2014/main" id="{48CE9A20-BE44-4749-A488-40AEF538D1DE}"/>
+              </a:ext>
+            </a:extLst>
+          </p:cNvPr>
+          <p:cNvSpPr/>
+          <p:nvPr/>
+        </p:nvSpPr>
+        <p:spPr>
+          <a:xfrm>
+            <a:off x="181026" y="220807"/>
+            <a:ext cx="1084079" cy="369332"/>
+          </a:xfrm>
+          <a:prstGeom prst="rect">
+            <a:avLst/>
+          </a:prstGeom>
+        </p:spPr>
+        <p:txBody>
+          <a:bodyPr wrap="none">
             <a:spAutoFit/>
           </a:bodyPr>
           <a:lstStyle/>
           <a:p>
             <a:r>
-              <a:rPr lang="ko-KR" altLang="en-US" dirty="0"/>
-              <a:t>로그인 인증 주소 값 생성</a:t>
-            </a:r>
-          </a:p>
-        </p:txBody>
-      </p:sp>
-      <p:sp>
-        <p:nvSpPr>
-          <p:cNvPr id="15" name="타원 14">
-            <a:extLst>
-              <a:ext uri="{FF2B5EF4-FFF2-40B4-BE49-F238E27FC236}">
-                <a16:creationId xmlns:a16="http://schemas.microsoft.com/office/drawing/2014/main" id="{4762F075-CA97-4BE5-A149-F0A7228DA68A}"/>
+              <a:rPr lang="ko-KR" altLang="en-US" dirty="0" err="1"/>
+              <a:t>LoginVO</a:t>
+            </a:r>
+            <a:endParaRPr lang="ko-KR" altLang="en-US" dirty="0"/>
+          </a:p>
+        </p:txBody>
+      </p:sp>
+      <p:sp>
+        <p:nvSpPr>
+          <p:cNvPr id="6" name="직사각형 5">
+            <a:extLst>
+              <a:ext uri="{FF2B5EF4-FFF2-40B4-BE49-F238E27FC236}">
+                <a16:creationId xmlns:a16="http://schemas.microsoft.com/office/drawing/2014/main" id="{195FE099-2597-4455-A046-E1BFB43DB060}"/>
               </a:ext>
             </a:extLst>
           </p:cNvPr>
@@ -4985,1318 +4965,57 @@
         </p:nvSpPr>
         <p:spPr>
           <a:xfrm>
-            <a:off x="1236345" y="768190"/>
-            <a:ext cx="1251585" cy="700088"/>
-          </a:xfrm>
-          <a:prstGeom prst="ellipse">
-            <a:avLst/>
-          </a:prstGeom>
-          <a:noFill/>
-          <a:ln>
-            <a:solidFill>
-              <a:schemeClr val="tx1"/>
-            </a:solidFill>
-          </a:ln>
-        </p:spPr>
-        <p:style>
-          <a:lnRef idx="2">
-            <a:schemeClr val="accent1">
-              <a:shade val="50000"/>
-            </a:schemeClr>
-          </a:lnRef>
-          <a:fillRef idx="1">
-            <a:schemeClr val="accent1"/>
-          </a:fillRef>
-          <a:effectRef idx="0">
-            <a:schemeClr val="accent1"/>
-          </a:effectRef>
-          <a:fontRef idx="minor">
-            <a:schemeClr val="lt1"/>
-          </a:fontRef>
-        </p:style>
-        <p:txBody>
-          <a:bodyPr rtlCol="0" anchor="ctr"/>
-          <a:lstStyle/>
-          <a:p>
-            <a:pPr algn="ctr"/>
-            <a:r>
-              <a:rPr lang="ko-KR" altLang="en-US">
-                <a:solidFill>
-                  <a:schemeClr val="tx1"/>
-                </a:solidFill>
-              </a:rPr>
-              <a:t>사용자</a:t>
-            </a:r>
-            <a:endParaRPr lang="ko-KR" altLang="en-US" dirty="0">
-              <a:solidFill>
-                <a:schemeClr val="tx1"/>
-              </a:solidFill>
-            </a:endParaRPr>
-          </a:p>
-        </p:txBody>
-      </p:sp>
-      <p:sp>
-        <p:nvSpPr>
-          <p:cNvPr id="16" name="직사각형 15">
-            <a:extLst>
-              <a:ext uri="{FF2B5EF4-FFF2-40B4-BE49-F238E27FC236}">
-                <a16:creationId xmlns:a16="http://schemas.microsoft.com/office/drawing/2014/main" id="{EFC2B610-395D-466D-A4BE-D09AF22DE2E2}"/>
-              </a:ext>
-            </a:extLst>
-          </p:cNvPr>
-          <p:cNvSpPr/>
-          <p:nvPr/>
-        </p:nvSpPr>
-        <p:spPr>
-          <a:xfrm>
-            <a:off x="4320540" y="830580"/>
-            <a:ext cx="1664970" cy="571500"/>
-          </a:xfrm>
-          <a:prstGeom prst="rect">
-            <a:avLst/>
-          </a:prstGeom>
-          <a:noFill/>
-          <a:ln>
-            <a:solidFill>
-              <a:schemeClr val="tx1"/>
-            </a:solidFill>
-          </a:ln>
-        </p:spPr>
-        <p:style>
-          <a:lnRef idx="2">
-            <a:schemeClr val="accent1">
-              <a:shade val="50000"/>
-            </a:schemeClr>
-          </a:lnRef>
-          <a:fillRef idx="1">
-            <a:schemeClr val="accent1"/>
-          </a:fillRef>
-          <a:effectRef idx="0">
-            <a:schemeClr val="accent1"/>
-          </a:effectRef>
-          <a:fontRef idx="minor">
-            <a:schemeClr val="lt1"/>
-          </a:fontRef>
-        </p:style>
-        <p:txBody>
-          <a:bodyPr rtlCol="0" anchor="ctr"/>
-          <a:lstStyle/>
-          <a:p>
-            <a:pPr algn="ctr"/>
-            <a:r>
-              <a:rPr lang="ko-KR" altLang="en-US" dirty="0">
-                <a:solidFill>
-                  <a:schemeClr val="tx1"/>
-                </a:solidFill>
-              </a:rPr>
-              <a:t>로그인 </a:t>
-            </a:r>
-            <a:endParaRPr lang="en-US" altLang="ko-KR" dirty="0">
-              <a:solidFill>
-                <a:schemeClr val="tx1"/>
-              </a:solidFill>
-            </a:endParaRPr>
-          </a:p>
-          <a:p>
-            <a:pPr algn="ctr"/>
-            <a:r>
-              <a:rPr lang="ko-KR" altLang="en-US" dirty="0">
-                <a:solidFill>
-                  <a:schemeClr val="tx1"/>
-                </a:solidFill>
-              </a:rPr>
-              <a:t>페이지 접속</a:t>
-            </a:r>
-          </a:p>
-        </p:txBody>
-      </p:sp>
-      <p:sp>
-        <p:nvSpPr>
-          <p:cNvPr id="22" name="직사각형 21">
-            <a:extLst>
-              <a:ext uri="{FF2B5EF4-FFF2-40B4-BE49-F238E27FC236}">
-                <a16:creationId xmlns:a16="http://schemas.microsoft.com/office/drawing/2014/main" id="{B7095C8D-BE22-43C8-8ABD-3550898F9AFF}"/>
-              </a:ext>
-            </a:extLst>
-          </p:cNvPr>
-          <p:cNvSpPr/>
-          <p:nvPr/>
-        </p:nvSpPr>
-        <p:spPr>
-          <a:xfrm>
-            <a:off x="8313420" y="830580"/>
-            <a:ext cx="1664970" cy="571500"/>
-          </a:xfrm>
-          <a:prstGeom prst="rect">
-            <a:avLst/>
-          </a:prstGeom>
-          <a:noFill/>
-          <a:ln>
-            <a:solidFill>
-              <a:schemeClr val="tx1"/>
-            </a:solidFill>
-          </a:ln>
-        </p:spPr>
-        <p:style>
-          <a:lnRef idx="2">
-            <a:schemeClr val="accent1">
-              <a:shade val="50000"/>
-            </a:schemeClr>
-          </a:lnRef>
-          <a:fillRef idx="1">
-            <a:schemeClr val="accent1"/>
-          </a:fillRef>
-          <a:effectRef idx="0">
-            <a:schemeClr val="accent1"/>
-          </a:effectRef>
-          <a:fontRef idx="minor">
-            <a:schemeClr val="lt1"/>
-          </a:fontRef>
-        </p:style>
-        <p:txBody>
-          <a:bodyPr rtlCol="0" anchor="ctr"/>
-          <a:lstStyle/>
-          <a:p>
-            <a:pPr algn="ctr"/>
-            <a:r>
-              <a:rPr lang="ko-KR" altLang="en-US" dirty="0">
-                <a:solidFill>
-                  <a:schemeClr val="tx1"/>
-                </a:solidFill>
-              </a:rPr>
-              <a:t>네이버 로그인 클릭</a:t>
-            </a:r>
-          </a:p>
-        </p:txBody>
-      </p:sp>
-      <p:cxnSp>
-        <p:nvCxnSpPr>
-          <p:cNvPr id="23" name="직선 화살표 연결선 22">
-            <a:extLst>
-              <a:ext uri="{FF2B5EF4-FFF2-40B4-BE49-F238E27FC236}">
-                <a16:creationId xmlns:a16="http://schemas.microsoft.com/office/drawing/2014/main" id="{123E198C-D8DE-4CD5-8A4A-42ACE74DD483}"/>
-              </a:ext>
-            </a:extLst>
-          </p:cNvPr>
-          <p:cNvCxnSpPr>
-            <a:cxnSpLocks/>
-            <a:stCxn id="16" idx="3"/>
-            <a:endCxn id="22" idx="1"/>
-          </p:cNvCxnSpPr>
-          <p:nvPr/>
-        </p:nvCxnSpPr>
-        <p:spPr>
-          <a:xfrm>
-            <a:off x="5985510" y="1116330"/>
-            <a:ext cx="2327910" cy="0"/>
-          </a:xfrm>
-          <a:prstGeom prst="straightConnector1">
-            <a:avLst/>
-          </a:prstGeom>
-          <a:ln>
-            <a:solidFill>
-              <a:srgbClr val="FF0000"/>
-            </a:solidFill>
-            <a:tailEnd type="triangle"/>
-          </a:ln>
-        </p:spPr>
-        <p:style>
-          <a:lnRef idx="1">
-            <a:schemeClr val="accent1"/>
-          </a:lnRef>
-          <a:fillRef idx="0">
-            <a:schemeClr val="accent1"/>
-          </a:fillRef>
-          <a:effectRef idx="0">
-            <a:schemeClr val="accent1"/>
-          </a:effectRef>
-          <a:fontRef idx="minor">
-            <a:schemeClr val="tx1"/>
-          </a:fontRef>
-        </p:style>
-      </p:cxnSp>
-      <p:sp>
-        <p:nvSpPr>
-          <p:cNvPr id="29" name="순서도: 판단 28">
-            <a:extLst>
-              <a:ext uri="{FF2B5EF4-FFF2-40B4-BE49-F238E27FC236}">
-                <a16:creationId xmlns:a16="http://schemas.microsoft.com/office/drawing/2014/main" id="{04C5A0A0-679C-4A4F-AE4B-4330A3CAE728}"/>
-              </a:ext>
-            </a:extLst>
-          </p:cNvPr>
-          <p:cNvSpPr/>
-          <p:nvPr/>
-        </p:nvSpPr>
-        <p:spPr>
-          <a:xfrm>
-            <a:off x="7837170" y="2548890"/>
-            <a:ext cx="2617470" cy="1333500"/>
-          </a:xfrm>
-          <a:prstGeom prst="flowChartDecision">
-            <a:avLst/>
-          </a:prstGeom>
-        </p:spPr>
-        <p:style>
-          <a:lnRef idx="2">
-            <a:schemeClr val="accent1">
-              <a:shade val="50000"/>
-            </a:schemeClr>
-          </a:lnRef>
-          <a:fillRef idx="1">
-            <a:schemeClr val="accent1"/>
-          </a:fillRef>
-          <a:effectRef idx="0">
-            <a:schemeClr val="accent1"/>
-          </a:effectRef>
-          <a:fontRef idx="minor">
-            <a:schemeClr val="lt1"/>
-          </a:fontRef>
-        </p:style>
-        <p:txBody>
-          <a:bodyPr rtlCol="0" anchor="ctr"/>
-          <a:lstStyle/>
-          <a:p>
-            <a:pPr algn="ctr"/>
-            <a:r>
-              <a:rPr lang="ko-KR" altLang="en-US" dirty="0">
-                <a:solidFill>
-                  <a:schemeClr val="bg1"/>
-                </a:solidFill>
-              </a:rPr>
-              <a:t>로그인 </a:t>
-            </a:r>
-            <a:endParaRPr lang="en-US" altLang="ko-KR" dirty="0">
-              <a:solidFill>
-                <a:schemeClr val="bg1"/>
-              </a:solidFill>
-            </a:endParaRPr>
-          </a:p>
-          <a:p>
-            <a:pPr algn="ctr"/>
-            <a:r>
-              <a:rPr lang="ko-KR" altLang="en-US" dirty="0">
-                <a:solidFill>
-                  <a:schemeClr val="bg1"/>
-                </a:solidFill>
-              </a:rPr>
-              <a:t>성공</a:t>
-            </a:r>
-          </a:p>
-        </p:txBody>
-      </p:sp>
-      <p:cxnSp>
-        <p:nvCxnSpPr>
-          <p:cNvPr id="31" name="직선 화살표 연결선 30">
-            <a:extLst>
-              <a:ext uri="{FF2B5EF4-FFF2-40B4-BE49-F238E27FC236}">
-                <a16:creationId xmlns:a16="http://schemas.microsoft.com/office/drawing/2014/main" id="{620BF5EC-EA7D-4E1A-93A1-129913ED6400}"/>
-              </a:ext>
-            </a:extLst>
-          </p:cNvPr>
-          <p:cNvCxnSpPr>
-            <a:cxnSpLocks/>
-            <a:stCxn id="22" idx="2"/>
-            <a:endCxn id="29" idx="0"/>
-          </p:cNvCxnSpPr>
-          <p:nvPr/>
-        </p:nvCxnSpPr>
-        <p:spPr>
-          <a:xfrm>
-            <a:off x="9145905" y="1402080"/>
-            <a:ext cx="0" cy="1146810"/>
-          </a:xfrm>
-          <a:prstGeom prst="straightConnector1">
-            <a:avLst/>
-          </a:prstGeom>
-          <a:ln>
-            <a:solidFill>
-              <a:srgbClr val="FF0000"/>
-            </a:solidFill>
-            <a:tailEnd type="triangle"/>
-          </a:ln>
-        </p:spPr>
-        <p:style>
-          <a:lnRef idx="1">
-            <a:schemeClr val="accent1"/>
-          </a:lnRef>
-          <a:fillRef idx="0">
-            <a:schemeClr val="accent1"/>
-          </a:fillRef>
-          <a:effectRef idx="0">
-            <a:schemeClr val="accent1"/>
-          </a:effectRef>
-          <a:fontRef idx="minor">
-            <a:schemeClr val="tx1"/>
-          </a:fontRef>
-        </p:style>
-      </p:cxnSp>
-      <p:sp>
-        <p:nvSpPr>
-          <p:cNvPr id="37" name="직사각형 36">
-            <a:extLst>
-              <a:ext uri="{FF2B5EF4-FFF2-40B4-BE49-F238E27FC236}">
-                <a16:creationId xmlns:a16="http://schemas.microsoft.com/office/drawing/2014/main" id="{46F53C13-A868-4CF4-98C0-648A40A0A2F8}"/>
-              </a:ext>
-            </a:extLst>
-          </p:cNvPr>
-          <p:cNvSpPr/>
-          <p:nvPr/>
-        </p:nvSpPr>
-        <p:spPr>
-          <a:xfrm>
-            <a:off x="4320540" y="2929890"/>
-            <a:ext cx="1775460" cy="571500"/>
-          </a:xfrm>
-          <a:prstGeom prst="rect">
-            <a:avLst/>
-          </a:prstGeom>
-          <a:noFill/>
-          <a:ln>
-            <a:solidFill>
-              <a:schemeClr val="tx1"/>
-            </a:solidFill>
-          </a:ln>
-        </p:spPr>
-        <p:style>
-          <a:lnRef idx="2">
-            <a:schemeClr val="accent1">
-              <a:shade val="50000"/>
-            </a:schemeClr>
-          </a:lnRef>
-          <a:fillRef idx="1">
-            <a:schemeClr val="accent1"/>
-          </a:fillRef>
-          <a:effectRef idx="0">
-            <a:schemeClr val="accent1"/>
-          </a:effectRef>
-          <a:fontRef idx="minor">
-            <a:schemeClr val="lt1"/>
-          </a:fontRef>
-        </p:style>
-        <p:txBody>
-          <a:bodyPr rtlCol="0" anchor="ctr"/>
-          <a:lstStyle/>
-          <a:p>
-            <a:pPr algn="ctr"/>
-            <a:r>
-              <a:rPr lang="ko-KR" altLang="en-US" dirty="0">
-                <a:solidFill>
-                  <a:schemeClr val="tx1"/>
-                </a:solidFill>
-              </a:rPr>
-              <a:t>네이버 </a:t>
-            </a:r>
-            <a:r>
-              <a:rPr lang="en-US" altLang="ko-KR" dirty="0">
-                <a:solidFill>
-                  <a:schemeClr val="tx1"/>
-                </a:solidFill>
-              </a:rPr>
-              <a:t>API</a:t>
-            </a:r>
-            <a:r>
-              <a:rPr lang="ko-KR" altLang="en-US" dirty="0">
-                <a:solidFill>
-                  <a:schemeClr val="tx1"/>
-                </a:solidFill>
-              </a:rPr>
-              <a:t>서버</a:t>
-            </a:r>
-            <a:endParaRPr lang="en-US" altLang="ko-KR" dirty="0">
-              <a:solidFill>
-                <a:schemeClr val="tx1"/>
-              </a:solidFill>
-            </a:endParaRPr>
-          </a:p>
-          <a:p>
-            <a:pPr algn="ctr"/>
-            <a:r>
-              <a:rPr lang="en-US" altLang="ko-KR" dirty="0">
-                <a:solidFill>
-                  <a:schemeClr val="tx1"/>
-                </a:solidFill>
-              </a:rPr>
-              <a:t>(</a:t>
-            </a:r>
-            <a:r>
-              <a:rPr lang="en-US" altLang="ko-KR" dirty="0" err="1">
-                <a:solidFill>
-                  <a:schemeClr val="tx1"/>
-                </a:solidFill>
-              </a:rPr>
-              <a:t>Oauth</a:t>
-            </a:r>
-            <a:r>
-              <a:rPr lang="en-US" altLang="ko-KR" dirty="0">
-                <a:solidFill>
-                  <a:schemeClr val="tx1"/>
-                </a:solidFill>
-              </a:rPr>
-              <a:t> </a:t>
-            </a:r>
-            <a:r>
-              <a:rPr lang="ko-KR" altLang="en-US" dirty="0">
-                <a:solidFill>
-                  <a:schemeClr val="tx1"/>
-                </a:solidFill>
-              </a:rPr>
-              <a:t>서버</a:t>
-            </a:r>
-            <a:r>
-              <a:rPr lang="en-US" altLang="ko-KR" dirty="0">
-                <a:solidFill>
-                  <a:schemeClr val="tx1"/>
-                </a:solidFill>
-              </a:rPr>
-              <a:t>)</a:t>
-            </a:r>
-            <a:endParaRPr lang="ko-KR" altLang="en-US" dirty="0">
-              <a:solidFill>
-                <a:schemeClr val="tx1"/>
-              </a:solidFill>
-            </a:endParaRPr>
-          </a:p>
-        </p:txBody>
-      </p:sp>
-      <p:cxnSp>
-        <p:nvCxnSpPr>
-          <p:cNvPr id="38" name="직선 화살표 연결선 37">
-            <a:extLst>
-              <a:ext uri="{FF2B5EF4-FFF2-40B4-BE49-F238E27FC236}">
-                <a16:creationId xmlns:a16="http://schemas.microsoft.com/office/drawing/2014/main" id="{AF0E2488-1604-42EA-8858-38465FAE08C7}"/>
-              </a:ext>
-            </a:extLst>
-          </p:cNvPr>
-          <p:cNvCxnSpPr>
-            <a:cxnSpLocks/>
-            <a:stCxn id="29" idx="1"/>
-            <a:endCxn id="37" idx="3"/>
-          </p:cNvCxnSpPr>
-          <p:nvPr/>
-        </p:nvCxnSpPr>
-        <p:spPr>
-          <a:xfrm flipH="1">
-            <a:off x="6096000" y="3215640"/>
-            <a:ext cx="1741170" cy="0"/>
-          </a:xfrm>
-          <a:prstGeom prst="straightConnector1">
-            <a:avLst/>
-          </a:prstGeom>
-          <a:ln>
-            <a:solidFill>
-              <a:srgbClr val="FF0000"/>
-            </a:solidFill>
-            <a:tailEnd type="triangle"/>
-          </a:ln>
-        </p:spPr>
-        <p:style>
-          <a:lnRef idx="1">
-            <a:schemeClr val="accent1"/>
-          </a:lnRef>
-          <a:fillRef idx="0">
-            <a:schemeClr val="accent1"/>
-          </a:fillRef>
-          <a:effectRef idx="0">
-            <a:schemeClr val="accent1"/>
-          </a:effectRef>
-          <a:fontRef idx="minor">
-            <a:schemeClr val="tx1"/>
-          </a:fontRef>
-        </p:style>
-      </p:cxnSp>
-      <p:sp>
-        <p:nvSpPr>
-          <p:cNvPr id="42" name="직사각형 41">
-            <a:extLst>
-              <a:ext uri="{FF2B5EF4-FFF2-40B4-BE49-F238E27FC236}">
-                <a16:creationId xmlns:a16="http://schemas.microsoft.com/office/drawing/2014/main" id="{396D257C-3B79-42A1-8B95-0AF779B9579D}"/>
-              </a:ext>
-            </a:extLst>
-          </p:cNvPr>
-          <p:cNvSpPr/>
-          <p:nvPr/>
-        </p:nvSpPr>
-        <p:spPr>
-          <a:xfrm>
-            <a:off x="1097280" y="2929890"/>
-            <a:ext cx="1775460" cy="571500"/>
-          </a:xfrm>
-          <a:prstGeom prst="rect">
-            <a:avLst/>
-          </a:prstGeom>
-          <a:noFill/>
-          <a:ln>
-            <a:solidFill>
-              <a:schemeClr val="tx1"/>
-            </a:solidFill>
-          </a:ln>
-        </p:spPr>
-        <p:style>
-          <a:lnRef idx="2">
-            <a:schemeClr val="accent1">
-              <a:shade val="50000"/>
-            </a:schemeClr>
-          </a:lnRef>
-          <a:fillRef idx="1">
-            <a:schemeClr val="accent1"/>
-          </a:fillRef>
-          <a:effectRef idx="0">
-            <a:schemeClr val="accent1"/>
-          </a:effectRef>
-          <a:fontRef idx="minor">
-            <a:schemeClr val="lt1"/>
-          </a:fontRef>
-        </p:style>
-        <p:txBody>
-          <a:bodyPr rtlCol="0" anchor="ctr"/>
-          <a:lstStyle/>
-          <a:p>
-            <a:pPr algn="ctr"/>
-            <a:r>
-              <a:rPr lang="en-US" altLang="ko-KR" dirty="0">
-                <a:solidFill>
-                  <a:schemeClr val="tx1"/>
-                </a:solidFill>
-              </a:rPr>
-              <a:t>Callback </a:t>
-            </a:r>
-            <a:r>
-              <a:rPr lang="en-US" altLang="ko-KR" dirty="0" err="1">
-                <a:solidFill>
-                  <a:schemeClr val="tx1"/>
-                </a:solidFill>
-              </a:rPr>
-              <a:t>Url</a:t>
-            </a:r>
-            <a:r>
-              <a:rPr lang="en-US" altLang="ko-KR" dirty="0">
-                <a:solidFill>
-                  <a:schemeClr val="tx1"/>
-                </a:solidFill>
-              </a:rPr>
-              <a:t> </a:t>
-            </a:r>
-          </a:p>
-          <a:p>
-            <a:pPr algn="ctr"/>
-            <a:r>
-              <a:rPr lang="ko-KR" altLang="en-US" dirty="0">
-                <a:solidFill>
-                  <a:schemeClr val="tx1"/>
-                </a:solidFill>
-              </a:rPr>
-              <a:t>호출</a:t>
-            </a:r>
-          </a:p>
-        </p:txBody>
-      </p:sp>
-      <p:sp>
-        <p:nvSpPr>
-          <p:cNvPr id="43" name="TextBox 42">
-            <a:extLst>
-              <a:ext uri="{FF2B5EF4-FFF2-40B4-BE49-F238E27FC236}">
-                <a16:creationId xmlns:a16="http://schemas.microsoft.com/office/drawing/2014/main" id="{1DDA0B5E-1E25-4C57-A93C-2FA6D7FBB8CE}"/>
-              </a:ext>
-            </a:extLst>
-          </p:cNvPr>
-          <p:cNvSpPr txBox="1"/>
-          <p:nvPr/>
-        </p:nvSpPr>
-        <p:spPr>
-          <a:xfrm>
-            <a:off x="7353300" y="2929890"/>
-            <a:ext cx="646331" cy="369332"/>
-          </a:xfrm>
-          <a:prstGeom prst="rect">
-            <a:avLst/>
-          </a:prstGeom>
-          <a:noFill/>
-        </p:spPr>
-        <p:txBody>
-          <a:bodyPr wrap="none" rtlCol="0">
+            <a:off x="181026" y="723055"/>
+            <a:ext cx="6096000" cy="646331"/>
+          </a:xfrm>
+          <a:prstGeom prst="rect">
+            <a:avLst/>
+          </a:prstGeom>
+        </p:spPr>
+        <p:txBody>
+          <a:bodyPr>
             <a:spAutoFit/>
           </a:bodyPr>
           <a:lstStyle/>
           <a:p>
             <a:r>
-              <a:rPr lang="ko-KR" altLang="en-US"/>
-              <a:t>성공</a:t>
-            </a:r>
-          </a:p>
-        </p:txBody>
-      </p:sp>
-      <p:cxnSp>
-        <p:nvCxnSpPr>
-          <p:cNvPr id="45" name="연결선: 꺾임 44">
-            <a:extLst>
-              <a:ext uri="{FF2B5EF4-FFF2-40B4-BE49-F238E27FC236}">
-                <a16:creationId xmlns:a16="http://schemas.microsoft.com/office/drawing/2014/main" id="{4FCAECD7-4DC9-428A-9D68-C25024FDB913}"/>
-              </a:ext>
-            </a:extLst>
-          </p:cNvPr>
-          <p:cNvCxnSpPr>
-            <a:cxnSpLocks/>
-            <a:endCxn id="16" idx="0"/>
-          </p:cNvCxnSpPr>
-          <p:nvPr/>
-        </p:nvCxnSpPr>
-        <p:spPr>
-          <a:xfrm rot="10800000">
-            <a:off x="5153026" y="830580"/>
-            <a:ext cx="5339717" cy="2385060"/>
-          </a:xfrm>
-          <a:prstGeom prst="bentConnector4">
-            <a:avLst>
-              <a:gd name="adj1" fmla="val -14020"/>
-              <a:gd name="adj2" fmla="val 109585"/>
-            </a:avLst>
-          </a:prstGeom>
-          <a:ln>
-            <a:tailEnd type="triangle"/>
-          </a:ln>
-        </p:spPr>
-        <p:style>
-          <a:lnRef idx="1">
-            <a:schemeClr val="accent1"/>
-          </a:lnRef>
-          <a:fillRef idx="0">
-            <a:schemeClr val="accent1"/>
-          </a:fillRef>
-          <a:effectRef idx="0">
-            <a:schemeClr val="accent1"/>
-          </a:effectRef>
-          <a:fontRef idx="minor">
-            <a:schemeClr val="tx1"/>
-          </a:fontRef>
-        </p:style>
-      </p:cxnSp>
-      <p:sp>
-        <p:nvSpPr>
-          <p:cNvPr id="48" name="TextBox 47">
-            <a:extLst>
-              <a:ext uri="{FF2B5EF4-FFF2-40B4-BE49-F238E27FC236}">
-                <a16:creationId xmlns:a16="http://schemas.microsoft.com/office/drawing/2014/main" id="{F157D4E6-0ED9-4196-A10A-081A74DA1272}"/>
-              </a:ext>
-            </a:extLst>
-          </p:cNvPr>
-          <p:cNvSpPr txBox="1"/>
-          <p:nvPr/>
-        </p:nvSpPr>
-        <p:spPr>
-          <a:xfrm>
-            <a:off x="10382398" y="2929890"/>
-            <a:ext cx="646331" cy="369332"/>
-          </a:xfrm>
-          <a:prstGeom prst="rect">
-            <a:avLst/>
-          </a:prstGeom>
-          <a:noFill/>
-        </p:spPr>
-        <p:txBody>
-          <a:bodyPr wrap="none" rtlCol="0">
-            <a:spAutoFit/>
-          </a:bodyPr>
-          <a:lstStyle/>
-          <a:p>
+              <a:rPr lang="en-US" altLang="ko-KR" dirty="0"/>
+              <a:t>/** </a:t>
+            </a:r>
+            <a:r>
+              <a:rPr lang="ko-KR" altLang="en-US" dirty="0" err="1"/>
+              <a:t>로그인타입</a:t>
+            </a:r>
             <a:r>
               <a:rPr lang="ko-KR" altLang="en-US" dirty="0"/>
-              <a:t>실패</a:t>
-            </a:r>
-          </a:p>
-        </p:txBody>
-      </p:sp>
-      <p:cxnSp>
-        <p:nvCxnSpPr>
-          <p:cNvPr id="51" name="직선 화살표 연결선 50">
-            <a:extLst>
-              <a:ext uri="{FF2B5EF4-FFF2-40B4-BE49-F238E27FC236}">
-                <a16:creationId xmlns:a16="http://schemas.microsoft.com/office/drawing/2014/main" id="{1D10AFA5-2B7F-4CBD-9973-4B9391112EDB}"/>
-              </a:ext>
-            </a:extLst>
-          </p:cNvPr>
-          <p:cNvCxnSpPr>
-            <a:cxnSpLocks/>
-            <a:stCxn id="37" idx="1"/>
-            <a:endCxn id="42" idx="3"/>
-          </p:cNvCxnSpPr>
-          <p:nvPr/>
-        </p:nvCxnSpPr>
-        <p:spPr>
-          <a:xfrm flipH="1">
-            <a:off x="2872740" y="3215640"/>
-            <a:ext cx="1447800" cy="0"/>
-          </a:xfrm>
-          <a:prstGeom prst="straightConnector1">
-            <a:avLst/>
-          </a:prstGeom>
-          <a:ln>
-            <a:solidFill>
-              <a:srgbClr val="FF0000"/>
-            </a:solidFill>
-            <a:tailEnd type="triangle"/>
-          </a:ln>
-        </p:spPr>
-        <p:style>
-          <a:lnRef idx="1">
-            <a:schemeClr val="accent1"/>
-          </a:lnRef>
-          <a:fillRef idx="0">
-            <a:schemeClr val="accent1"/>
-          </a:fillRef>
-          <a:effectRef idx="0">
-            <a:schemeClr val="accent1"/>
-          </a:effectRef>
-          <a:fontRef idx="minor">
-            <a:schemeClr val="tx1"/>
-          </a:fontRef>
-        </p:style>
-      </p:cxnSp>
-      <p:sp>
-        <p:nvSpPr>
-          <p:cNvPr id="55" name="직사각형 54">
-            <a:extLst>
-              <a:ext uri="{FF2B5EF4-FFF2-40B4-BE49-F238E27FC236}">
-                <a16:creationId xmlns:a16="http://schemas.microsoft.com/office/drawing/2014/main" id="{14CC77D7-65B8-4417-801D-03A3CF01A898}"/>
-              </a:ext>
-            </a:extLst>
-          </p:cNvPr>
-          <p:cNvSpPr/>
-          <p:nvPr/>
-        </p:nvSpPr>
-        <p:spPr>
-          <a:xfrm>
-            <a:off x="1021080" y="4819412"/>
-            <a:ext cx="1958340" cy="571500"/>
-          </a:xfrm>
-          <a:prstGeom prst="rect">
-            <a:avLst/>
-          </a:prstGeom>
-          <a:noFill/>
-          <a:ln>
-            <a:solidFill>
-              <a:schemeClr val="tx1"/>
-            </a:solidFill>
-          </a:ln>
-        </p:spPr>
-        <p:style>
-          <a:lnRef idx="2">
-            <a:schemeClr val="accent1">
-              <a:shade val="50000"/>
-            </a:schemeClr>
-          </a:lnRef>
-          <a:fillRef idx="1">
-            <a:schemeClr val="accent1"/>
-          </a:fillRef>
-          <a:effectRef idx="0">
-            <a:schemeClr val="accent1"/>
-          </a:effectRef>
-          <a:fontRef idx="minor">
-            <a:schemeClr val="lt1"/>
-          </a:fontRef>
-        </p:style>
-        <p:txBody>
-          <a:bodyPr rtlCol="0" anchor="ctr"/>
-          <a:lstStyle/>
-          <a:p>
-            <a:pPr algn="ctr"/>
-            <a:r>
-              <a:rPr lang="en-US" altLang="ko-KR" dirty="0">
-                <a:solidFill>
-                  <a:schemeClr val="tx1"/>
-                </a:solidFill>
-              </a:rPr>
-              <a:t>code,</a:t>
-            </a:r>
-            <a:r>
-              <a:rPr lang="ko-KR" altLang="en-US" dirty="0">
-                <a:solidFill>
-                  <a:schemeClr val="tx1"/>
-                </a:solidFill>
-              </a:rPr>
-              <a:t> </a:t>
-            </a:r>
-            <a:r>
-              <a:rPr lang="en-US" altLang="ko-KR" dirty="0">
-                <a:solidFill>
-                  <a:schemeClr val="tx1"/>
-                </a:solidFill>
-              </a:rPr>
-              <a:t>state</a:t>
-            </a:r>
-            <a:r>
-              <a:rPr lang="ko-KR" altLang="en-US" dirty="0">
-                <a:solidFill>
-                  <a:schemeClr val="tx1"/>
-                </a:solidFill>
-              </a:rPr>
-              <a:t>값을 가지고 토큰 생성</a:t>
-            </a:r>
-          </a:p>
-        </p:txBody>
-      </p:sp>
-      <p:sp>
-        <p:nvSpPr>
-          <p:cNvPr id="56" name="TextBox 55">
-            <a:extLst>
-              <a:ext uri="{FF2B5EF4-FFF2-40B4-BE49-F238E27FC236}">
-                <a16:creationId xmlns:a16="http://schemas.microsoft.com/office/drawing/2014/main" id="{BFF627C6-2CDE-433C-82F5-C39A65CF541E}"/>
-              </a:ext>
-            </a:extLst>
-          </p:cNvPr>
-          <p:cNvSpPr txBox="1"/>
-          <p:nvPr/>
-        </p:nvSpPr>
-        <p:spPr>
-          <a:xfrm>
-            <a:off x="1021080" y="5486400"/>
-            <a:ext cx="1518364" cy="369332"/>
-          </a:xfrm>
-          <a:prstGeom prst="rect">
-            <a:avLst/>
-          </a:prstGeom>
-          <a:noFill/>
-        </p:spPr>
-        <p:txBody>
-          <a:bodyPr wrap="none" rtlCol="0">
-            <a:spAutoFit/>
-          </a:bodyPr>
-          <a:lstStyle/>
-          <a:p>
-            <a:r>
-              <a:rPr lang="en-US" altLang="ko-KR" dirty="0">
-                <a:solidFill>
-                  <a:schemeClr val="accent2"/>
-                </a:solidFill>
-              </a:rPr>
-              <a:t>*</a:t>
-            </a:r>
-            <a:r>
-              <a:rPr lang="ko-KR" altLang="en-US" dirty="0">
-                <a:solidFill>
-                  <a:schemeClr val="accent2"/>
-                </a:solidFill>
-              </a:rPr>
-              <a:t>네이버 기준</a:t>
-            </a:r>
-          </a:p>
-        </p:txBody>
-      </p:sp>
-      <p:cxnSp>
-        <p:nvCxnSpPr>
-          <p:cNvPr id="57" name="직선 화살표 연결선 56">
-            <a:extLst>
-              <a:ext uri="{FF2B5EF4-FFF2-40B4-BE49-F238E27FC236}">
-                <a16:creationId xmlns:a16="http://schemas.microsoft.com/office/drawing/2014/main" id="{A87639A2-E644-46CB-A674-E8AEA3518DBF}"/>
-              </a:ext>
-            </a:extLst>
-          </p:cNvPr>
-          <p:cNvCxnSpPr>
-            <a:cxnSpLocks/>
-            <a:stCxn id="42" idx="2"/>
-            <a:endCxn id="55" idx="0"/>
-          </p:cNvCxnSpPr>
-          <p:nvPr/>
-        </p:nvCxnSpPr>
-        <p:spPr>
-          <a:xfrm>
-            <a:off x="1985010" y="3501390"/>
-            <a:ext cx="15240" cy="1318022"/>
-          </a:xfrm>
-          <a:prstGeom prst="straightConnector1">
-            <a:avLst/>
-          </a:prstGeom>
-          <a:ln>
-            <a:solidFill>
-              <a:srgbClr val="FF0000"/>
-            </a:solidFill>
-            <a:tailEnd type="triangle"/>
-          </a:ln>
-        </p:spPr>
-        <p:style>
-          <a:lnRef idx="1">
-            <a:schemeClr val="accent1"/>
-          </a:lnRef>
-          <a:fillRef idx="0">
-            <a:schemeClr val="accent1"/>
-          </a:fillRef>
-          <a:effectRef idx="0">
-            <a:schemeClr val="accent1"/>
-          </a:effectRef>
-          <a:fontRef idx="minor">
-            <a:schemeClr val="tx1"/>
-          </a:fontRef>
-        </p:style>
-      </p:cxnSp>
-      <p:sp>
-        <p:nvSpPr>
-          <p:cNvPr id="62" name="직사각형 61">
-            <a:extLst>
-              <a:ext uri="{FF2B5EF4-FFF2-40B4-BE49-F238E27FC236}">
-                <a16:creationId xmlns:a16="http://schemas.microsoft.com/office/drawing/2014/main" id="{C0FDBA2B-39B8-46DB-976E-4F67ABE6F690}"/>
-              </a:ext>
-            </a:extLst>
-          </p:cNvPr>
-          <p:cNvSpPr/>
-          <p:nvPr/>
-        </p:nvSpPr>
-        <p:spPr>
-          <a:xfrm>
-            <a:off x="4267200" y="4701301"/>
-            <a:ext cx="1958340" cy="807951"/>
-          </a:xfrm>
-          <a:prstGeom prst="rect">
-            <a:avLst/>
-          </a:prstGeom>
-          <a:noFill/>
-          <a:ln>
-            <a:solidFill>
-              <a:schemeClr val="tx1"/>
-            </a:solidFill>
-          </a:ln>
-        </p:spPr>
-        <p:style>
-          <a:lnRef idx="2">
-            <a:schemeClr val="accent1">
-              <a:shade val="50000"/>
-            </a:schemeClr>
-          </a:lnRef>
-          <a:fillRef idx="1">
-            <a:schemeClr val="accent1"/>
-          </a:fillRef>
-          <a:effectRef idx="0">
-            <a:schemeClr val="accent1"/>
-          </a:effectRef>
-          <a:fontRef idx="minor">
-            <a:schemeClr val="lt1"/>
-          </a:fontRef>
-        </p:style>
-        <p:txBody>
-          <a:bodyPr rtlCol="0" anchor="ctr"/>
-          <a:lstStyle/>
-          <a:p>
-            <a:pPr algn="ctr"/>
-            <a:r>
-              <a:rPr lang="ko-KR" altLang="en-US" dirty="0">
-                <a:solidFill>
-                  <a:schemeClr val="tx1"/>
-                </a:solidFill>
-              </a:rPr>
-              <a:t>토큰 값을 가지고 사용자 프로필 </a:t>
-            </a:r>
-            <a:r>
-              <a:rPr lang="en-US" altLang="ko-KR" dirty="0">
-                <a:solidFill>
-                  <a:schemeClr val="tx1"/>
-                </a:solidFill>
-              </a:rPr>
-              <a:t>API</a:t>
-            </a:r>
-            <a:r>
-              <a:rPr lang="ko-KR" altLang="en-US" dirty="0">
-                <a:solidFill>
-                  <a:schemeClr val="tx1"/>
-                </a:solidFill>
-              </a:rPr>
-              <a:t>호출</a:t>
-            </a:r>
-          </a:p>
-        </p:txBody>
-      </p:sp>
-      <p:cxnSp>
-        <p:nvCxnSpPr>
-          <p:cNvPr id="63" name="직선 화살표 연결선 62">
-            <a:extLst>
-              <a:ext uri="{FF2B5EF4-FFF2-40B4-BE49-F238E27FC236}">
-                <a16:creationId xmlns:a16="http://schemas.microsoft.com/office/drawing/2014/main" id="{36FDF8D6-5E51-4BDE-A8E3-73A79F7EAE45}"/>
-              </a:ext>
-            </a:extLst>
-          </p:cNvPr>
-          <p:cNvCxnSpPr>
-            <a:cxnSpLocks/>
-            <a:stCxn id="55" idx="3"/>
-            <a:endCxn id="62" idx="1"/>
-          </p:cNvCxnSpPr>
-          <p:nvPr/>
-        </p:nvCxnSpPr>
-        <p:spPr>
-          <a:xfrm>
-            <a:off x="2979420" y="5105162"/>
-            <a:ext cx="1287780" cy="115"/>
-          </a:xfrm>
-          <a:prstGeom prst="straightConnector1">
-            <a:avLst/>
-          </a:prstGeom>
-          <a:ln>
-            <a:solidFill>
-              <a:srgbClr val="FF0000"/>
-            </a:solidFill>
-            <a:tailEnd type="triangle"/>
-          </a:ln>
-        </p:spPr>
-        <p:style>
-          <a:lnRef idx="1">
-            <a:schemeClr val="accent1"/>
-          </a:lnRef>
-          <a:fillRef idx="0">
-            <a:schemeClr val="accent1"/>
-          </a:fillRef>
-          <a:effectRef idx="0">
-            <a:schemeClr val="accent1"/>
-          </a:effectRef>
-          <a:fontRef idx="minor">
-            <a:schemeClr val="tx1"/>
-          </a:fontRef>
-        </p:style>
-      </p:cxnSp>
-      <p:cxnSp>
-        <p:nvCxnSpPr>
-          <p:cNvPr id="68" name="직선 화살표 연결선 67">
-            <a:extLst>
-              <a:ext uri="{FF2B5EF4-FFF2-40B4-BE49-F238E27FC236}">
-                <a16:creationId xmlns:a16="http://schemas.microsoft.com/office/drawing/2014/main" id="{579BEDC9-592E-4FAB-872F-B0D5BCFB0A6E}"/>
-              </a:ext>
-            </a:extLst>
-          </p:cNvPr>
-          <p:cNvCxnSpPr>
-            <a:cxnSpLocks/>
-            <a:stCxn id="62" idx="3"/>
-          </p:cNvCxnSpPr>
-          <p:nvPr/>
-        </p:nvCxnSpPr>
-        <p:spPr>
-          <a:xfrm>
-            <a:off x="6225540" y="5105277"/>
-            <a:ext cx="1941195" cy="0"/>
-          </a:xfrm>
-          <a:prstGeom prst="straightConnector1">
-            <a:avLst/>
-          </a:prstGeom>
-          <a:ln>
-            <a:solidFill>
-              <a:srgbClr val="FF0000"/>
-            </a:solidFill>
-            <a:tailEnd type="triangle"/>
-          </a:ln>
-        </p:spPr>
-        <p:style>
-          <a:lnRef idx="1">
-            <a:schemeClr val="accent1"/>
-          </a:lnRef>
-          <a:fillRef idx="0">
-            <a:schemeClr val="accent1"/>
-          </a:fillRef>
-          <a:effectRef idx="0">
-            <a:schemeClr val="accent1"/>
-          </a:effectRef>
-          <a:fontRef idx="minor">
-            <a:schemeClr val="tx1"/>
-          </a:fontRef>
-        </p:style>
-      </p:cxnSp>
-      <p:sp>
-        <p:nvSpPr>
-          <p:cNvPr id="71" name="TextBox 70">
-            <a:extLst>
-              <a:ext uri="{FF2B5EF4-FFF2-40B4-BE49-F238E27FC236}">
-                <a16:creationId xmlns:a16="http://schemas.microsoft.com/office/drawing/2014/main" id="{231E8957-1297-4387-BF8F-1AB2BB640788}"/>
-              </a:ext>
-            </a:extLst>
-          </p:cNvPr>
-          <p:cNvSpPr txBox="1"/>
-          <p:nvPr/>
-        </p:nvSpPr>
-        <p:spPr>
-          <a:xfrm>
-            <a:off x="128938" y="163650"/>
-            <a:ext cx="3403432" cy="369332"/>
-          </a:xfrm>
-          <a:prstGeom prst="rect">
-            <a:avLst/>
-          </a:prstGeom>
-          <a:noFill/>
-        </p:spPr>
-        <p:txBody>
-          <a:bodyPr wrap="none" rtlCol="0">
-            <a:spAutoFit/>
-          </a:bodyPr>
-          <a:lstStyle/>
-          <a:p>
+              <a:t> *</a:t>
+            </a:r>
             <a:r>
               <a:rPr lang="en-US" altLang="ko-KR" dirty="0"/>
-              <a:t>OAuth2.0 </a:t>
-            </a:r>
-            <a:r>
-              <a:rPr lang="ko-KR" altLang="en-US" dirty="0"/>
-              <a:t>네이버로그인</a:t>
-            </a:r>
+              <a:t>/</a:t>
+            </a:r>
+          </a:p>
+          <a:p>
             <a:r>
               <a:rPr lang="en-US" altLang="ko-KR" dirty="0"/>
-              <a:t> </a:t>
-            </a:r>
-            <a:r>
-              <a:rPr lang="ko-KR" altLang="en-US" dirty="0"/>
-              <a:t>흐름도</a:t>
-            </a:r>
-          </a:p>
-        </p:txBody>
-      </p:sp>
-      <p:sp>
-        <p:nvSpPr>
-          <p:cNvPr id="72" name="TextBox 71">
-            <a:extLst>
-              <a:ext uri="{FF2B5EF4-FFF2-40B4-BE49-F238E27FC236}">
-                <a16:creationId xmlns:a16="http://schemas.microsoft.com/office/drawing/2014/main" id="{A3DCEA3F-FE87-47D1-9B5F-EB867DBA4CF4}"/>
-              </a:ext>
-            </a:extLst>
-          </p:cNvPr>
-          <p:cNvSpPr txBox="1"/>
-          <p:nvPr/>
-        </p:nvSpPr>
-        <p:spPr>
-          <a:xfrm>
-            <a:off x="4267200" y="3619502"/>
-            <a:ext cx="4269117" cy="646331"/>
-          </a:xfrm>
-          <a:prstGeom prst="rect">
-            <a:avLst/>
-          </a:prstGeom>
-          <a:noFill/>
-        </p:spPr>
-        <p:txBody>
-          <a:bodyPr wrap="none" rtlCol="0">
-            <a:spAutoFit/>
-          </a:bodyPr>
-          <a:lstStyle/>
-          <a:p>
-            <a:r>
-              <a:rPr lang="en-US" altLang="ko-KR" dirty="0">
-                <a:solidFill>
-                  <a:schemeClr val="accent2"/>
-                </a:solidFill>
-              </a:rPr>
-              <a:t>* </a:t>
-            </a:r>
-            <a:r>
-              <a:rPr lang="ko-KR" altLang="en-US" dirty="0">
-                <a:solidFill>
-                  <a:schemeClr val="accent2"/>
-                </a:solidFill>
-              </a:rPr>
-              <a:t>처음 접속 시 프로필</a:t>
-            </a:r>
-            <a:r>
-              <a:rPr lang="en-US" altLang="ko-KR" dirty="0">
-                <a:solidFill>
-                  <a:schemeClr val="accent2"/>
-                </a:solidFill>
-              </a:rPr>
-              <a:t>API</a:t>
-            </a:r>
-            <a:r>
-              <a:rPr lang="ko-KR" altLang="en-US" dirty="0">
-                <a:solidFill>
-                  <a:schemeClr val="accent2"/>
-                </a:solidFill>
-              </a:rPr>
-              <a:t>동의여부 확인</a:t>
-            </a:r>
-            <a:endParaRPr lang="en-US" altLang="ko-KR" dirty="0">
-              <a:solidFill>
-                <a:schemeClr val="accent2"/>
-              </a:solidFill>
-            </a:endParaRPr>
-          </a:p>
-          <a:p>
-            <a:r>
-              <a:rPr lang="ko-KR" altLang="en-US" dirty="0">
-                <a:solidFill>
-                  <a:schemeClr val="accent2"/>
-                </a:solidFill>
-              </a:rPr>
-              <a:t>후 다음 프로세스 진행</a:t>
-            </a:r>
-          </a:p>
-        </p:txBody>
-      </p:sp>
-      <p:sp>
-        <p:nvSpPr>
-          <p:cNvPr id="74" name="타원 73">
-            <a:extLst>
-              <a:ext uri="{FF2B5EF4-FFF2-40B4-BE49-F238E27FC236}">
-                <a16:creationId xmlns:a16="http://schemas.microsoft.com/office/drawing/2014/main" id="{882CD6B8-8481-4CBE-BAE5-E26FA1CF7AB4}"/>
-              </a:ext>
-            </a:extLst>
-          </p:cNvPr>
-          <p:cNvSpPr/>
-          <p:nvPr/>
-        </p:nvSpPr>
-        <p:spPr>
-          <a:xfrm>
-            <a:off x="8166735" y="4732155"/>
-            <a:ext cx="2040255" cy="700088"/>
-          </a:xfrm>
-          <a:prstGeom prst="ellipse">
-            <a:avLst/>
-          </a:prstGeom>
-          <a:noFill/>
-          <a:ln>
-            <a:solidFill>
-              <a:schemeClr val="tx1"/>
-            </a:solidFill>
-          </a:ln>
-        </p:spPr>
-        <p:style>
-          <a:lnRef idx="2">
-            <a:schemeClr val="accent1">
-              <a:shade val="50000"/>
-            </a:schemeClr>
-          </a:lnRef>
-          <a:fillRef idx="1">
-            <a:schemeClr val="accent1"/>
-          </a:fillRef>
-          <a:effectRef idx="0">
-            <a:schemeClr val="accent1"/>
-          </a:effectRef>
-          <a:fontRef idx="minor">
-            <a:schemeClr val="lt1"/>
-          </a:fontRef>
-        </p:style>
-        <p:txBody>
-          <a:bodyPr rtlCol="0" anchor="ctr"/>
-          <a:lstStyle/>
-          <a:p>
-            <a:pPr algn="ctr"/>
-            <a:r>
-              <a:rPr lang="ko-KR" altLang="en-US" dirty="0">
-                <a:solidFill>
-                  <a:schemeClr val="tx1"/>
-                </a:solidFill>
-              </a:rPr>
-              <a:t>회원가입 및 </a:t>
-            </a:r>
-            <a:endParaRPr lang="en-US" altLang="ko-KR" dirty="0">
-              <a:solidFill>
-                <a:schemeClr val="tx1"/>
-              </a:solidFill>
-            </a:endParaRPr>
-          </a:p>
-          <a:p>
-            <a:pPr algn="ctr"/>
-            <a:r>
-              <a:rPr lang="ko-KR" altLang="en-US" dirty="0">
-                <a:solidFill>
-                  <a:schemeClr val="tx1"/>
-                </a:solidFill>
-              </a:rPr>
-              <a:t>로그인 </a:t>
-            </a:r>
+              <a:t>private String </a:t>
+            </a:r>
+            <a:r>
+              <a:rPr lang="en-US" altLang="ko-KR" dirty="0" err="1"/>
+              <a:t>loginType</a:t>
+            </a:r>
+            <a:r>
+              <a:rPr lang="en-US" altLang="ko-KR" dirty="0"/>
+              <a:t>;</a:t>
+            </a:r>
+            <a:endParaRPr lang="ko-KR" altLang="en-US" dirty="0"/>
           </a:p>
         </p:txBody>
       </p:sp>
     </p:spTree>
     <p:extLst>
       <p:ext uri="{BB962C8B-B14F-4D97-AF65-F5344CB8AC3E}">
-        <p14:creationId xmlns:p14="http://schemas.microsoft.com/office/powerpoint/2010/main" val="3306320127"/>
+        <p14:creationId xmlns:p14="http://schemas.microsoft.com/office/powerpoint/2010/main" val="3073481492"/>
       </p:ext>
     </p:extLst>
   </p:cSld>
@@ -6323,63 +5042,12 @@
           <a:chExt cx="0" cy="0"/>
         </a:xfrm>
       </p:grpSpPr>
-      <p:sp>
-        <p:nvSpPr>
-          <p:cNvPr id="4" name="TextBox 3">
-            <a:extLst>
-              <a:ext uri="{FF2B5EF4-FFF2-40B4-BE49-F238E27FC236}">
-                <a16:creationId xmlns:a16="http://schemas.microsoft.com/office/drawing/2014/main" id="{2EC1ECDE-65AF-6C77-2B76-B8CC0955BB69}"/>
-              </a:ext>
-            </a:extLst>
-          </p:cNvPr>
-          <p:cNvSpPr txBox="1"/>
-          <p:nvPr/>
-        </p:nvSpPr>
-        <p:spPr>
-          <a:xfrm>
-            <a:off x="376551" y="2134697"/>
-            <a:ext cx="11815449" cy="646331"/>
-          </a:xfrm>
-          <a:prstGeom prst="rect">
-            <a:avLst/>
-          </a:prstGeom>
-          <a:noFill/>
-        </p:spPr>
-        <p:txBody>
-          <a:bodyPr wrap="square">
-            <a:spAutoFit/>
-          </a:bodyPr>
-          <a:lstStyle/>
-          <a:p>
-            <a:r>
-              <a:rPr lang="ko-KR" altLang="en-US" dirty="0"/>
-              <a:t>ALTER TABLE </a:t>
-            </a:r>
-            <a:r>
-              <a:rPr lang="ko-KR" altLang="en-US" dirty="0" err="1"/>
-              <a:t>lettnemplyrinfo</a:t>
-            </a:r>
-            <a:r>
-              <a:rPr lang="ko-KR" altLang="en-US" dirty="0"/>
-              <a:t> MODIFY COLUMN EMPLYR_ID </a:t>
-            </a:r>
-            <a:r>
-              <a:rPr lang="ko-KR" altLang="en-US" dirty="0" err="1"/>
-              <a:t>varchar</a:t>
-            </a:r>
-            <a:r>
-              <a:rPr lang="ko-KR" altLang="en-US" dirty="0"/>
-              <a:t>(60) CHARACTER SET utf8mb4 COLLATE utf8mb4_unicode_ci NOT NULL;</a:t>
-            </a:r>
-          </a:p>
-        </p:txBody>
-      </p:sp>
       <p:pic>
         <p:nvPicPr>
           <p:cNvPr id="7" name="그림 6">
             <a:extLst>
               <a:ext uri="{FF2B5EF4-FFF2-40B4-BE49-F238E27FC236}">
-                <a16:creationId xmlns:a16="http://schemas.microsoft.com/office/drawing/2014/main" id="{1AC909DF-3729-5808-BBB0-1ADB0E37ABC6}"/>
+                <a16:creationId xmlns:a16="http://schemas.microsoft.com/office/drawing/2014/main" id="{DE876272-2EA5-1D51-5082-EA5EF325187F}"/>
               </a:ext>
             </a:extLst>
           </p:cNvPr>
@@ -6396,8 +5064,8 @@
         </p:blipFill>
         <p:spPr>
           <a:xfrm>
-            <a:off x="362459" y="764567"/>
-            <a:ext cx="6569003" cy="994317"/>
+            <a:off x="331984" y="852383"/>
+            <a:ext cx="10687050" cy="3124200"/>
           </a:xfrm>
           <a:prstGeom prst="rect">
             <a:avLst/>
@@ -6409,7 +5077,7 @@
           <p:cNvPr id="9" name="TextBox 8">
             <a:extLst>
               <a:ext uri="{FF2B5EF4-FFF2-40B4-BE49-F238E27FC236}">
-                <a16:creationId xmlns:a16="http://schemas.microsoft.com/office/drawing/2014/main" id="{C6B09E56-8C54-872F-871F-FC86D6F5E2B2}"/>
+                <a16:creationId xmlns:a16="http://schemas.microsoft.com/office/drawing/2014/main" id="{921DFA93-7336-76F6-908D-7458E8B4EF6B}"/>
               </a:ext>
             </a:extLst>
           </p:cNvPr>
@@ -6418,7 +5086,7 @@
         </p:nvSpPr>
         <p:spPr>
           <a:xfrm>
-            <a:off x="312030" y="224232"/>
+            <a:off x="331984" y="295894"/>
             <a:ext cx="6097112" cy="369332"/>
           </a:xfrm>
           <a:prstGeom prst="rect">
@@ -6434,35 +5102,16 @@
           <a:p>
             <a:r>
               <a:rPr lang="ko-KR" altLang="en-US" dirty="0" err="1"/>
-              <a:t>lettnemplyrinfo</a:t>
-            </a:r>
-            <a:r>
-              <a:rPr lang="ko-KR" altLang="en-US" dirty="0"/>
-              <a:t> 테이블에서 </a:t>
-            </a:r>
-            <a:r>
-              <a:rPr lang="en-US" altLang="ko-KR" dirty="0"/>
-              <a:t>ID</a:t>
-            </a:r>
-            <a:r>
-              <a:rPr lang="ko-KR" altLang="en-US" dirty="0"/>
-              <a:t>값 길이 </a:t>
-            </a:r>
-            <a:r>
-              <a:rPr lang="en-US" altLang="ko-KR" dirty="0"/>
-              <a:t>60</a:t>
-            </a:r>
-            <a:r>
-              <a:rPr lang="ko-KR" altLang="en-US" dirty="0"/>
-              <a:t>으로 변경</a:t>
-            </a:r>
+              <a:t>LoginController</a:t>
+            </a:r>
+            <a:endParaRPr lang="ko-KR" altLang="en-US" dirty="0"/>
           </a:p>
         </p:txBody>
       </p:sp>
     </p:spTree>
     <p:extLst>
       <p:ext uri="{BB962C8B-B14F-4D97-AF65-F5344CB8AC3E}">
-        <p14:creationId xmlns:p14="http://schemas.microsoft.com/office/powerpoint/2010/main" val="4155228904"/>
+        <p14:creationId xmlns:p14="http://schemas.microsoft.com/office/powerpoint/2010/main" val="2411082277"/>
       </p:ext>
     </p:extLst>
   </p:cSld>
@@ -6491,10 +5140,10 @@
       </p:grpSpPr>
       <p:pic>
         <p:nvPicPr>
-          <p:cNvPr id="4" name="그림 3">
-            <a:extLst>
-              <a:ext uri="{FF2B5EF4-FFF2-40B4-BE49-F238E27FC236}">
-                <a16:creationId xmlns:a16="http://schemas.microsoft.com/office/drawing/2014/main" id="{CD3BE488-4A92-4B45-AA27-54FCB6C26413}"/>
+          <p:cNvPr id="3" name="그림 2">
+            <a:extLst>
+              <a:ext uri="{FF2B5EF4-FFF2-40B4-BE49-F238E27FC236}">
+                <a16:creationId xmlns:a16="http://schemas.microsoft.com/office/drawing/2014/main" id="{8FFC74A9-CCF4-EC4B-2B49-C6887C1454D1}"/>
               </a:ext>
             </a:extLst>
           </p:cNvPr>
@@ -6511,8 +5160,8 @@
         </p:blipFill>
         <p:spPr>
           <a:xfrm>
-            <a:off x="2059798" y="707297"/>
-            <a:ext cx="8327012" cy="5663157"/>
+            <a:off x="2247835" y="0"/>
+            <a:ext cx="7696329" cy="6858000"/>
           </a:xfrm>
           <a:prstGeom prst="rect">
             <a:avLst/>
@@ -6521,10 +5170,10 @@
       </p:pic>
       <p:sp>
         <p:nvSpPr>
-          <p:cNvPr id="3" name="TextBox 2">
-            <a:extLst>
-              <a:ext uri="{FF2B5EF4-FFF2-40B4-BE49-F238E27FC236}">
-                <a16:creationId xmlns:a16="http://schemas.microsoft.com/office/drawing/2014/main" id="{D402D6BF-9BA5-D11F-C9E9-252566112EEE}"/>
+          <p:cNvPr id="5" name="TextBox 4">
+            <a:extLst>
+              <a:ext uri="{FF2B5EF4-FFF2-40B4-BE49-F238E27FC236}">
+                <a16:creationId xmlns:a16="http://schemas.microsoft.com/office/drawing/2014/main" id="{BD48332D-B9EB-B7D2-1C77-36DF37C24CC1}"/>
               </a:ext>
             </a:extLst>
           </p:cNvPr>
@@ -6533,7 +5182,7 @@
         </p:nvSpPr>
         <p:spPr>
           <a:xfrm>
-            <a:off x="2059798" y="302880"/>
+            <a:off x="218588" y="229149"/>
             <a:ext cx="6097112" cy="369332"/>
           </a:xfrm>
           <a:prstGeom prst="rect">
@@ -6548,24 +5197,17 @@
           <a:lstStyle/>
           <a:p>
             <a:r>
-              <a:rPr lang="ko-KR" altLang="en-US" dirty="0"/>
-              <a:t>네이버개발자센터 </a:t>
-            </a:r>
-            <a:r>
-              <a:rPr lang="en-US" altLang="ko-KR" dirty="0"/>
-              <a:t>: </a:t>
-            </a:r>
-            <a:r>
-              <a:rPr lang="ko-KR" altLang="en-US" dirty="0"/>
-              <a:t>https://developers.naver.com/main/</a:t>
-            </a:r>
+              <a:rPr lang="ko-KR" altLang="en-US" dirty="0" err="1"/>
+              <a:t>Login.jsp</a:t>
+            </a:r>
+            <a:endParaRPr lang="ko-KR" altLang="en-US" dirty="0"/>
           </a:p>
         </p:txBody>
       </p:sp>
     </p:spTree>
     <p:extLst>
       <p:ext uri="{BB962C8B-B14F-4D97-AF65-F5344CB8AC3E}">
-        <p14:creationId xmlns:p14="http://schemas.microsoft.com/office/powerpoint/2010/main" val="3780020630"/>
+        <p14:creationId xmlns:p14="http://schemas.microsoft.com/office/powerpoint/2010/main" val="671763046"/>
       </p:ext>
     </p:extLst>
   </p:cSld>
@@ -6580,7 +5222,13 @@
   <p:cSld>
     <p:spTree>
       <p:nvGrpSpPr>
-        <p:cNvPr id="1" name=""/>
+        <p:cNvPr id="1" name="">
+          <a:extLst>
+            <a:ext uri="{FF2B5EF4-FFF2-40B4-BE49-F238E27FC236}">
+              <a16:creationId xmlns:a16="http://schemas.microsoft.com/office/drawing/2014/main" id="{FF1EA408-2202-6335-5443-E36F2F5ABC5C}"/>
+            </a:ext>
+          </a:extLst>
+        </p:cNvPr>
         <p:cNvGrpSpPr/>
         <p:nvPr/>
       </p:nvGrpSpPr>
@@ -6592,12 +5240,59 @@
           <a:chExt cx="0" cy="0"/>
         </a:xfrm>
       </p:grpSpPr>
+      <p:sp>
+        <p:nvSpPr>
+          <p:cNvPr id="2" name="TextBox 1">
+            <a:extLst>
+              <a:ext uri="{FF2B5EF4-FFF2-40B4-BE49-F238E27FC236}">
+                <a16:creationId xmlns:a16="http://schemas.microsoft.com/office/drawing/2014/main" id="{417AF59E-BA62-56A1-6B74-1641258347A9}"/>
+              </a:ext>
+            </a:extLst>
+          </p:cNvPr>
+          <p:cNvSpPr txBox="1"/>
+          <p:nvPr/>
+        </p:nvSpPr>
+        <p:spPr>
+          <a:xfrm>
+            <a:off x="207818" y="290945"/>
+            <a:ext cx="4478855" cy="369332"/>
+          </a:xfrm>
+          <a:prstGeom prst="rect">
+            <a:avLst/>
+          </a:prstGeom>
+          <a:noFill/>
+        </p:spPr>
+        <p:txBody>
+          <a:bodyPr wrap="none" rtlCol="0">
+            <a:spAutoFit/>
+          </a:bodyPr>
+          <a:lstStyle/>
+          <a:p>
+            <a:r>
+              <a:rPr lang="en-US" altLang="ko-KR" dirty="0"/>
+              <a:t>member, login </a:t>
+            </a:r>
+            <a:r>
+              <a:rPr lang="ko-KR" altLang="en-US" dirty="0"/>
+              <a:t>파일들</a:t>
+            </a:r>
+            <a:r>
+              <a:rPr lang="en-US" altLang="ko-KR" dirty="0"/>
+              <a:t>(JAVA,JSP,SQL)</a:t>
+            </a:r>
+            <a:r>
+              <a:rPr lang="ko-KR" altLang="en-US" dirty="0"/>
+              <a:t> 생성</a:t>
+            </a:r>
+          </a:p>
+        </p:txBody>
+      </p:sp>
       <p:pic>
         <p:nvPicPr>
-          <p:cNvPr id="3" name="그림 2">
-            <a:extLst>
-              <a:ext uri="{FF2B5EF4-FFF2-40B4-BE49-F238E27FC236}">
-                <a16:creationId xmlns:a16="http://schemas.microsoft.com/office/drawing/2014/main" id="{9E2013FE-DA01-4856-4747-6247819CD0E5}"/>
+          <p:cNvPr id="4" name="그림 3">
+            <a:extLst>
+              <a:ext uri="{FF2B5EF4-FFF2-40B4-BE49-F238E27FC236}">
+                <a16:creationId xmlns:a16="http://schemas.microsoft.com/office/drawing/2014/main" id="{FA7584DC-2BF3-0E03-66D9-465A8171443F}"/>
               </a:ext>
             </a:extLst>
           </p:cNvPr>
@@ -6614,73 +5309,18 @@
         </p:blipFill>
         <p:spPr>
           <a:xfrm>
-            <a:off x="497999" y="739475"/>
-            <a:ext cx="4519235" cy="929008"/>
+            <a:off x="563035" y="1281326"/>
+            <a:ext cx="2123810" cy="1457143"/>
           </a:xfrm>
           <a:prstGeom prst="rect">
             <a:avLst/>
           </a:prstGeom>
         </p:spPr>
       </p:pic>
-      <p:sp>
-        <p:nvSpPr>
-          <p:cNvPr id="7" name="TextBox 6">
-            <a:extLst>
-              <a:ext uri="{FF2B5EF4-FFF2-40B4-BE49-F238E27FC236}">
-                <a16:creationId xmlns:a16="http://schemas.microsoft.com/office/drawing/2014/main" id="{12DF87A1-5212-0B1D-539E-527CDBFE1834}"/>
-              </a:ext>
-            </a:extLst>
-          </p:cNvPr>
-          <p:cNvSpPr txBox="1"/>
-          <p:nvPr/>
-        </p:nvSpPr>
-        <p:spPr>
-          <a:xfrm>
-            <a:off x="497999" y="198314"/>
-            <a:ext cx="6095010" cy="369332"/>
-          </a:xfrm>
-          <a:prstGeom prst="rect">
-            <a:avLst/>
-          </a:prstGeom>
-          <a:noFill/>
-        </p:spPr>
-        <p:txBody>
-          <a:bodyPr wrap="square">
-            <a:spAutoFit/>
-          </a:bodyPr>
-          <a:lstStyle/>
-          <a:p>
-            <a:r>
-              <a:rPr lang="ko-KR" altLang="en-US" dirty="0" err="1"/>
-              <a:t>Header.jsp</a:t>
-            </a:r>
-            <a:r>
-              <a:rPr lang="ko-KR" altLang="en-US" dirty="0"/>
-              <a:t> </a:t>
-            </a:r>
-            <a:r>
-              <a:rPr lang="ko-KR" altLang="en-US" dirty="0" err="1"/>
-              <a:t>에</a:t>
-            </a:r>
-            <a:r>
-              <a:rPr lang="ko-KR" altLang="en-US" dirty="0"/>
-              <a:t> </a:t>
-            </a:r>
-            <a:r>
-              <a:rPr lang="en-US" altLang="ko-KR" dirty="0"/>
-              <a:t>admin</a:t>
-            </a:r>
-            <a:r>
-              <a:rPr lang="ko-KR" altLang="en-US" dirty="0"/>
-              <a:t>만 접속 되도록 수정</a:t>
-            </a:r>
-          </a:p>
-        </p:txBody>
-      </p:sp>
     </p:spTree>
     <p:extLst>
       <p:ext uri="{BB962C8B-B14F-4D97-AF65-F5344CB8AC3E}">
-        <p14:creationId xmlns:p14="http://schemas.microsoft.com/office/powerpoint/2010/main" val="2298583339"/>
+        <p14:creationId xmlns:p14="http://schemas.microsoft.com/office/powerpoint/2010/main" val="2523352430"/>
       </p:ext>
     </p:extLst>
   </p:cSld>
@@ -6707,76 +5347,93 @@
           <a:chExt cx="0" cy="0"/>
         </a:xfrm>
       </p:grpSpPr>
-      <p:pic>
-        <p:nvPicPr>
-          <p:cNvPr id="4" name="그림 3">
-            <a:extLst>
-              <a:ext uri="{FF2B5EF4-FFF2-40B4-BE49-F238E27FC236}">
-                <a16:creationId xmlns:a16="http://schemas.microsoft.com/office/drawing/2014/main" id="{C6836B86-1703-42D4-B4B6-B5546386489B}"/>
-              </a:ext>
-            </a:extLst>
-          </p:cNvPr>
-          <p:cNvPicPr>
-            <a:picLocks noChangeAspect="1"/>
-          </p:cNvPicPr>
-          <p:nvPr/>
-        </p:nvPicPr>
-        <p:blipFill>
-          <a:blip r:embed="rId2"/>
-          <a:stretch>
-            <a:fillRect/>
-          </a:stretch>
-        </p:blipFill>
-        <p:spPr>
-          <a:xfrm>
-            <a:off x="227532" y="414866"/>
-            <a:ext cx="5868468" cy="4902200"/>
-          </a:xfrm>
-          <a:prstGeom prst="rect">
-            <a:avLst/>
-          </a:prstGeom>
-        </p:spPr>
-      </p:pic>
-      <p:sp>
-        <p:nvSpPr>
-          <p:cNvPr id="6" name="직사각형 5">
-            <a:extLst>
-              <a:ext uri="{FF2B5EF4-FFF2-40B4-BE49-F238E27FC236}">
-                <a16:creationId xmlns:a16="http://schemas.microsoft.com/office/drawing/2014/main" id="{EB3C32E2-0289-4C2F-A77E-4DA1F830780D}"/>
-              </a:ext>
-            </a:extLst>
-          </p:cNvPr>
-          <p:cNvSpPr/>
-          <p:nvPr/>
-        </p:nvSpPr>
-        <p:spPr>
-          <a:xfrm>
-            <a:off x="6349173" y="4947734"/>
-            <a:ext cx="1779654" cy="369332"/>
-          </a:xfrm>
-          <a:prstGeom prst="rect">
-            <a:avLst/>
-          </a:prstGeom>
-        </p:spPr>
-        <p:txBody>
-          <a:bodyPr wrap="none">
+      <p:cxnSp>
+        <p:nvCxnSpPr>
+          <p:cNvPr id="7" name="직선 화살표 연결선 6">
+            <a:extLst>
+              <a:ext uri="{FF2B5EF4-FFF2-40B4-BE49-F238E27FC236}">
+                <a16:creationId xmlns:a16="http://schemas.microsoft.com/office/drawing/2014/main" id="{DD7B584D-3866-4A67-AD76-209306499FFB}"/>
+              </a:ext>
+            </a:extLst>
+          </p:cNvPr>
+          <p:cNvCxnSpPr>
+            <a:cxnSpLocks/>
+            <a:stCxn id="15" idx="6"/>
+            <a:endCxn id="16" idx="1"/>
+          </p:cNvCxnSpPr>
+          <p:nvPr/>
+        </p:nvCxnSpPr>
+        <p:spPr>
+          <a:xfrm flipV="1">
+            <a:off x="2487930" y="1116330"/>
+            <a:ext cx="1832610" cy="1904"/>
+          </a:xfrm>
+          <a:prstGeom prst="straightConnector1">
+            <a:avLst/>
+          </a:prstGeom>
+          <a:ln>
+            <a:solidFill>
+              <a:srgbClr val="FF0000"/>
+            </a:solidFill>
+            <a:tailEnd type="triangle"/>
+          </a:ln>
+        </p:spPr>
+        <p:style>
+          <a:lnRef idx="1">
+            <a:schemeClr val="accent1"/>
+          </a:lnRef>
+          <a:fillRef idx="0">
+            <a:schemeClr val="accent1"/>
+          </a:fillRef>
+          <a:effectRef idx="0">
+            <a:schemeClr val="accent1"/>
+          </a:effectRef>
+          <a:fontRef idx="minor">
+            <a:schemeClr val="tx1"/>
+          </a:fontRef>
+        </p:style>
+      </p:cxnSp>
+      <p:sp>
+        <p:nvSpPr>
+          <p:cNvPr id="10" name="TextBox 9">
+            <a:extLst>
+              <a:ext uri="{FF2B5EF4-FFF2-40B4-BE49-F238E27FC236}">
+                <a16:creationId xmlns:a16="http://schemas.microsoft.com/office/drawing/2014/main" id="{9D9CD6A6-2AAC-42CA-A8CF-3A6D4ED66081}"/>
+              </a:ext>
+            </a:extLst>
+          </p:cNvPr>
+          <p:cNvSpPr txBox="1"/>
+          <p:nvPr/>
+        </p:nvSpPr>
+        <p:spPr>
+          <a:xfrm>
+            <a:off x="1985010" y="1503164"/>
+            <a:ext cx="2820003" cy="369332"/>
+          </a:xfrm>
+          <a:prstGeom prst="rect">
+            <a:avLst/>
+          </a:prstGeom>
+          <a:noFill/>
+        </p:spPr>
+        <p:txBody>
+          <a:bodyPr wrap="none" rtlCol="0">
             <a:spAutoFit/>
           </a:bodyPr>
           <a:lstStyle/>
           <a:p>
             <a:r>
               <a:rPr lang="ko-KR" altLang="en-US" dirty="0"/>
-              <a:t>http://localhost</a:t>
-            </a:r>
-          </a:p>
-        </p:txBody>
-      </p:sp>
-      <p:sp>
-        <p:nvSpPr>
-          <p:cNvPr id="7" name="직사각형 6">
-            <a:extLst>
-              <a:ext uri="{FF2B5EF4-FFF2-40B4-BE49-F238E27FC236}">
-                <a16:creationId xmlns:a16="http://schemas.microsoft.com/office/drawing/2014/main" id="{36CF7F50-61C4-45AA-AA18-DB15E1CF3F5C}"/>
+              <a:t>로그인 인증 주소 값 생성</a:t>
+            </a:r>
+          </a:p>
+        </p:txBody>
+      </p:sp>
+      <p:sp>
+        <p:nvSpPr>
+          <p:cNvPr id="15" name="타원 14">
+            <a:extLst>
+              <a:ext uri="{FF2B5EF4-FFF2-40B4-BE49-F238E27FC236}">
+                <a16:creationId xmlns:a16="http://schemas.microsoft.com/office/drawing/2014/main" id="{4762F075-CA97-4BE5-A149-F0A7228DA68A}"/>
               </a:ext>
             </a:extLst>
           </p:cNvPr>
@@ -6785,80 +5442,16 @@
         </p:nvSpPr>
         <p:spPr>
           <a:xfrm>
-            <a:off x="6349173" y="5489071"/>
-            <a:ext cx="3959867" cy="369332"/>
-          </a:xfrm>
-          <a:prstGeom prst="rect">
-            <a:avLst/>
-          </a:prstGeom>
-        </p:spPr>
-        <p:txBody>
-          <a:bodyPr wrap="none">
-            <a:spAutoFit/>
-          </a:bodyPr>
-          <a:lstStyle/>
-          <a:p>
-            <a:r>
-              <a:rPr lang="ko-KR" altLang="en-US" dirty="0"/>
-              <a:t>http://localhost/login/naverLogin.do</a:t>
-            </a:r>
-          </a:p>
-        </p:txBody>
-      </p:sp>
-      <p:pic>
-        <p:nvPicPr>
-          <p:cNvPr id="8" name="그림 7">
-            <a:extLst>
-              <a:ext uri="{FF2B5EF4-FFF2-40B4-BE49-F238E27FC236}">
-                <a16:creationId xmlns:a16="http://schemas.microsoft.com/office/drawing/2014/main" id="{BF6419F9-3B2C-453C-9FF6-D1086E036A6C}"/>
-              </a:ext>
-            </a:extLst>
-          </p:cNvPr>
-          <p:cNvPicPr>
-            <a:picLocks noChangeAspect="1"/>
-          </p:cNvPicPr>
-          <p:nvPr/>
-        </p:nvPicPr>
-        <p:blipFill>
-          <a:blip r:embed="rId3"/>
-          <a:stretch>
-            <a:fillRect/>
-          </a:stretch>
-        </p:blipFill>
-        <p:spPr>
-          <a:xfrm>
-            <a:off x="6576483" y="0"/>
-            <a:ext cx="5022850" cy="4955429"/>
-          </a:xfrm>
-          <a:prstGeom prst="rect">
-            <a:avLst/>
-          </a:prstGeom>
-        </p:spPr>
-      </p:pic>
-      <p:sp>
-        <p:nvSpPr>
-          <p:cNvPr id="9" name="직사각형 8">
-            <a:extLst>
-              <a:ext uri="{FF2B5EF4-FFF2-40B4-BE49-F238E27FC236}">
-                <a16:creationId xmlns:a16="http://schemas.microsoft.com/office/drawing/2014/main" id="{771369E4-FD35-436F-8283-32BD6433A58C}"/>
-              </a:ext>
-            </a:extLst>
-          </p:cNvPr>
-          <p:cNvSpPr/>
-          <p:nvPr/>
-        </p:nvSpPr>
-        <p:spPr>
-          <a:xfrm>
-            <a:off x="6576483" y="516467"/>
-            <a:ext cx="1136650" cy="369332"/>
-          </a:xfrm>
-          <a:prstGeom prst="rect">
+            <a:off x="1236345" y="768190"/>
+            <a:ext cx="1251585" cy="700088"/>
+          </a:xfrm>
+          <a:prstGeom prst="ellipse">
             <a:avLst/>
           </a:prstGeom>
           <a:noFill/>
           <a:ln>
             <a:solidFill>
-              <a:srgbClr val="FF0000"/>
+              <a:schemeClr val="tx1"/>
             </a:solidFill>
           </a:ln>
         </p:spPr>
@@ -6883,16 +5476,28 @@
           <a:lstStyle/>
           <a:p>
             <a:pPr algn="ctr"/>
-            <a:endParaRPr lang="ko-KR" altLang="en-US"/>
-          </a:p>
-        </p:txBody>
-      </p:sp>
-      <p:sp>
-        <p:nvSpPr>
-          <p:cNvPr id="12" name="직사각형 11">
-            <a:extLst>
-              <a:ext uri="{FF2B5EF4-FFF2-40B4-BE49-F238E27FC236}">
-                <a16:creationId xmlns:a16="http://schemas.microsoft.com/office/drawing/2014/main" id="{E34E3D17-A522-4C5F-BEA5-F60BEA1F6D18}"/>
+            <a:r>
+              <a:rPr lang="ko-KR" altLang="en-US">
+                <a:solidFill>
+                  <a:schemeClr val="tx1"/>
+                </a:solidFill>
+              </a:rPr>
+              <a:t>사용자</a:t>
+            </a:r>
+            <a:endParaRPr lang="ko-KR" altLang="en-US" dirty="0">
+              <a:solidFill>
+                <a:schemeClr val="tx1"/>
+              </a:solidFill>
+            </a:endParaRPr>
+          </a:p>
+        </p:txBody>
+      </p:sp>
+      <p:sp>
+        <p:nvSpPr>
+          <p:cNvPr id="16" name="직사각형 15">
+            <a:extLst>
+              <a:ext uri="{FF2B5EF4-FFF2-40B4-BE49-F238E27FC236}">
+                <a16:creationId xmlns:a16="http://schemas.microsoft.com/office/drawing/2014/main" id="{EFC2B610-395D-466D-A4BE-D09AF22DE2E2}"/>
               </a:ext>
             </a:extLst>
           </p:cNvPr>
@@ -6901,8 +5506,8 @@
         </p:nvSpPr>
         <p:spPr>
           <a:xfrm>
-            <a:off x="6670675" y="1294043"/>
-            <a:ext cx="4513792" cy="369332"/>
+            <a:off x="4320540" y="830580"/>
+            <a:ext cx="1664970" cy="571500"/>
           </a:xfrm>
           <a:prstGeom prst="rect">
             <a:avLst/>
@@ -6910,7 +5515,7 @@
           <a:noFill/>
           <a:ln>
             <a:solidFill>
-              <a:srgbClr val="FF0000"/>
+              <a:schemeClr val="tx1"/>
             </a:solidFill>
           </a:ln>
         </p:spPr>
@@ -6935,16 +5540,39 @@
           <a:lstStyle/>
           <a:p>
             <a:pPr algn="ctr"/>
-            <a:endParaRPr lang="ko-KR" altLang="en-US"/>
-          </a:p>
-        </p:txBody>
-      </p:sp>
-      <p:sp>
-        <p:nvSpPr>
-          <p:cNvPr id="13" name="직사각형 12">
-            <a:extLst>
-              <a:ext uri="{FF2B5EF4-FFF2-40B4-BE49-F238E27FC236}">
-                <a16:creationId xmlns:a16="http://schemas.microsoft.com/office/drawing/2014/main" id="{6BDC179B-92BB-4CB3-AF5E-5C0CB2213A40}"/>
+            <a:r>
+              <a:rPr lang="ko-KR" altLang="en-US" dirty="0">
+                <a:solidFill>
+                  <a:schemeClr val="tx1"/>
+                </a:solidFill>
+              </a:rPr>
+              <a:t>로그인 </a:t>
+            </a:r>
+            <a:endParaRPr lang="en-US" altLang="ko-KR" dirty="0">
+              <a:solidFill>
+                <a:schemeClr val="tx1"/>
+              </a:solidFill>
+            </a:endParaRPr>
+          </a:p>
+          <a:p>
+            <a:pPr algn="ctr"/>
+            <a:r>
+              <a:rPr lang="ko-KR" altLang="en-US" dirty="0">
+                <a:solidFill>
+                  <a:schemeClr val="tx1"/>
+                </a:solidFill>
+              </a:rPr>
+              <a:t>페이지 접속</a:t>
+            </a:r>
+          </a:p>
+        </p:txBody>
+      </p:sp>
+      <p:sp>
+        <p:nvSpPr>
+          <p:cNvPr id="22" name="직사각형 21">
+            <a:extLst>
+              <a:ext uri="{FF2B5EF4-FFF2-40B4-BE49-F238E27FC236}">
+                <a16:creationId xmlns:a16="http://schemas.microsoft.com/office/drawing/2014/main" id="{B7095C8D-BE22-43C8-8ABD-3550898F9AFF}"/>
               </a:ext>
             </a:extLst>
           </p:cNvPr>
@@ -6953,8 +5581,8 @@
         </p:nvSpPr>
         <p:spPr>
           <a:xfrm>
-            <a:off x="6670675" y="3605443"/>
-            <a:ext cx="4513792" cy="369332"/>
+            <a:off x="8313420" y="830580"/>
+            <a:ext cx="1664970" cy="571500"/>
           </a:xfrm>
           <a:prstGeom prst="rect">
             <a:avLst/>
@@ -6962,7 +5590,7 @@
           <a:noFill/>
           <a:ln>
             <a:solidFill>
-              <a:srgbClr val="FF0000"/>
+              <a:schemeClr val="tx1"/>
             </a:solidFill>
           </a:ln>
         </p:spPr>
@@ -6987,14 +5615,1145 @@
           <a:lstStyle/>
           <a:p>
             <a:pPr algn="ctr"/>
-            <a:endParaRPr lang="ko-KR" altLang="en-US"/>
+            <a:r>
+              <a:rPr lang="ko-KR" altLang="en-US" dirty="0">
+                <a:solidFill>
+                  <a:schemeClr val="tx1"/>
+                </a:solidFill>
+              </a:rPr>
+              <a:t>네이버 로그인 클릭</a:t>
+            </a:r>
+          </a:p>
+        </p:txBody>
+      </p:sp>
+      <p:cxnSp>
+        <p:nvCxnSpPr>
+          <p:cNvPr id="23" name="직선 화살표 연결선 22">
+            <a:extLst>
+              <a:ext uri="{FF2B5EF4-FFF2-40B4-BE49-F238E27FC236}">
+                <a16:creationId xmlns:a16="http://schemas.microsoft.com/office/drawing/2014/main" id="{123E198C-D8DE-4CD5-8A4A-42ACE74DD483}"/>
+              </a:ext>
+            </a:extLst>
+          </p:cNvPr>
+          <p:cNvCxnSpPr>
+            <a:cxnSpLocks/>
+            <a:stCxn id="16" idx="3"/>
+            <a:endCxn id="22" idx="1"/>
+          </p:cNvCxnSpPr>
+          <p:nvPr/>
+        </p:nvCxnSpPr>
+        <p:spPr>
+          <a:xfrm>
+            <a:off x="5985510" y="1116330"/>
+            <a:ext cx="2327910" cy="0"/>
+          </a:xfrm>
+          <a:prstGeom prst="straightConnector1">
+            <a:avLst/>
+          </a:prstGeom>
+          <a:ln>
+            <a:solidFill>
+              <a:srgbClr val="FF0000"/>
+            </a:solidFill>
+            <a:tailEnd type="triangle"/>
+          </a:ln>
+        </p:spPr>
+        <p:style>
+          <a:lnRef idx="1">
+            <a:schemeClr val="accent1"/>
+          </a:lnRef>
+          <a:fillRef idx="0">
+            <a:schemeClr val="accent1"/>
+          </a:fillRef>
+          <a:effectRef idx="0">
+            <a:schemeClr val="accent1"/>
+          </a:effectRef>
+          <a:fontRef idx="minor">
+            <a:schemeClr val="tx1"/>
+          </a:fontRef>
+        </p:style>
+      </p:cxnSp>
+      <p:sp>
+        <p:nvSpPr>
+          <p:cNvPr id="29" name="순서도: 판단 28">
+            <a:extLst>
+              <a:ext uri="{FF2B5EF4-FFF2-40B4-BE49-F238E27FC236}">
+                <a16:creationId xmlns:a16="http://schemas.microsoft.com/office/drawing/2014/main" id="{04C5A0A0-679C-4A4F-AE4B-4330A3CAE728}"/>
+              </a:ext>
+            </a:extLst>
+          </p:cNvPr>
+          <p:cNvSpPr/>
+          <p:nvPr/>
+        </p:nvSpPr>
+        <p:spPr>
+          <a:xfrm>
+            <a:off x="7837170" y="2548890"/>
+            <a:ext cx="2617470" cy="1333500"/>
+          </a:xfrm>
+          <a:prstGeom prst="flowChartDecision">
+            <a:avLst/>
+          </a:prstGeom>
+        </p:spPr>
+        <p:style>
+          <a:lnRef idx="2">
+            <a:schemeClr val="accent1">
+              <a:shade val="50000"/>
+            </a:schemeClr>
+          </a:lnRef>
+          <a:fillRef idx="1">
+            <a:schemeClr val="accent1"/>
+          </a:fillRef>
+          <a:effectRef idx="0">
+            <a:schemeClr val="accent1"/>
+          </a:effectRef>
+          <a:fontRef idx="minor">
+            <a:schemeClr val="lt1"/>
+          </a:fontRef>
+        </p:style>
+        <p:txBody>
+          <a:bodyPr rtlCol="0" anchor="ctr"/>
+          <a:lstStyle/>
+          <a:p>
+            <a:pPr algn="ctr"/>
+            <a:r>
+              <a:rPr lang="ko-KR" altLang="en-US" dirty="0">
+                <a:solidFill>
+                  <a:schemeClr val="bg1"/>
+                </a:solidFill>
+              </a:rPr>
+              <a:t>로그인 </a:t>
+            </a:r>
+            <a:endParaRPr lang="en-US" altLang="ko-KR" dirty="0">
+              <a:solidFill>
+                <a:schemeClr val="bg1"/>
+              </a:solidFill>
+            </a:endParaRPr>
+          </a:p>
+          <a:p>
+            <a:pPr algn="ctr"/>
+            <a:r>
+              <a:rPr lang="ko-KR" altLang="en-US" dirty="0">
+                <a:solidFill>
+                  <a:schemeClr val="bg1"/>
+                </a:solidFill>
+              </a:rPr>
+              <a:t>성공</a:t>
+            </a:r>
+          </a:p>
+        </p:txBody>
+      </p:sp>
+      <p:cxnSp>
+        <p:nvCxnSpPr>
+          <p:cNvPr id="31" name="직선 화살표 연결선 30">
+            <a:extLst>
+              <a:ext uri="{FF2B5EF4-FFF2-40B4-BE49-F238E27FC236}">
+                <a16:creationId xmlns:a16="http://schemas.microsoft.com/office/drawing/2014/main" id="{620BF5EC-EA7D-4E1A-93A1-129913ED6400}"/>
+              </a:ext>
+            </a:extLst>
+          </p:cNvPr>
+          <p:cNvCxnSpPr>
+            <a:cxnSpLocks/>
+            <a:stCxn id="22" idx="2"/>
+            <a:endCxn id="29" idx="0"/>
+          </p:cNvCxnSpPr>
+          <p:nvPr/>
+        </p:nvCxnSpPr>
+        <p:spPr>
+          <a:xfrm>
+            <a:off x="9145905" y="1402080"/>
+            <a:ext cx="0" cy="1146810"/>
+          </a:xfrm>
+          <a:prstGeom prst="straightConnector1">
+            <a:avLst/>
+          </a:prstGeom>
+          <a:ln>
+            <a:solidFill>
+              <a:srgbClr val="FF0000"/>
+            </a:solidFill>
+            <a:tailEnd type="triangle"/>
+          </a:ln>
+        </p:spPr>
+        <p:style>
+          <a:lnRef idx="1">
+            <a:schemeClr val="accent1"/>
+          </a:lnRef>
+          <a:fillRef idx="0">
+            <a:schemeClr val="accent1"/>
+          </a:fillRef>
+          <a:effectRef idx="0">
+            <a:schemeClr val="accent1"/>
+          </a:effectRef>
+          <a:fontRef idx="minor">
+            <a:schemeClr val="tx1"/>
+          </a:fontRef>
+        </p:style>
+      </p:cxnSp>
+      <p:sp>
+        <p:nvSpPr>
+          <p:cNvPr id="37" name="직사각형 36">
+            <a:extLst>
+              <a:ext uri="{FF2B5EF4-FFF2-40B4-BE49-F238E27FC236}">
+                <a16:creationId xmlns:a16="http://schemas.microsoft.com/office/drawing/2014/main" id="{46F53C13-A868-4CF4-98C0-648A40A0A2F8}"/>
+              </a:ext>
+            </a:extLst>
+          </p:cNvPr>
+          <p:cNvSpPr/>
+          <p:nvPr/>
+        </p:nvSpPr>
+        <p:spPr>
+          <a:xfrm>
+            <a:off x="4320540" y="2929890"/>
+            <a:ext cx="1775460" cy="571500"/>
+          </a:xfrm>
+          <a:prstGeom prst="rect">
+            <a:avLst/>
+          </a:prstGeom>
+          <a:noFill/>
+          <a:ln>
+            <a:solidFill>
+              <a:schemeClr val="tx1"/>
+            </a:solidFill>
+          </a:ln>
+        </p:spPr>
+        <p:style>
+          <a:lnRef idx="2">
+            <a:schemeClr val="accent1">
+              <a:shade val="50000"/>
+            </a:schemeClr>
+          </a:lnRef>
+          <a:fillRef idx="1">
+            <a:schemeClr val="accent1"/>
+          </a:fillRef>
+          <a:effectRef idx="0">
+            <a:schemeClr val="accent1"/>
+          </a:effectRef>
+          <a:fontRef idx="minor">
+            <a:schemeClr val="lt1"/>
+          </a:fontRef>
+        </p:style>
+        <p:txBody>
+          <a:bodyPr rtlCol="0" anchor="ctr"/>
+          <a:lstStyle/>
+          <a:p>
+            <a:pPr algn="ctr"/>
+            <a:r>
+              <a:rPr lang="ko-KR" altLang="en-US" dirty="0">
+                <a:solidFill>
+                  <a:schemeClr val="tx1"/>
+                </a:solidFill>
+              </a:rPr>
+              <a:t>네이버 </a:t>
+            </a:r>
+            <a:r>
+              <a:rPr lang="en-US" altLang="ko-KR" dirty="0">
+                <a:solidFill>
+                  <a:schemeClr val="tx1"/>
+                </a:solidFill>
+              </a:rPr>
+              <a:t>API</a:t>
+            </a:r>
+            <a:r>
+              <a:rPr lang="ko-KR" altLang="en-US" dirty="0">
+                <a:solidFill>
+                  <a:schemeClr val="tx1"/>
+                </a:solidFill>
+              </a:rPr>
+              <a:t>서버</a:t>
+            </a:r>
+            <a:endParaRPr lang="en-US" altLang="ko-KR" dirty="0">
+              <a:solidFill>
+                <a:schemeClr val="tx1"/>
+              </a:solidFill>
+            </a:endParaRPr>
+          </a:p>
+          <a:p>
+            <a:pPr algn="ctr"/>
+            <a:r>
+              <a:rPr lang="en-US" altLang="ko-KR" dirty="0">
+                <a:solidFill>
+                  <a:schemeClr val="tx1"/>
+                </a:solidFill>
+              </a:rPr>
+              <a:t>(</a:t>
+            </a:r>
+            <a:r>
+              <a:rPr lang="en-US" altLang="ko-KR" dirty="0" err="1">
+                <a:solidFill>
+                  <a:schemeClr val="tx1"/>
+                </a:solidFill>
+              </a:rPr>
+              <a:t>Oauth</a:t>
+            </a:r>
+            <a:r>
+              <a:rPr lang="en-US" altLang="ko-KR" dirty="0">
+                <a:solidFill>
+                  <a:schemeClr val="tx1"/>
+                </a:solidFill>
+              </a:rPr>
+              <a:t> </a:t>
+            </a:r>
+            <a:r>
+              <a:rPr lang="ko-KR" altLang="en-US" dirty="0">
+                <a:solidFill>
+                  <a:schemeClr val="tx1"/>
+                </a:solidFill>
+              </a:rPr>
+              <a:t>서버</a:t>
+            </a:r>
+            <a:r>
+              <a:rPr lang="en-US" altLang="ko-KR" dirty="0">
+                <a:solidFill>
+                  <a:schemeClr val="tx1"/>
+                </a:solidFill>
+              </a:rPr>
+              <a:t>)</a:t>
+            </a:r>
+            <a:endParaRPr lang="ko-KR" altLang="en-US" dirty="0">
+              <a:solidFill>
+                <a:schemeClr val="tx1"/>
+              </a:solidFill>
+            </a:endParaRPr>
+          </a:p>
+        </p:txBody>
+      </p:sp>
+      <p:cxnSp>
+        <p:nvCxnSpPr>
+          <p:cNvPr id="38" name="직선 화살표 연결선 37">
+            <a:extLst>
+              <a:ext uri="{FF2B5EF4-FFF2-40B4-BE49-F238E27FC236}">
+                <a16:creationId xmlns:a16="http://schemas.microsoft.com/office/drawing/2014/main" id="{AF0E2488-1604-42EA-8858-38465FAE08C7}"/>
+              </a:ext>
+            </a:extLst>
+          </p:cNvPr>
+          <p:cNvCxnSpPr>
+            <a:cxnSpLocks/>
+            <a:stCxn id="29" idx="1"/>
+            <a:endCxn id="37" idx="3"/>
+          </p:cNvCxnSpPr>
+          <p:nvPr/>
+        </p:nvCxnSpPr>
+        <p:spPr>
+          <a:xfrm flipH="1">
+            <a:off x="6096000" y="3215640"/>
+            <a:ext cx="1741170" cy="0"/>
+          </a:xfrm>
+          <a:prstGeom prst="straightConnector1">
+            <a:avLst/>
+          </a:prstGeom>
+          <a:ln>
+            <a:solidFill>
+              <a:srgbClr val="FF0000"/>
+            </a:solidFill>
+            <a:tailEnd type="triangle"/>
+          </a:ln>
+        </p:spPr>
+        <p:style>
+          <a:lnRef idx="1">
+            <a:schemeClr val="accent1"/>
+          </a:lnRef>
+          <a:fillRef idx="0">
+            <a:schemeClr val="accent1"/>
+          </a:fillRef>
+          <a:effectRef idx="0">
+            <a:schemeClr val="accent1"/>
+          </a:effectRef>
+          <a:fontRef idx="minor">
+            <a:schemeClr val="tx1"/>
+          </a:fontRef>
+        </p:style>
+      </p:cxnSp>
+      <p:sp>
+        <p:nvSpPr>
+          <p:cNvPr id="42" name="직사각형 41">
+            <a:extLst>
+              <a:ext uri="{FF2B5EF4-FFF2-40B4-BE49-F238E27FC236}">
+                <a16:creationId xmlns:a16="http://schemas.microsoft.com/office/drawing/2014/main" id="{396D257C-3B79-42A1-8B95-0AF779B9579D}"/>
+              </a:ext>
+            </a:extLst>
+          </p:cNvPr>
+          <p:cNvSpPr/>
+          <p:nvPr/>
+        </p:nvSpPr>
+        <p:spPr>
+          <a:xfrm>
+            <a:off x="1097280" y="2929890"/>
+            <a:ext cx="1775460" cy="571500"/>
+          </a:xfrm>
+          <a:prstGeom prst="rect">
+            <a:avLst/>
+          </a:prstGeom>
+          <a:noFill/>
+          <a:ln>
+            <a:solidFill>
+              <a:schemeClr val="tx1"/>
+            </a:solidFill>
+          </a:ln>
+        </p:spPr>
+        <p:style>
+          <a:lnRef idx="2">
+            <a:schemeClr val="accent1">
+              <a:shade val="50000"/>
+            </a:schemeClr>
+          </a:lnRef>
+          <a:fillRef idx="1">
+            <a:schemeClr val="accent1"/>
+          </a:fillRef>
+          <a:effectRef idx="0">
+            <a:schemeClr val="accent1"/>
+          </a:effectRef>
+          <a:fontRef idx="minor">
+            <a:schemeClr val="lt1"/>
+          </a:fontRef>
+        </p:style>
+        <p:txBody>
+          <a:bodyPr rtlCol="0" anchor="ctr"/>
+          <a:lstStyle/>
+          <a:p>
+            <a:pPr algn="ctr"/>
+            <a:r>
+              <a:rPr lang="en-US" altLang="ko-KR" dirty="0">
+                <a:solidFill>
+                  <a:schemeClr val="tx1"/>
+                </a:solidFill>
+              </a:rPr>
+              <a:t>Callback </a:t>
+            </a:r>
+            <a:r>
+              <a:rPr lang="en-US" altLang="ko-KR" dirty="0" err="1">
+                <a:solidFill>
+                  <a:schemeClr val="tx1"/>
+                </a:solidFill>
+              </a:rPr>
+              <a:t>Url</a:t>
+            </a:r>
+            <a:r>
+              <a:rPr lang="en-US" altLang="ko-KR" dirty="0">
+                <a:solidFill>
+                  <a:schemeClr val="tx1"/>
+                </a:solidFill>
+              </a:rPr>
+              <a:t> </a:t>
+            </a:r>
+          </a:p>
+          <a:p>
+            <a:pPr algn="ctr"/>
+            <a:r>
+              <a:rPr lang="ko-KR" altLang="en-US" dirty="0">
+                <a:solidFill>
+                  <a:schemeClr val="tx1"/>
+                </a:solidFill>
+              </a:rPr>
+              <a:t>호출</a:t>
+            </a:r>
+          </a:p>
+        </p:txBody>
+      </p:sp>
+      <p:sp>
+        <p:nvSpPr>
+          <p:cNvPr id="43" name="TextBox 42">
+            <a:extLst>
+              <a:ext uri="{FF2B5EF4-FFF2-40B4-BE49-F238E27FC236}">
+                <a16:creationId xmlns:a16="http://schemas.microsoft.com/office/drawing/2014/main" id="{1DDA0B5E-1E25-4C57-A93C-2FA6D7FBB8CE}"/>
+              </a:ext>
+            </a:extLst>
+          </p:cNvPr>
+          <p:cNvSpPr txBox="1"/>
+          <p:nvPr/>
+        </p:nvSpPr>
+        <p:spPr>
+          <a:xfrm>
+            <a:off x="7353300" y="2929890"/>
+            <a:ext cx="646331" cy="369332"/>
+          </a:xfrm>
+          <a:prstGeom prst="rect">
+            <a:avLst/>
+          </a:prstGeom>
+          <a:noFill/>
+        </p:spPr>
+        <p:txBody>
+          <a:bodyPr wrap="none" rtlCol="0">
+            <a:spAutoFit/>
+          </a:bodyPr>
+          <a:lstStyle/>
+          <a:p>
+            <a:r>
+              <a:rPr lang="ko-KR" altLang="en-US"/>
+              <a:t>성공</a:t>
+            </a:r>
+          </a:p>
+        </p:txBody>
+      </p:sp>
+      <p:cxnSp>
+        <p:nvCxnSpPr>
+          <p:cNvPr id="45" name="연결선: 꺾임 44">
+            <a:extLst>
+              <a:ext uri="{FF2B5EF4-FFF2-40B4-BE49-F238E27FC236}">
+                <a16:creationId xmlns:a16="http://schemas.microsoft.com/office/drawing/2014/main" id="{4FCAECD7-4DC9-428A-9D68-C25024FDB913}"/>
+              </a:ext>
+            </a:extLst>
+          </p:cNvPr>
+          <p:cNvCxnSpPr>
+            <a:cxnSpLocks/>
+            <a:endCxn id="16" idx="0"/>
+          </p:cNvCxnSpPr>
+          <p:nvPr/>
+        </p:nvCxnSpPr>
+        <p:spPr>
+          <a:xfrm rot="10800000">
+            <a:off x="5153026" y="830580"/>
+            <a:ext cx="5339717" cy="2385060"/>
+          </a:xfrm>
+          <a:prstGeom prst="bentConnector4">
+            <a:avLst>
+              <a:gd name="adj1" fmla="val -14020"/>
+              <a:gd name="adj2" fmla="val 109585"/>
+            </a:avLst>
+          </a:prstGeom>
+          <a:ln>
+            <a:tailEnd type="triangle"/>
+          </a:ln>
+        </p:spPr>
+        <p:style>
+          <a:lnRef idx="1">
+            <a:schemeClr val="accent1"/>
+          </a:lnRef>
+          <a:fillRef idx="0">
+            <a:schemeClr val="accent1"/>
+          </a:fillRef>
+          <a:effectRef idx="0">
+            <a:schemeClr val="accent1"/>
+          </a:effectRef>
+          <a:fontRef idx="minor">
+            <a:schemeClr val="tx1"/>
+          </a:fontRef>
+        </p:style>
+      </p:cxnSp>
+      <p:sp>
+        <p:nvSpPr>
+          <p:cNvPr id="48" name="TextBox 47">
+            <a:extLst>
+              <a:ext uri="{FF2B5EF4-FFF2-40B4-BE49-F238E27FC236}">
+                <a16:creationId xmlns:a16="http://schemas.microsoft.com/office/drawing/2014/main" id="{F157D4E6-0ED9-4196-A10A-081A74DA1272}"/>
+              </a:ext>
+            </a:extLst>
+          </p:cNvPr>
+          <p:cNvSpPr txBox="1"/>
+          <p:nvPr/>
+        </p:nvSpPr>
+        <p:spPr>
+          <a:xfrm>
+            <a:off x="10382398" y="2929890"/>
+            <a:ext cx="646331" cy="369332"/>
+          </a:xfrm>
+          <a:prstGeom prst="rect">
+            <a:avLst/>
+          </a:prstGeom>
+          <a:noFill/>
+        </p:spPr>
+        <p:txBody>
+          <a:bodyPr wrap="none" rtlCol="0">
+            <a:spAutoFit/>
+          </a:bodyPr>
+          <a:lstStyle/>
+          <a:p>
+            <a:r>
+              <a:rPr lang="ko-KR" altLang="en-US" dirty="0"/>
+              <a:t>실패</a:t>
+            </a:r>
+          </a:p>
+        </p:txBody>
+      </p:sp>
+      <p:cxnSp>
+        <p:nvCxnSpPr>
+          <p:cNvPr id="51" name="직선 화살표 연결선 50">
+            <a:extLst>
+              <a:ext uri="{FF2B5EF4-FFF2-40B4-BE49-F238E27FC236}">
+                <a16:creationId xmlns:a16="http://schemas.microsoft.com/office/drawing/2014/main" id="{1D10AFA5-2B7F-4CBD-9973-4B9391112EDB}"/>
+              </a:ext>
+            </a:extLst>
+          </p:cNvPr>
+          <p:cNvCxnSpPr>
+            <a:cxnSpLocks/>
+            <a:stCxn id="37" idx="1"/>
+            <a:endCxn id="42" idx="3"/>
+          </p:cNvCxnSpPr>
+          <p:nvPr/>
+        </p:nvCxnSpPr>
+        <p:spPr>
+          <a:xfrm flipH="1">
+            <a:off x="2872740" y="3215640"/>
+            <a:ext cx="1447800" cy="0"/>
+          </a:xfrm>
+          <a:prstGeom prst="straightConnector1">
+            <a:avLst/>
+          </a:prstGeom>
+          <a:ln>
+            <a:solidFill>
+              <a:srgbClr val="FF0000"/>
+            </a:solidFill>
+            <a:tailEnd type="triangle"/>
+          </a:ln>
+        </p:spPr>
+        <p:style>
+          <a:lnRef idx="1">
+            <a:schemeClr val="accent1"/>
+          </a:lnRef>
+          <a:fillRef idx="0">
+            <a:schemeClr val="accent1"/>
+          </a:fillRef>
+          <a:effectRef idx="0">
+            <a:schemeClr val="accent1"/>
+          </a:effectRef>
+          <a:fontRef idx="minor">
+            <a:schemeClr val="tx1"/>
+          </a:fontRef>
+        </p:style>
+      </p:cxnSp>
+      <p:sp>
+        <p:nvSpPr>
+          <p:cNvPr id="55" name="직사각형 54">
+            <a:extLst>
+              <a:ext uri="{FF2B5EF4-FFF2-40B4-BE49-F238E27FC236}">
+                <a16:creationId xmlns:a16="http://schemas.microsoft.com/office/drawing/2014/main" id="{14CC77D7-65B8-4417-801D-03A3CF01A898}"/>
+              </a:ext>
+            </a:extLst>
+          </p:cNvPr>
+          <p:cNvSpPr/>
+          <p:nvPr/>
+        </p:nvSpPr>
+        <p:spPr>
+          <a:xfrm>
+            <a:off x="1021080" y="4819412"/>
+            <a:ext cx="1958340" cy="571500"/>
+          </a:xfrm>
+          <a:prstGeom prst="rect">
+            <a:avLst/>
+          </a:prstGeom>
+          <a:noFill/>
+          <a:ln>
+            <a:solidFill>
+              <a:schemeClr val="tx1"/>
+            </a:solidFill>
+          </a:ln>
+        </p:spPr>
+        <p:style>
+          <a:lnRef idx="2">
+            <a:schemeClr val="accent1">
+              <a:shade val="50000"/>
+            </a:schemeClr>
+          </a:lnRef>
+          <a:fillRef idx="1">
+            <a:schemeClr val="accent1"/>
+          </a:fillRef>
+          <a:effectRef idx="0">
+            <a:schemeClr val="accent1"/>
+          </a:effectRef>
+          <a:fontRef idx="minor">
+            <a:schemeClr val="lt1"/>
+          </a:fontRef>
+        </p:style>
+        <p:txBody>
+          <a:bodyPr rtlCol="0" anchor="ctr"/>
+          <a:lstStyle/>
+          <a:p>
+            <a:pPr algn="ctr"/>
+            <a:r>
+              <a:rPr lang="en-US" altLang="ko-KR" dirty="0">
+                <a:solidFill>
+                  <a:schemeClr val="tx1"/>
+                </a:solidFill>
+              </a:rPr>
+              <a:t>code,</a:t>
+            </a:r>
+            <a:r>
+              <a:rPr lang="ko-KR" altLang="en-US" dirty="0">
+                <a:solidFill>
+                  <a:schemeClr val="tx1"/>
+                </a:solidFill>
+              </a:rPr>
+              <a:t> </a:t>
+            </a:r>
+            <a:r>
+              <a:rPr lang="en-US" altLang="ko-KR" dirty="0">
+                <a:solidFill>
+                  <a:schemeClr val="tx1"/>
+                </a:solidFill>
+              </a:rPr>
+              <a:t>state</a:t>
+            </a:r>
+            <a:r>
+              <a:rPr lang="ko-KR" altLang="en-US" dirty="0">
+                <a:solidFill>
+                  <a:schemeClr val="tx1"/>
+                </a:solidFill>
+              </a:rPr>
+              <a:t>값을 가지고 토큰 생성</a:t>
+            </a:r>
+          </a:p>
+        </p:txBody>
+      </p:sp>
+      <p:sp>
+        <p:nvSpPr>
+          <p:cNvPr id="56" name="TextBox 55">
+            <a:extLst>
+              <a:ext uri="{FF2B5EF4-FFF2-40B4-BE49-F238E27FC236}">
+                <a16:creationId xmlns:a16="http://schemas.microsoft.com/office/drawing/2014/main" id="{BFF627C6-2CDE-433C-82F5-C39A65CF541E}"/>
+              </a:ext>
+            </a:extLst>
+          </p:cNvPr>
+          <p:cNvSpPr txBox="1"/>
+          <p:nvPr/>
+        </p:nvSpPr>
+        <p:spPr>
+          <a:xfrm>
+            <a:off x="1021080" y="5486400"/>
+            <a:ext cx="1518364" cy="369332"/>
+          </a:xfrm>
+          <a:prstGeom prst="rect">
+            <a:avLst/>
+          </a:prstGeom>
+          <a:noFill/>
+        </p:spPr>
+        <p:txBody>
+          <a:bodyPr wrap="none" rtlCol="0">
+            <a:spAutoFit/>
+          </a:bodyPr>
+          <a:lstStyle/>
+          <a:p>
+            <a:r>
+              <a:rPr lang="en-US" altLang="ko-KR" dirty="0">
+                <a:solidFill>
+                  <a:schemeClr val="accent2"/>
+                </a:solidFill>
+              </a:rPr>
+              <a:t>*</a:t>
+            </a:r>
+            <a:r>
+              <a:rPr lang="ko-KR" altLang="en-US" dirty="0">
+                <a:solidFill>
+                  <a:schemeClr val="accent2"/>
+                </a:solidFill>
+              </a:rPr>
+              <a:t>네이버 기준</a:t>
+            </a:r>
+          </a:p>
+        </p:txBody>
+      </p:sp>
+      <p:cxnSp>
+        <p:nvCxnSpPr>
+          <p:cNvPr id="57" name="직선 화살표 연결선 56">
+            <a:extLst>
+              <a:ext uri="{FF2B5EF4-FFF2-40B4-BE49-F238E27FC236}">
+                <a16:creationId xmlns:a16="http://schemas.microsoft.com/office/drawing/2014/main" id="{A87639A2-E644-46CB-A674-E8AEA3518DBF}"/>
+              </a:ext>
+            </a:extLst>
+          </p:cNvPr>
+          <p:cNvCxnSpPr>
+            <a:cxnSpLocks/>
+            <a:stCxn id="42" idx="2"/>
+            <a:endCxn id="55" idx="0"/>
+          </p:cNvCxnSpPr>
+          <p:nvPr/>
+        </p:nvCxnSpPr>
+        <p:spPr>
+          <a:xfrm>
+            <a:off x="1985010" y="3501390"/>
+            <a:ext cx="15240" cy="1318022"/>
+          </a:xfrm>
+          <a:prstGeom prst="straightConnector1">
+            <a:avLst/>
+          </a:prstGeom>
+          <a:ln>
+            <a:solidFill>
+              <a:srgbClr val="FF0000"/>
+            </a:solidFill>
+            <a:tailEnd type="triangle"/>
+          </a:ln>
+        </p:spPr>
+        <p:style>
+          <a:lnRef idx="1">
+            <a:schemeClr val="accent1"/>
+          </a:lnRef>
+          <a:fillRef idx="0">
+            <a:schemeClr val="accent1"/>
+          </a:fillRef>
+          <a:effectRef idx="0">
+            <a:schemeClr val="accent1"/>
+          </a:effectRef>
+          <a:fontRef idx="minor">
+            <a:schemeClr val="tx1"/>
+          </a:fontRef>
+        </p:style>
+      </p:cxnSp>
+      <p:sp>
+        <p:nvSpPr>
+          <p:cNvPr id="62" name="직사각형 61">
+            <a:extLst>
+              <a:ext uri="{FF2B5EF4-FFF2-40B4-BE49-F238E27FC236}">
+                <a16:creationId xmlns:a16="http://schemas.microsoft.com/office/drawing/2014/main" id="{C0FDBA2B-39B8-46DB-976E-4F67ABE6F690}"/>
+              </a:ext>
+            </a:extLst>
+          </p:cNvPr>
+          <p:cNvSpPr/>
+          <p:nvPr/>
+        </p:nvSpPr>
+        <p:spPr>
+          <a:xfrm>
+            <a:off x="4267200" y="4701301"/>
+            <a:ext cx="1958340" cy="807951"/>
+          </a:xfrm>
+          <a:prstGeom prst="rect">
+            <a:avLst/>
+          </a:prstGeom>
+          <a:noFill/>
+          <a:ln>
+            <a:solidFill>
+              <a:schemeClr val="tx1"/>
+            </a:solidFill>
+          </a:ln>
+        </p:spPr>
+        <p:style>
+          <a:lnRef idx="2">
+            <a:schemeClr val="accent1">
+              <a:shade val="50000"/>
+            </a:schemeClr>
+          </a:lnRef>
+          <a:fillRef idx="1">
+            <a:schemeClr val="accent1"/>
+          </a:fillRef>
+          <a:effectRef idx="0">
+            <a:schemeClr val="accent1"/>
+          </a:effectRef>
+          <a:fontRef idx="minor">
+            <a:schemeClr val="lt1"/>
+          </a:fontRef>
+        </p:style>
+        <p:txBody>
+          <a:bodyPr rtlCol="0" anchor="ctr"/>
+          <a:lstStyle/>
+          <a:p>
+            <a:pPr algn="ctr"/>
+            <a:r>
+              <a:rPr lang="ko-KR" altLang="en-US" dirty="0">
+                <a:solidFill>
+                  <a:schemeClr val="tx1"/>
+                </a:solidFill>
+              </a:rPr>
+              <a:t>토큰 값을 가지고 사용자 프로필 </a:t>
+            </a:r>
+            <a:r>
+              <a:rPr lang="en-US" altLang="ko-KR" dirty="0">
+                <a:solidFill>
+                  <a:schemeClr val="tx1"/>
+                </a:solidFill>
+              </a:rPr>
+              <a:t>API</a:t>
+            </a:r>
+            <a:r>
+              <a:rPr lang="ko-KR" altLang="en-US" dirty="0">
+                <a:solidFill>
+                  <a:schemeClr val="tx1"/>
+                </a:solidFill>
+              </a:rPr>
+              <a:t>호출</a:t>
+            </a:r>
+          </a:p>
+        </p:txBody>
+      </p:sp>
+      <p:cxnSp>
+        <p:nvCxnSpPr>
+          <p:cNvPr id="63" name="직선 화살표 연결선 62">
+            <a:extLst>
+              <a:ext uri="{FF2B5EF4-FFF2-40B4-BE49-F238E27FC236}">
+                <a16:creationId xmlns:a16="http://schemas.microsoft.com/office/drawing/2014/main" id="{36FDF8D6-5E51-4BDE-A8E3-73A79F7EAE45}"/>
+              </a:ext>
+            </a:extLst>
+          </p:cNvPr>
+          <p:cNvCxnSpPr>
+            <a:cxnSpLocks/>
+            <a:stCxn id="55" idx="3"/>
+            <a:endCxn id="62" idx="1"/>
+          </p:cNvCxnSpPr>
+          <p:nvPr/>
+        </p:nvCxnSpPr>
+        <p:spPr>
+          <a:xfrm>
+            <a:off x="2979420" y="5105162"/>
+            <a:ext cx="1287780" cy="115"/>
+          </a:xfrm>
+          <a:prstGeom prst="straightConnector1">
+            <a:avLst/>
+          </a:prstGeom>
+          <a:ln>
+            <a:solidFill>
+              <a:srgbClr val="FF0000"/>
+            </a:solidFill>
+            <a:tailEnd type="triangle"/>
+          </a:ln>
+        </p:spPr>
+        <p:style>
+          <a:lnRef idx="1">
+            <a:schemeClr val="accent1"/>
+          </a:lnRef>
+          <a:fillRef idx="0">
+            <a:schemeClr val="accent1"/>
+          </a:fillRef>
+          <a:effectRef idx="0">
+            <a:schemeClr val="accent1"/>
+          </a:effectRef>
+          <a:fontRef idx="minor">
+            <a:schemeClr val="tx1"/>
+          </a:fontRef>
+        </p:style>
+      </p:cxnSp>
+      <p:cxnSp>
+        <p:nvCxnSpPr>
+          <p:cNvPr id="68" name="직선 화살표 연결선 67">
+            <a:extLst>
+              <a:ext uri="{FF2B5EF4-FFF2-40B4-BE49-F238E27FC236}">
+                <a16:creationId xmlns:a16="http://schemas.microsoft.com/office/drawing/2014/main" id="{579BEDC9-592E-4FAB-872F-B0D5BCFB0A6E}"/>
+              </a:ext>
+            </a:extLst>
+          </p:cNvPr>
+          <p:cNvCxnSpPr>
+            <a:cxnSpLocks/>
+            <a:stCxn id="62" idx="3"/>
+          </p:cNvCxnSpPr>
+          <p:nvPr/>
+        </p:nvCxnSpPr>
+        <p:spPr>
+          <a:xfrm>
+            <a:off x="6225540" y="5105277"/>
+            <a:ext cx="1941195" cy="0"/>
+          </a:xfrm>
+          <a:prstGeom prst="straightConnector1">
+            <a:avLst/>
+          </a:prstGeom>
+          <a:ln>
+            <a:solidFill>
+              <a:srgbClr val="FF0000"/>
+            </a:solidFill>
+            <a:tailEnd type="triangle"/>
+          </a:ln>
+        </p:spPr>
+        <p:style>
+          <a:lnRef idx="1">
+            <a:schemeClr val="accent1"/>
+          </a:lnRef>
+          <a:fillRef idx="0">
+            <a:schemeClr val="accent1"/>
+          </a:fillRef>
+          <a:effectRef idx="0">
+            <a:schemeClr val="accent1"/>
+          </a:effectRef>
+          <a:fontRef idx="minor">
+            <a:schemeClr val="tx1"/>
+          </a:fontRef>
+        </p:style>
+      </p:cxnSp>
+      <p:sp>
+        <p:nvSpPr>
+          <p:cNvPr id="71" name="TextBox 70">
+            <a:extLst>
+              <a:ext uri="{FF2B5EF4-FFF2-40B4-BE49-F238E27FC236}">
+                <a16:creationId xmlns:a16="http://schemas.microsoft.com/office/drawing/2014/main" id="{231E8957-1297-4387-BF8F-1AB2BB640788}"/>
+              </a:ext>
+            </a:extLst>
+          </p:cNvPr>
+          <p:cNvSpPr txBox="1"/>
+          <p:nvPr/>
+        </p:nvSpPr>
+        <p:spPr>
+          <a:xfrm>
+            <a:off x="128938" y="163650"/>
+            <a:ext cx="3403432" cy="369332"/>
+          </a:xfrm>
+          <a:prstGeom prst="rect">
+            <a:avLst/>
+          </a:prstGeom>
+          <a:noFill/>
+        </p:spPr>
+        <p:txBody>
+          <a:bodyPr wrap="none" rtlCol="0">
+            <a:spAutoFit/>
+          </a:bodyPr>
+          <a:lstStyle/>
+          <a:p>
+            <a:r>
+              <a:rPr lang="en-US" altLang="ko-KR" dirty="0"/>
+              <a:t>OAuth2.0 </a:t>
+            </a:r>
+            <a:r>
+              <a:rPr lang="ko-KR" altLang="en-US" dirty="0"/>
+              <a:t>네이버로그인</a:t>
+            </a:r>
+            <a:r>
+              <a:rPr lang="en-US" altLang="ko-KR" dirty="0"/>
+              <a:t> </a:t>
+            </a:r>
+            <a:r>
+              <a:rPr lang="ko-KR" altLang="en-US" dirty="0"/>
+              <a:t>흐름도</a:t>
+            </a:r>
+          </a:p>
+        </p:txBody>
+      </p:sp>
+      <p:sp>
+        <p:nvSpPr>
+          <p:cNvPr id="72" name="TextBox 71">
+            <a:extLst>
+              <a:ext uri="{FF2B5EF4-FFF2-40B4-BE49-F238E27FC236}">
+                <a16:creationId xmlns:a16="http://schemas.microsoft.com/office/drawing/2014/main" id="{A3DCEA3F-FE87-47D1-9B5F-EB867DBA4CF4}"/>
+              </a:ext>
+            </a:extLst>
+          </p:cNvPr>
+          <p:cNvSpPr txBox="1"/>
+          <p:nvPr/>
+        </p:nvSpPr>
+        <p:spPr>
+          <a:xfrm>
+            <a:off x="4267200" y="3619502"/>
+            <a:ext cx="4269117" cy="646331"/>
+          </a:xfrm>
+          <a:prstGeom prst="rect">
+            <a:avLst/>
+          </a:prstGeom>
+          <a:noFill/>
+        </p:spPr>
+        <p:txBody>
+          <a:bodyPr wrap="none" rtlCol="0">
+            <a:spAutoFit/>
+          </a:bodyPr>
+          <a:lstStyle/>
+          <a:p>
+            <a:r>
+              <a:rPr lang="en-US" altLang="ko-KR" dirty="0">
+                <a:solidFill>
+                  <a:schemeClr val="accent2"/>
+                </a:solidFill>
+              </a:rPr>
+              <a:t>* </a:t>
+            </a:r>
+            <a:r>
+              <a:rPr lang="ko-KR" altLang="en-US" dirty="0">
+                <a:solidFill>
+                  <a:schemeClr val="accent2"/>
+                </a:solidFill>
+              </a:rPr>
+              <a:t>처음 접속 시 프로필</a:t>
+            </a:r>
+            <a:r>
+              <a:rPr lang="en-US" altLang="ko-KR" dirty="0">
+                <a:solidFill>
+                  <a:schemeClr val="accent2"/>
+                </a:solidFill>
+              </a:rPr>
+              <a:t>API</a:t>
+            </a:r>
+            <a:r>
+              <a:rPr lang="ko-KR" altLang="en-US" dirty="0">
+                <a:solidFill>
+                  <a:schemeClr val="accent2"/>
+                </a:solidFill>
+              </a:rPr>
+              <a:t>동의여부 확인</a:t>
+            </a:r>
+            <a:endParaRPr lang="en-US" altLang="ko-KR" dirty="0">
+              <a:solidFill>
+                <a:schemeClr val="accent2"/>
+              </a:solidFill>
+            </a:endParaRPr>
+          </a:p>
+          <a:p>
+            <a:r>
+              <a:rPr lang="ko-KR" altLang="en-US" dirty="0">
+                <a:solidFill>
+                  <a:schemeClr val="accent2"/>
+                </a:solidFill>
+              </a:rPr>
+              <a:t>후 다음 프로세스 진행</a:t>
+            </a:r>
+          </a:p>
+        </p:txBody>
+      </p:sp>
+      <p:sp>
+        <p:nvSpPr>
+          <p:cNvPr id="74" name="타원 73">
+            <a:extLst>
+              <a:ext uri="{FF2B5EF4-FFF2-40B4-BE49-F238E27FC236}">
+                <a16:creationId xmlns:a16="http://schemas.microsoft.com/office/drawing/2014/main" id="{882CD6B8-8481-4CBE-BAE5-E26FA1CF7AB4}"/>
+              </a:ext>
+            </a:extLst>
+          </p:cNvPr>
+          <p:cNvSpPr/>
+          <p:nvPr/>
+        </p:nvSpPr>
+        <p:spPr>
+          <a:xfrm>
+            <a:off x="8166735" y="4732155"/>
+            <a:ext cx="2040255" cy="700088"/>
+          </a:xfrm>
+          <a:prstGeom prst="ellipse">
+            <a:avLst/>
+          </a:prstGeom>
+          <a:noFill/>
+          <a:ln>
+            <a:solidFill>
+              <a:schemeClr val="tx1"/>
+            </a:solidFill>
+          </a:ln>
+        </p:spPr>
+        <p:style>
+          <a:lnRef idx="2">
+            <a:schemeClr val="accent1">
+              <a:shade val="50000"/>
+            </a:schemeClr>
+          </a:lnRef>
+          <a:fillRef idx="1">
+            <a:schemeClr val="accent1"/>
+          </a:fillRef>
+          <a:effectRef idx="0">
+            <a:schemeClr val="accent1"/>
+          </a:effectRef>
+          <a:fontRef idx="minor">
+            <a:schemeClr val="lt1"/>
+          </a:fontRef>
+        </p:style>
+        <p:txBody>
+          <a:bodyPr rtlCol="0" anchor="ctr"/>
+          <a:lstStyle/>
+          <a:p>
+            <a:pPr algn="ctr"/>
+            <a:r>
+              <a:rPr lang="ko-KR" altLang="en-US" dirty="0">
+                <a:solidFill>
+                  <a:schemeClr val="tx1"/>
+                </a:solidFill>
+              </a:rPr>
+              <a:t>회원가입 및 </a:t>
+            </a:r>
+            <a:endParaRPr lang="en-US" altLang="ko-KR" dirty="0">
+              <a:solidFill>
+                <a:schemeClr val="tx1"/>
+              </a:solidFill>
+            </a:endParaRPr>
+          </a:p>
+          <a:p>
+            <a:pPr algn="ctr"/>
+            <a:r>
+              <a:rPr lang="ko-KR" altLang="en-US" dirty="0">
+                <a:solidFill>
+                  <a:schemeClr val="tx1"/>
+                </a:solidFill>
+              </a:rPr>
+              <a:t>로그인 </a:t>
+            </a:r>
           </a:p>
         </p:txBody>
       </p:sp>
     </p:spTree>
     <p:extLst>
       <p:ext uri="{BB962C8B-B14F-4D97-AF65-F5344CB8AC3E}">
-        <p14:creationId xmlns:p14="http://schemas.microsoft.com/office/powerpoint/2010/main" val="4028310064"/>
+        <p14:creationId xmlns:p14="http://schemas.microsoft.com/office/powerpoint/2010/main" val="3306320127"/>
       </p:ext>
     </p:extLst>
   </p:cSld>
@@ -7021,12 +6780,63 @@
           <a:chExt cx="0" cy="0"/>
         </a:xfrm>
       </p:grpSpPr>
+      <p:sp>
+        <p:nvSpPr>
+          <p:cNvPr id="4" name="TextBox 3">
+            <a:extLst>
+              <a:ext uri="{FF2B5EF4-FFF2-40B4-BE49-F238E27FC236}">
+                <a16:creationId xmlns:a16="http://schemas.microsoft.com/office/drawing/2014/main" id="{2EC1ECDE-65AF-6C77-2B76-B8CC0955BB69}"/>
+              </a:ext>
+            </a:extLst>
+          </p:cNvPr>
+          <p:cNvSpPr txBox="1"/>
+          <p:nvPr/>
+        </p:nvSpPr>
+        <p:spPr>
+          <a:xfrm>
+            <a:off x="376551" y="2134697"/>
+            <a:ext cx="11815449" cy="646331"/>
+          </a:xfrm>
+          <a:prstGeom prst="rect">
+            <a:avLst/>
+          </a:prstGeom>
+          <a:noFill/>
+        </p:spPr>
+        <p:txBody>
+          <a:bodyPr wrap="square">
+            <a:spAutoFit/>
+          </a:bodyPr>
+          <a:lstStyle/>
+          <a:p>
+            <a:r>
+              <a:rPr lang="ko-KR" altLang="en-US" dirty="0"/>
+              <a:t>ALTER TABLE </a:t>
+            </a:r>
+            <a:r>
+              <a:rPr lang="ko-KR" altLang="en-US" dirty="0" err="1"/>
+              <a:t>lettnemplyrinfo</a:t>
+            </a:r>
+            <a:r>
+              <a:rPr lang="ko-KR" altLang="en-US" dirty="0"/>
+              <a:t> MODIFY COLUMN EMPLYR_ID </a:t>
+            </a:r>
+            <a:r>
+              <a:rPr lang="ko-KR" altLang="en-US" dirty="0" err="1"/>
+              <a:t>varchar</a:t>
+            </a:r>
+            <a:r>
+              <a:rPr lang="ko-KR" altLang="en-US" dirty="0"/>
+              <a:t>(60) CHARACTER SET utf8mb4 COLLATE utf8mb4_unicode_ci NOT NULL;</a:t>
+            </a:r>
+          </a:p>
+        </p:txBody>
+      </p:sp>
       <p:pic>
         <p:nvPicPr>
-          <p:cNvPr id="4" name="그림 3">
-            <a:extLst>
-              <a:ext uri="{FF2B5EF4-FFF2-40B4-BE49-F238E27FC236}">
-                <a16:creationId xmlns:a16="http://schemas.microsoft.com/office/drawing/2014/main" id="{57A36267-5230-47A6-8F19-0F0B34C54EBC}"/>
+          <p:cNvPr id="7" name="그림 6">
+            <a:extLst>
+              <a:ext uri="{FF2B5EF4-FFF2-40B4-BE49-F238E27FC236}">
+                <a16:creationId xmlns:a16="http://schemas.microsoft.com/office/drawing/2014/main" id="{1AC909DF-3729-5808-BBB0-1ADB0E37ABC6}"/>
               </a:ext>
             </a:extLst>
           </p:cNvPr>
@@ -7043,18 +6853,73 @@
         </p:blipFill>
         <p:spPr>
           <a:xfrm>
-            <a:off x="488950" y="397933"/>
-            <a:ext cx="8724900" cy="2590800"/>
+            <a:off x="362459" y="764567"/>
+            <a:ext cx="6569003" cy="994317"/>
           </a:xfrm>
           <a:prstGeom prst="rect">
             <a:avLst/>
           </a:prstGeom>
         </p:spPr>
       </p:pic>
+      <p:sp>
+        <p:nvSpPr>
+          <p:cNvPr id="9" name="TextBox 8">
+            <a:extLst>
+              <a:ext uri="{FF2B5EF4-FFF2-40B4-BE49-F238E27FC236}">
+                <a16:creationId xmlns:a16="http://schemas.microsoft.com/office/drawing/2014/main" id="{C6B09E56-8C54-872F-871F-FC86D6F5E2B2}"/>
+              </a:ext>
+            </a:extLst>
+          </p:cNvPr>
+          <p:cNvSpPr txBox="1"/>
+          <p:nvPr/>
+        </p:nvSpPr>
+        <p:spPr>
+          <a:xfrm>
+            <a:off x="312030" y="224232"/>
+            <a:ext cx="6097112" cy="369332"/>
+          </a:xfrm>
+          <a:prstGeom prst="rect">
+            <a:avLst/>
+          </a:prstGeom>
+          <a:noFill/>
+        </p:spPr>
+        <p:txBody>
+          <a:bodyPr wrap="square">
+            <a:spAutoFit/>
+          </a:bodyPr>
+          <a:lstStyle/>
+          <a:p>
+            <a:r>
+              <a:rPr lang="ko-KR" altLang="en-US" dirty="0" err="1"/>
+              <a:t>lettnemplyrinfo</a:t>
+            </a:r>
+            <a:r>
+              <a:rPr lang="ko-KR" altLang="en-US" dirty="0"/>
+              <a:t> 테이블에서 </a:t>
+            </a:r>
+            <a:r>
+              <a:rPr lang="en-US" altLang="ko-KR" dirty="0"/>
+              <a:t>ID</a:t>
+            </a:r>
+            <a:r>
+              <a:rPr lang="ko-KR" altLang="en-US" dirty="0"/>
+              <a:t>값 길이 </a:t>
+            </a:r>
+            <a:r>
+              <a:rPr lang="en-US" altLang="ko-KR" dirty="0"/>
+              <a:t>60</a:t>
+            </a:r>
+            <a:r>
+              <a:rPr lang="ko-KR" altLang="en-US" dirty="0"/>
+              <a:t>으로 변경</a:t>
+            </a:r>
+          </a:p>
+        </p:txBody>
+      </p:sp>
     </p:spTree>
     <p:extLst>
       <p:ext uri="{BB962C8B-B14F-4D97-AF65-F5344CB8AC3E}">
-        <p14:creationId xmlns:p14="http://schemas.microsoft.com/office/powerpoint/2010/main" val="1644915441"/>
+        <p14:creationId xmlns:p14="http://schemas.microsoft.com/office/powerpoint/2010/main" val="4155228904"/>
       </p:ext>
     </p:extLst>
   </p:cSld>
@@ -7083,10 +6948,10 @@
       </p:grpSpPr>
       <p:pic>
         <p:nvPicPr>
-          <p:cNvPr id="2" name="그림 1">
-            <a:extLst>
-              <a:ext uri="{FF2B5EF4-FFF2-40B4-BE49-F238E27FC236}">
-                <a16:creationId xmlns:a16="http://schemas.microsoft.com/office/drawing/2014/main" id="{141C4FD1-2515-FB70-0A3C-B330EE1CCEB3}"/>
+          <p:cNvPr id="4" name="그림 3">
+            <a:extLst>
+              <a:ext uri="{FF2B5EF4-FFF2-40B4-BE49-F238E27FC236}">
+                <a16:creationId xmlns:a16="http://schemas.microsoft.com/office/drawing/2014/main" id="{CD3BE488-4A92-4B45-AA27-54FCB6C26413}"/>
               </a:ext>
             </a:extLst>
           </p:cNvPr>
@@ -7103,48 +6968,61 @@
         </p:blipFill>
         <p:spPr>
           <a:xfrm>
-            <a:off x="1023690" y="1609725"/>
-            <a:ext cx="5372100" cy="5248275"/>
+            <a:off x="2059798" y="707297"/>
+            <a:ext cx="8327012" cy="5663157"/>
           </a:xfrm>
           <a:prstGeom prst="rect">
             <a:avLst/>
           </a:prstGeom>
         </p:spPr>
       </p:pic>
-      <p:pic>
-        <p:nvPicPr>
-          <p:cNvPr id="3" name="그림 2">
-            <a:extLst>
-              <a:ext uri="{FF2B5EF4-FFF2-40B4-BE49-F238E27FC236}">
-                <a16:creationId xmlns:a16="http://schemas.microsoft.com/office/drawing/2014/main" id="{6AD8565C-35B6-1DB7-E623-A9EBEF1BE64E}"/>
-              </a:ext>
-            </a:extLst>
-          </p:cNvPr>
-          <p:cNvPicPr>
-            <a:picLocks noChangeAspect="1"/>
-          </p:cNvPicPr>
-          <p:nvPr/>
-        </p:nvPicPr>
-        <p:blipFill>
-          <a:blip r:embed="rId3"/>
-          <a:stretch>
-            <a:fillRect/>
-          </a:stretch>
-        </p:blipFill>
-        <p:spPr>
-          <a:xfrm>
-            <a:off x="316720" y="561054"/>
-            <a:ext cx="6786041" cy="1120908"/>
-          </a:xfrm>
-          <a:prstGeom prst="rect">
-            <a:avLst/>
-          </a:prstGeom>
-        </p:spPr>
-      </p:pic>
+      <p:sp>
+        <p:nvSpPr>
+          <p:cNvPr id="3" name="TextBox 2">
+            <a:extLst>
+              <a:ext uri="{FF2B5EF4-FFF2-40B4-BE49-F238E27FC236}">
+                <a16:creationId xmlns:a16="http://schemas.microsoft.com/office/drawing/2014/main" id="{D402D6BF-9BA5-D11F-C9E9-252566112EEE}"/>
+              </a:ext>
+            </a:extLst>
+          </p:cNvPr>
+          <p:cNvSpPr txBox="1"/>
+          <p:nvPr/>
+        </p:nvSpPr>
+        <p:spPr>
+          <a:xfrm>
+            <a:off x="2059798" y="302880"/>
+            <a:ext cx="6097112" cy="369332"/>
+          </a:xfrm>
+          <a:prstGeom prst="rect">
+            <a:avLst/>
+          </a:prstGeom>
+          <a:noFill/>
+        </p:spPr>
+        <p:txBody>
+          <a:bodyPr wrap="square">
+            <a:spAutoFit/>
+          </a:bodyPr>
+          <a:lstStyle/>
+          <a:p>
+            <a:r>
+              <a:rPr lang="ko-KR" altLang="en-US" dirty="0"/>
+              <a:t>네이버개발자센터 </a:t>
+            </a:r>
+            <a:r>
+              <a:rPr lang="en-US" altLang="ko-KR" dirty="0"/>
+              <a:t>: </a:t>
+            </a:r>
+            <a:r>
+              <a:rPr lang="ko-KR" altLang="en-US" dirty="0"/>
+              <a:t>https://developers.naver.com/main/</a:t>
+            </a:r>
+          </a:p>
+        </p:txBody>
+      </p:sp>
     </p:spTree>
     <p:extLst>
       <p:ext uri="{BB962C8B-B14F-4D97-AF65-F5344CB8AC3E}">
-        <p14:creationId xmlns:p14="http://schemas.microsoft.com/office/powerpoint/2010/main" val="1363503704"/>
+        <p14:creationId xmlns:p14="http://schemas.microsoft.com/office/powerpoint/2010/main" val="3780020630"/>
       </p:ext>
     </p:extLst>
   </p:cSld>
@@ -7171,6 +7049,470 @@
           <a:chExt cx="0" cy="0"/>
         </a:xfrm>
       </p:grpSpPr>
+      <p:pic>
+        <p:nvPicPr>
+          <p:cNvPr id="4" name="그림 3">
+            <a:extLst>
+              <a:ext uri="{FF2B5EF4-FFF2-40B4-BE49-F238E27FC236}">
+                <a16:creationId xmlns:a16="http://schemas.microsoft.com/office/drawing/2014/main" id="{C6836B86-1703-42D4-B4B6-B5546386489B}"/>
+              </a:ext>
+            </a:extLst>
+          </p:cNvPr>
+          <p:cNvPicPr>
+            <a:picLocks noChangeAspect="1"/>
+          </p:cNvPicPr>
+          <p:nvPr/>
+        </p:nvPicPr>
+        <p:blipFill>
+          <a:blip r:embed="rId2"/>
+          <a:stretch>
+            <a:fillRect/>
+          </a:stretch>
+        </p:blipFill>
+        <p:spPr>
+          <a:xfrm>
+            <a:off x="227532" y="414866"/>
+            <a:ext cx="5868468" cy="4902200"/>
+          </a:xfrm>
+          <a:prstGeom prst="rect">
+            <a:avLst/>
+          </a:prstGeom>
+        </p:spPr>
+      </p:pic>
+      <p:sp>
+        <p:nvSpPr>
+          <p:cNvPr id="6" name="직사각형 5">
+            <a:extLst>
+              <a:ext uri="{FF2B5EF4-FFF2-40B4-BE49-F238E27FC236}">
+                <a16:creationId xmlns:a16="http://schemas.microsoft.com/office/drawing/2014/main" id="{EB3C32E2-0289-4C2F-A77E-4DA1F830780D}"/>
+              </a:ext>
+            </a:extLst>
+          </p:cNvPr>
+          <p:cNvSpPr/>
+          <p:nvPr/>
+        </p:nvSpPr>
+        <p:spPr>
+          <a:xfrm>
+            <a:off x="6349173" y="4947734"/>
+            <a:ext cx="1779654" cy="369332"/>
+          </a:xfrm>
+          <a:prstGeom prst="rect">
+            <a:avLst/>
+          </a:prstGeom>
+        </p:spPr>
+        <p:txBody>
+          <a:bodyPr wrap="none">
+            <a:spAutoFit/>
+          </a:bodyPr>
+          <a:lstStyle/>
+          <a:p>
+            <a:r>
+              <a:rPr lang="ko-KR" altLang="en-US" dirty="0"/>
+              <a:t>http://localhost</a:t>
+            </a:r>
+          </a:p>
+        </p:txBody>
+      </p:sp>
+      <p:sp>
+        <p:nvSpPr>
+          <p:cNvPr id="7" name="직사각형 6">
+            <a:extLst>
+              <a:ext uri="{FF2B5EF4-FFF2-40B4-BE49-F238E27FC236}">
+                <a16:creationId xmlns:a16="http://schemas.microsoft.com/office/drawing/2014/main" id="{36CF7F50-61C4-45AA-AA18-DB15E1CF3F5C}"/>
+              </a:ext>
+            </a:extLst>
+          </p:cNvPr>
+          <p:cNvSpPr/>
+          <p:nvPr/>
+        </p:nvSpPr>
+        <p:spPr>
+          <a:xfrm>
+            <a:off x="6349173" y="5489071"/>
+            <a:ext cx="3959867" cy="369332"/>
+          </a:xfrm>
+          <a:prstGeom prst="rect">
+            <a:avLst/>
+          </a:prstGeom>
+        </p:spPr>
+        <p:txBody>
+          <a:bodyPr wrap="none">
+            <a:spAutoFit/>
+          </a:bodyPr>
+          <a:lstStyle/>
+          <a:p>
+            <a:r>
+              <a:rPr lang="ko-KR" altLang="en-US" dirty="0"/>
+              <a:t>http://localhost/login/naverLogin.do</a:t>
+            </a:r>
+          </a:p>
+        </p:txBody>
+      </p:sp>
+      <p:pic>
+        <p:nvPicPr>
+          <p:cNvPr id="8" name="그림 7">
+            <a:extLst>
+              <a:ext uri="{FF2B5EF4-FFF2-40B4-BE49-F238E27FC236}">
+                <a16:creationId xmlns:a16="http://schemas.microsoft.com/office/drawing/2014/main" id="{BF6419F9-3B2C-453C-9FF6-D1086E036A6C}"/>
+              </a:ext>
+            </a:extLst>
+          </p:cNvPr>
+          <p:cNvPicPr>
+            <a:picLocks noChangeAspect="1"/>
+          </p:cNvPicPr>
+          <p:nvPr/>
+        </p:nvPicPr>
+        <p:blipFill>
+          <a:blip r:embed="rId3"/>
+          <a:stretch>
+            <a:fillRect/>
+          </a:stretch>
+        </p:blipFill>
+        <p:spPr>
+          <a:xfrm>
+            <a:off x="6576483" y="0"/>
+            <a:ext cx="5022850" cy="4955429"/>
+          </a:xfrm>
+          <a:prstGeom prst="rect">
+            <a:avLst/>
+          </a:prstGeom>
+        </p:spPr>
+      </p:pic>
+      <p:sp>
+        <p:nvSpPr>
+          <p:cNvPr id="9" name="직사각형 8">
+            <a:extLst>
+              <a:ext uri="{FF2B5EF4-FFF2-40B4-BE49-F238E27FC236}">
+                <a16:creationId xmlns:a16="http://schemas.microsoft.com/office/drawing/2014/main" id="{771369E4-FD35-436F-8283-32BD6433A58C}"/>
+              </a:ext>
+            </a:extLst>
+          </p:cNvPr>
+          <p:cNvSpPr/>
+          <p:nvPr/>
+        </p:nvSpPr>
+        <p:spPr>
+          <a:xfrm>
+            <a:off x="6576483" y="516467"/>
+            <a:ext cx="1136650" cy="369332"/>
+          </a:xfrm>
+          <a:prstGeom prst="rect">
+            <a:avLst/>
+          </a:prstGeom>
+          <a:noFill/>
+          <a:ln>
+            <a:solidFill>
+              <a:srgbClr val="FF0000"/>
+            </a:solidFill>
+          </a:ln>
+        </p:spPr>
+        <p:style>
+          <a:lnRef idx="2">
+            <a:schemeClr val="accent1">
+              <a:shade val="50000"/>
+            </a:schemeClr>
+          </a:lnRef>
+          <a:fillRef idx="1">
+            <a:schemeClr val="accent1"/>
+          </a:fillRef>
+          <a:effectRef idx="0">
+            <a:schemeClr val="accent1"/>
+          </a:effectRef>
+          <a:fontRef idx="minor">
+            <a:schemeClr val="lt1"/>
+          </a:fontRef>
+        </p:style>
+        <p:txBody>
+          <a:bodyPr rtlCol="0" anchor="ctr"/>
+          <a:lstStyle/>
+          <a:p>
+            <a:pPr algn="ctr"/>
+            <a:endParaRPr lang="ko-KR" altLang="en-US"/>
+          </a:p>
+        </p:txBody>
+      </p:sp>
+      <p:sp>
+        <p:nvSpPr>
+          <p:cNvPr id="12" name="직사각형 11">
+            <a:extLst>
+              <a:ext uri="{FF2B5EF4-FFF2-40B4-BE49-F238E27FC236}">
+                <a16:creationId xmlns:a16="http://schemas.microsoft.com/office/drawing/2014/main" id="{E34E3D17-A522-4C5F-BEA5-F60BEA1F6D18}"/>
+              </a:ext>
+            </a:extLst>
+          </p:cNvPr>
+          <p:cNvSpPr/>
+          <p:nvPr/>
+        </p:nvSpPr>
+        <p:spPr>
+          <a:xfrm>
+            <a:off x="6670675" y="1294043"/>
+            <a:ext cx="4513792" cy="369332"/>
+          </a:xfrm>
+          <a:prstGeom prst="rect">
+            <a:avLst/>
+          </a:prstGeom>
+          <a:noFill/>
+          <a:ln>
+            <a:solidFill>
+              <a:srgbClr val="FF0000"/>
+            </a:solidFill>
+          </a:ln>
+        </p:spPr>
+        <p:style>
+          <a:lnRef idx="2">
+            <a:schemeClr val="accent1">
+              <a:shade val="50000"/>
+            </a:schemeClr>
+          </a:lnRef>
+          <a:fillRef idx="1">
+            <a:schemeClr val="accent1"/>
+          </a:fillRef>
+          <a:effectRef idx="0">
+            <a:schemeClr val="accent1"/>
+          </a:effectRef>
+          <a:fontRef idx="minor">
+            <a:schemeClr val="lt1"/>
+          </a:fontRef>
+        </p:style>
+        <p:txBody>
+          <a:bodyPr rtlCol="0" anchor="ctr"/>
+          <a:lstStyle/>
+          <a:p>
+            <a:pPr algn="ctr"/>
+            <a:endParaRPr lang="ko-KR" altLang="en-US"/>
+          </a:p>
+        </p:txBody>
+      </p:sp>
+      <p:sp>
+        <p:nvSpPr>
+          <p:cNvPr id="13" name="직사각형 12">
+            <a:extLst>
+              <a:ext uri="{FF2B5EF4-FFF2-40B4-BE49-F238E27FC236}">
+                <a16:creationId xmlns:a16="http://schemas.microsoft.com/office/drawing/2014/main" id="{6BDC179B-92BB-4CB3-AF5E-5C0CB2213A40}"/>
+              </a:ext>
+            </a:extLst>
+          </p:cNvPr>
+          <p:cNvSpPr/>
+          <p:nvPr/>
+        </p:nvSpPr>
+        <p:spPr>
+          <a:xfrm>
+            <a:off x="6670675" y="3605443"/>
+            <a:ext cx="4513792" cy="369332"/>
+          </a:xfrm>
+          <a:prstGeom prst="rect">
+            <a:avLst/>
+          </a:prstGeom>
+          <a:noFill/>
+          <a:ln>
+            <a:solidFill>
+              <a:srgbClr val="FF0000"/>
+            </a:solidFill>
+          </a:ln>
+        </p:spPr>
+        <p:style>
+          <a:lnRef idx="2">
+            <a:schemeClr val="accent1">
+              <a:shade val="50000"/>
+            </a:schemeClr>
+          </a:lnRef>
+          <a:fillRef idx="1">
+            <a:schemeClr val="accent1"/>
+          </a:fillRef>
+          <a:effectRef idx="0">
+            <a:schemeClr val="accent1"/>
+          </a:effectRef>
+          <a:fontRef idx="minor">
+            <a:schemeClr val="lt1"/>
+          </a:fontRef>
+        </p:style>
+        <p:txBody>
+          <a:bodyPr rtlCol="0" anchor="ctr"/>
+          <a:lstStyle/>
+          <a:p>
+            <a:pPr algn="ctr"/>
+            <a:endParaRPr lang="ko-KR" altLang="en-US"/>
+          </a:p>
+        </p:txBody>
+      </p:sp>
+    </p:spTree>
+    <p:extLst>
+      <p:ext uri="{BB962C8B-B14F-4D97-AF65-F5344CB8AC3E}">
+        <p14:creationId xmlns:p14="http://schemas.microsoft.com/office/powerpoint/2010/main" val="4028310064"/>
+      </p:ext>
+    </p:extLst>
+  </p:cSld>
+  <p:clrMapOvr>
+    <a:masterClrMapping/>
+  </p:clrMapOvr>
+</p:sld>
+</file>
+
+<file path=ppt/slides/slide24.xml><?xml version="1.0" encoding="utf-8"?>
+<p:sld xmlns:a="http://schemas.openxmlformats.org/drawingml/2006/main" xmlns:r="http://schemas.openxmlformats.org/officeDocument/2006/relationships" xmlns:p="http://schemas.openxmlformats.org/presentationml/2006/main">
+  <p:cSld>
+    <p:spTree>
+      <p:nvGrpSpPr>
+        <p:cNvPr id="1" name=""/>
+        <p:cNvGrpSpPr/>
+        <p:nvPr/>
+      </p:nvGrpSpPr>
+      <p:grpSpPr>
+        <a:xfrm>
+          <a:off x="0" y="0"/>
+          <a:ext cx="0" cy="0"/>
+          <a:chOff x="0" y="0"/>
+          <a:chExt cx="0" cy="0"/>
+        </a:xfrm>
+      </p:grpSpPr>
+      <p:pic>
+        <p:nvPicPr>
+          <p:cNvPr id="4" name="그림 3">
+            <a:extLst>
+              <a:ext uri="{FF2B5EF4-FFF2-40B4-BE49-F238E27FC236}">
+                <a16:creationId xmlns:a16="http://schemas.microsoft.com/office/drawing/2014/main" id="{57A36267-5230-47A6-8F19-0F0B34C54EBC}"/>
+              </a:ext>
+            </a:extLst>
+          </p:cNvPr>
+          <p:cNvPicPr>
+            <a:picLocks noChangeAspect="1"/>
+          </p:cNvPicPr>
+          <p:nvPr/>
+        </p:nvPicPr>
+        <p:blipFill>
+          <a:blip r:embed="rId2"/>
+          <a:stretch>
+            <a:fillRect/>
+          </a:stretch>
+        </p:blipFill>
+        <p:spPr>
+          <a:xfrm>
+            <a:off x="488950" y="397933"/>
+            <a:ext cx="8724900" cy="2590800"/>
+          </a:xfrm>
+          <a:prstGeom prst="rect">
+            <a:avLst/>
+          </a:prstGeom>
+        </p:spPr>
+      </p:pic>
+    </p:spTree>
+    <p:extLst>
+      <p:ext uri="{BB962C8B-B14F-4D97-AF65-F5344CB8AC3E}">
+        <p14:creationId xmlns:p14="http://schemas.microsoft.com/office/powerpoint/2010/main" val="1644915441"/>
+      </p:ext>
+    </p:extLst>
+  </p:cSld>
+  <p:clrMapOvr>
+    <a:masterClrMapping/>
+  </p:clrMapOvr>
+</p:sld>
+</file>
+
+<file path=ppt/slides/slide25.xml><?xml version="1.0" encoding="utf-8"?>
+<p:sld xmlns:a="http://schemas.openxmlformats.org/drawingml/2006/main" xmlns:r="http://schemas.openxmlformats.org/officeDocument/2006/relationships" xmlns:p="http://schemas.openxmlformats.org/presentationml/2006/main">
+  <p:cSld>
+    <p:spTree>
+      <p:nvGrpSpPr>
+        <p:cNvPr id="1" name=""/>
+        <p:cNvGrpSpPr/>
+        <p:nvPr/>
+      </p:nvGrpSpPr>
+      <p:grpSpPr>
+        <a:xfrm>
+          <a:off x="0" y="0"/>
+          <a:ext cx="0" cy="0"/>
+          <a:chOff x="0" y="0"/>
+          <a:chExt cx="0" cy="0"/>
+        </a:xfrm>
+      </p:grpSpPr>
+      <p:pic>
+        <p:nvPicPr>
+          <p:cNvPr id="2" name="그림 1">
+            <a:extLst>
+              <a:ext uri="{FF2B5EF4-FFF2-40B4-BE49-F238E27FC236}">
+                <a16:creationId xmlns:a16="http://schemas.microsoft.com/office/drawing/2014/main" id="{141C4FD1-2515-FB70-0A3C-B330EE1CCEB3}"/>
+              </a:ext>
+            </a:extLst>
+          </p:cNvPr>
+          <p:cNvPicPr>
+            <a:picLocks noChangeAspect="1"/>
+          </p:cNvPicPr>
+          <p:nvPr/>
+        </p:nvPicPr>
+        <p:blipFill>
+          <a:blip r:embed="rId2"/>
+          <a:stretch>
+            <a:fillRect/>
+          </a:stretch>
+        </p:blipFill>
+        <p:spPr>
+          <a:xfrm>
+            <a:off x="1023690" y="1609725"/>
+            <a:ext cx="5372100" cy="5248275"/>
+          </a:xfrm>
+          <a:prstGeom prst="rect">
+            <a:avLst/>
+          </a:prstGeom>
+        </p:spPr>
+      </p:pic>
+      <p:pic>
+        <p:nvPicPr>
+          <p:cNvPr id="3" name="그림 2">
+            <a:extLst>
+              <a:ext uri="{FF2B5EF4-FFF2-40B4-BE49-F238E27FC236}">
+                <a16:creationId xmlns:a16="http://schemas.microsoft.com/office/drawing/2014/main" id="{6AD8565C-35B6-1DB7-E623-A9EBEF1BE64E}"/>
+              </a:ext>
+            </a:extLst>
+          </p:cNvPr>
+          <p:cNvPicPr>
+            <a:picLocks noChangeAspect="1"/>
+          </p:cNvPicPr>
+          <p:nvPr/>
+        </p:nvPicPr>
+        <p:blipFill>
+          <a:blip r:embed="rId3"/>
+          <a:stretch>
+            <a:fillRect/>
+          </a:stretch>
+        </p:blipFill>
+        <p:spPr>
+          <a:xfrm>
+            <a:off x="316720" y="561054"/>
+            <a:ext cx="6786041" cy="1120908"/>
+          </a:xfrm>
+          <a:prstGeom prst="rect">
+            <a:avLst/>
+          </a:prstGeom>
+        </p:spPr>
+      </p:pic>
+    </p:spTree>
+    <p:extLst>
+      <p:ext uri="{BB962C8B-B14F-4D97-AF65-F5344CB8AC3E}">
+        <p14:creationId xmlns:p14="http://schemas.microsoft.com/office/powerpoint/2010/main" val="1363503704"/>
+      </p:ext>
+    </p:extLst>
+  </p:cSld>
+  <p:clrMapOvr>
+    <a:masterClrMapping/>
+  </p:clrMapOvr>
+</p:sld>
+</file>
+
+<file path=ppt/slides/slide26.xml><?xml version="1.0" encoding="utf-8"?>
+<p:sld xmlns:a="http://schemas.openxmlformats.org/drawingml/2006/main" xmlns:r="http://schemas.openxmlformats.org/officeDocument/2006/relationships" xmlns:p="http://schemas.openxmlformats.org/presentationml/2006/main">
+  <p:cSld>
+    <p:spTree>
+      <p:nvGrpSpPr>
+        <p:cNvPr id="1" name=""/>
+        <p:cNvGrpSpPr/>
+        <p:nvPr/>
+      </p:nvGrpSpPr>
+      <p:grpSpPr>
+        <a:xfrm>
+          <a:off x="0" y="0"/>
+          <a:ext cx="0" cy="0"/>
+          <a:chOff x="0" y="0"/>
+          <a:chExt cx="0" cy="0"/>
+        </a:xfrm>
+      </p:grpSpPr>
       <p:sp>
         <p:nvSpPr>
           <p:cNvPr id="5" name="직사각형 4">
@@ -7703,7 +8045,7 @@
 </p:sld>
 </file>
 
-<file path=ppt/slides/slide24.xml><?xml version="1.0" encoding="utf-8"?>
+<file path=ppt/slides/slide27.xml><?xml version="1.0" encoding="utf-8"?>
 <p:sld xmlns:a="http://schemas.openxmlformats.org/drawingml/2006/main" xmlns:r="http://schemas.openxmlformats.org/officeDocument/2006/relationships" xmlns:p="http://schemas.openxmlformats.org/presentationml/2006/main">
   <p:cSld>
     <p:spTree>
@@ -7928,7 +8270,7 @@
 </p:sld>
 </file>
 
-<file path=ppt/slides/slide25.xml><?xml version="1.0" encoding="utf-8"?>
+<file path=ppt/slides/slide28.xml><?xml version="1.0" encoding="utf-8"?>
 <p:sld xmlns:a="http://schemas.openxmlformats.org/drawingml/2006/main" xmlns:r="http://schemas.openxmlformats.org/officeDocument/2006/relationships" xmlns:p="http://schemas.openxmlformats.org/presentationml/2006/main">
   <p:cSld>
     <p:spTree>
@@ -8164,7 +8506,7 @@
 </p:sld>
 </file>
 
-<file path=ppt/slides/slide26.xml><?xml version="1.0" encoding="utf-8"?>
+<file path=ppt/slides/slide29.xml><?xml version="1.0" encoding="utf-8"?>
 <p:sld xmlns:a="http://schemas.openxmlformats.org/drawingml/2006/main" xmlns:r="http://schemas.openxmlformats.org/officeDocument/2006/relationships" xmlns:p="http://schemas.openxmlformats.org/presentationml/2006/main">
   <p:cSld>
     <p:spTree>
@@ -8340,7 +8682,123 @@
 </p:sld>
 </file>
 
-<file path=ppt/slides/slide27.xml><?xml version="1.0" encoding="utf-8"?>
+<file path=ppt/slides/slide3.xml><?xml version="1.0" encoding="utf-8"?>
+<p:sld xmlns:a="http://schemas.openxmlformats.org/drawingml/2006/main" xmlns:r="http://schemas.openxmlformats.org/officeDocument/2006/relationships" xmlns:p="http://schemas.openxmlformats.org/presentationml/2006/main">
+  <p:cSld>
+    <p:spTree>
+      <p:nvGrpSpPr>
+        <p:cNvPr id="1" name="">
+          <a:extLst>
+            <a:ext uri="{FF2B5EF4-FFF2-40B4-BE49-F238E27FC236}">
+              <a16:creationId xmlns:a16="http://schemas.microsoft.com/office/drawing/2014/main" id="{E7E9C8DB-514E-D294-8E1B-8E865FB69D2A}"/>
+            </a:ext>
+          </a:extLst>
+        </p:cNvPr>
+        <p:cNvGrpSpPr/>
+        <p:nvPr/>
+      </p:nvGrpSpPr>
+      <p:grpSpPr>
+        <a:xfrm>
+          <a:off x="0" y="0"/>
+          <a:ext cx="0" cy="0"/>
+          <a:chOff x="0" y="0"/>
+          <a:chExt cx="0" cy="0"/>
+        </a:xfrm>
+      </p:grpSpPr>
+      <p:sp>
+        <p:nvSpPr>
+          <p:cNvPr id="7" name="TextBox 6">
+            <a:extLst>
+              <a:ext uri="{FF2B5EF4-FFF2-40B4-BE49-F238E27FC236}">
+                <a16:creationId xmlns:a16="http://schemas.microsoft.com/office/drawing/2014/main" id="{1BE03DFA-A7C3-0F05-EF24-5754C8DB4E4C}"/>
+              </a:ext>
+            </a:extLst>
+          </p:cNvPr>
+          <p:cNvSpPr txBox="1"/>
+          <p:nvPr/>
+        </p:nvSpPr>
+        <p:spPr>
+          <a:xfrm>
+            <a:off x="227115" y="192376"/>
+            <a:ext cx="7105897" cy="646331"/>
+          </a:xfrm>
+          <a:prstGeom prst="rect">
+            <a:avLst/>
+          </a:prstGeom>
+          <a:noFill/>
+        </p:spPr>
+        <p:txBody>
+          <a:bodyPr wrap="square">
+            <a:spAutoFit/>
+          </a:bodyPr>
+          <a:lstStyle/>
+          <a:p>
+            <a:r>
+              <a:rPr lang="en-US" altLang="ko-KR" dirty="0" err="1"/>
+              <a:t>LoginController</a:t>
+            </a:r>
+            <a:endParaRPr lang="en-US" altLang="ko-KR" dirty="0"/>
+          </a:p>
+          <a:p>
+            <a:r>
+              <a:rPr lang="ko-KR" altLang="en-US" dirty="0"/>
+              <a:t>테스트용으로 세션이 </a:t>
+            </a:r>
+            <a:r>
+              <a:rPr lang="ko-KR" altLang="en-US" dirty="0" err="1"/>
+              <a:t>전체사라지는지</a:t>
+            </a:r>
+            <a:r>
+              <a:rPr lang="ko-KR" altLang="en-US" dirty="0"/>
+              <a:t> 일부만 사라지는지 체크</a:t>
+            </a:r>
+          </a:p>
+        </p:txBody>
+      </p:sp>
+      <p:pic>
+        <p:nvPicPr>
+          <p:cNvPr id="9" name="그림 8">
+            <a:extLst>
+              <a:ext uri="{FF2B5EF4-FFF2-40B4-BE49-F238E27FC236}">
+                <a16:creationId xmlns:a16="http://schemas.microsoft.com/office/drawing/2014/main" id="{87B34717-62B8-86EC-A6B6-DE5F5D9496C3}"/>
+              </a:ext>
+            </a:extLst>
+          </p:cNvPr>
+          <p:cNvPicPr>
+            <a:picLocks noChangeAspect="1"/>
+          </p:cNvPicPr>
+          <p:nvPr/>
+        </p:nvPicPr>
+        <p:blipFill>
+          <a:blip r:embed="rId2"/>
+          <a:stretch>
+            <a:fillRect/>
+          </a:stretch>
+        </p:blipFill>
+        <p:spPr>
+          <a:xfrm>
+            <a:off x="227116" y="1195661"/>
+            <a:ext cx="9282251" cy="5662339"/>
+          </a:xfrm>
+          <a:prstGeom prst="rect">
+            <a:avLst/>
+          </a:prstGeom>
+        </p:spPr>
+      </p:pic>
+    </p:spTree>
+    <p:extLst>
+      <p:ext uri="{BB962C8B-B14F-4D97-AF65-F5344CB8AC3E}">
+        <p14:creationId xmlns:p14="http://schemas.microsoft.com/office/powerpoint/2010/main" val="3828999160"/>
+      </p:ext>
+    </p:extLst>
+  </p:cSld>
+  <p:clrMapOvr>
+    <a:masterClrMapping/>
+  </p:clrMapOvr>
+</p:sld>
+</file>
+
+<file path=ppt/slides/slide30.xml><?xml version="1.0" encoding="utf-8"?>
 <p:sld xmlns:a="http://schemas.openxmlformats.org/drawingml/2006/main" xmlns:r="http://schemas.openxmlformats.org/officeDocument/2006/relationships" xmlns:p="http://schemas.openxmlformats.org/presentationml/2006/main">
   <p:cSld>
     <p:spTree>
@@ -8504,7 +8962,7 @@
 </p:sld>
 </file>
 
-<file path=ppt/slides/slide3.xml><?xml version="1.0" encoding="utf-8"?>
+<file path=ppt/slides/slide4.xml><?xml version="1.0" encoding="utf-8"?>
 <p:sld xmlns:a="http://schemas.openxmlformats.org/drawingml/2006/main" xmlns:r="http://schemas.openxmlformats.org/officeDocument/2006/relationships" xmlns:p="http://schemas.openxmlformats.org/presentationml/2006/main">
   <p:cSld>
     <p:spTree>
@@ -8512,7 +8970,7 @@
         <p:cNvPr id="1" name="">
           <a:extLst>
             <a:ext uri="{FF2B5EF4-FFF2-40B4-BE49-F238E27FC236}">
-              <a16:creationId xmlns:a16="http://schemas.microsoft.com/office/drawing/2014/main" id="{8FF94728-1BB7-0C8E-BC27-6A9F7F0B2BD1}"/>
+              <a16:creationId xmlns:a16="http://schemas.microsoft.com/office/drawing/2014/main" id="{3FEAAF99-B556-2480-2B52-2A6C0EB5685F}"/>
             </a:ext>
           </a:extLst>
         </p:cNvPr>
@@ -8529,10 +8987,10 @@
       </p:grpSpPr>
       <p:pic>
         <p:nvPicPr>
-          <p:cNvPr id="4" name="그림 3">
-            <a:extLst>
-              <a:ext uri="{FF2B5EF4-FFF2-40B4-BE49-F238E27FC236}">
-                <a16:creationId xmlns:a16="http://schemas.microsoft.com/office/drawing/2014/main" id="{F96B6C8E-1CC9-BCA7-F0D9-028A25F6A1B6}"/>
+          <p:cNvPr id="5" name="그림 4">
+            <a:extLst>
+              <a:ext uri="{FF2B5EF4-FFF2-40B4-BE49-F238E27FC236}">
+                <a16:creationId xmlns:a16="http://schemas.microsoft.com/office/drawing/2014/main" id="{08AE0BE1-CEF4-D0AD-A183-9659EEE6D3C8}"/>
               </a:ext>
             </a:extLst>
           </p:cNvPr>
@@ -8549,8 +9007,8 @@
         </p:blipFill>
         <p:spPr>
           <a:xfrm>
-            <a:off x="245669" y="1221425"/>
-            <a:ext cx="5217113" cy="5290824"/>
+            <a:off x="302821" y="1400591"/>
+            <a:ext cx="6835522" cy="4512833"/>
           </a:xfrm>
           <a:prstGeom prst="rect">
             <a:avLst/>
@@ -8559,10 +9017,10 @@
       </p:pic>
       <p:sp>
         <p:nvSpPr>
-          <p:cNvPr id="5" name="TextBox 4">
-            <a:extLst>
-              <a:ext uri="{FF2B5EF4-FFF2-40B4-BE49-F238E27FC236}">
-                <a16:creationId xmlns:a16="http://schemas.microsoft.com/office/drawing/2014/main" id="{CB330FE9-2343-8A51-F36C-28ACDCAF3262}"/>
+          <p:cNvPr id="7" name="TextBox 6">
+            <a:extLst>
+              <a:ext uri="{FF2B5EF4-FFF2-40B4-BE49-F238E27FC236}">
+                <a16:creationId xmlns:a16="http://schemas.microsoft.com/office/drawing/2014/main" id="{20174550-9154-0B4C-651C-E1A0E98DCDEA}"/>
               </a:ext>
             </a:extLst>
           </p:cNvPr>
@@ -8571,8 +9029,8 @@
         </p:nvSpPr>
         <p:spPr>
           <a:xfrm>
-            <a:off x="180210" y="287001"/>
-            <a:ext cx="5970352" cy="369332"/>
+            <a:off x="227116" y="192376"/>
+            <a:ext cx="6095010" cy="923330"/>
           </a:xfrm>
           <a:prstGeom prst="rect">
             <a:avLst/>
@@ -8580,267 +9038,32 @@
           <a:noFill/>
         </p:spPr>
         <p:txBody>
-          <a:bodyPr wrap="none" rtlCol="0">
+          <a:bodyPr wrap="square">
             <a:spAutoFit/>
           </a:bodyPr>
           <a:lstStyle/>
           <a:p>
             <a:r>
-              <a:rPr lang="en-US" altLang="ko-KR" dirty="0" err="1"/>
-              <a:t>admin.member.web</a:t>
-            </a:r>
-            <a:r>
-              <a:rPr lang="en-US" altLang="ko-KR" dirty="0"/>
-              <a:t> </a:t>
-            </a:r>
+              <a:rPr lang="ko-KR" altLang="en-US" dirty="0" err="1"/>
+              <a:t>BoardController</a:t>
+            </a:r>
+            <a:endParaRPr lang="en-US" altLang="ko-KR" dirty="0"/>
+          </a:p>
+          <a:p>
+            <a:endParaRPr lang="en-US" altLang="ko-KR" dirty="0"/>
+          </a:p>
+          <a:p>
             <a:r>
               <a:rPr lang="ko-KR" altLang="en-US" dirty="0"/>
-              <a:t>패키지 추가 후 </a:t>
-            </a:r>
-            <a:r>
-              <a:rPr lang="en-US" altLang="ko-KR" dirty="0"/>
-              <a:t>Controller</a:t>
-            </a:r>
-            <a:r>
-              <a:rPr lang="ko-KR" altLang="en-US" dirty="0"/>
-              <a:t>부터 작업</a:t>
-            </a:r>
-            <a:endParaRPr lang="en-US" altLang="ko-KR" dirty="0"/>
+              <a:t>세션 테스트용 추가</a:t>
+            </a:r>
           </a:p>
         </p:txBody>
       </p:sp>
     </p:spTree>
     <p:extLst>
       <p:ext uri="{BB962C8B-B14F-4D97-AF65-F5344CB8AC3E}">
-        <p14:creationId xmlns:p14="http://schemas.microsoft.com/office/powerpoint/2010/main" val="3630639112"/>
-      </p:ext>
-    </p:extLst>
-  </p:cSld>
-  <p:clrMapOvr>
-    <a:masterClrMapping/>
-  </p:clrMapOvr>
-</p:sld>
-</file>
-
-<file path=ppt/slides/slide4.xml><?xml version="1.0" encoding="utf-8"?>
-<p:sld xmlns:a="http://schemas.openxmlformats.org/drawingml/2006/main" xmlns:r="http://schemas.openxmlformats.org/officeDocument/2006/relationships" xmlns:p="http://schemas.openxmlformats.org/presentationml/2006/main">
-  <p:cSld>
-    <p:spTree>
-      <p:nvGrpSpPr>
-        <p:cNvPr id="1" name=""/>
-        <p:cNvGrpSpPr/>
-        <p:nvPr/>
-      </p:nvGrpSpPr>
-      <p:grpSpPr>
-        <a:xfrm>
-          <a:off x="0" y="0"/>
-          <a:ext cx="0" cy="0"/>
-          <a:chOff x="0" y="0"/>
-          <a:chExt cx="0" cy="0"/>
-        </a:xfrm>
-      </p:grpSpPr>
-      <p:sp>
-        <p:nvSpPr>
-          <p:cNvPr id="6" name="TextBox 5">
-            <a:extLst>
-              <a:ext uri="{FF2B5EF4-FFF2-40B4-BE49-F238E27FC236}">
-                <a16:creationId xmlns:a16="http://schemas.microsoft.com/office/drawing/2014/main" id="{50BEA759-3DCF-1AD0-A62A-AFFDD37C187D}"/>
-              </a:ext>
-            </a:extLst>
-          </p:cNvPr>
-          <p:cNvSpPr txBox="1"/>
-          <p:nvPr/>
-        </p:nvSpPr>
-        <p:spPr>
-          <a:xfrm>
-            <a:off x="-1483397" y="751366"/>
-            <a:ext cx="9486066" cy="3693319"/>
-          </a:xfrm>
-          <a:prstGeom prst="rect">
-            <a:avLst/>
-          </a:prstGeom>
-          <a:noFill/>
-        </p:spPr>
-        <p:txBody>
-          <a:bodyPr wrap="square">
-            <a:spAutoFit/>
-          </a:bodyPr>
-          <a:lstStyle/>
-          <a:p>
-            <a:r>
-              <a:rPr lang="en-US" altLang="ko-KR" dirty="0"/>
-              <a:t>		&lt;!-- </a:t>
-            </a:r>
-            <a:r>
-              <a:rPr lang="ko-KR" altLang="en-US" dirty="0"/>
-              <a:t>메일 </a:t>
-            </a:r>
-            <a:r>
-              <a:rPr lang="en-US" altLang="ko-KR" dirty="0"/>
-              <a:t>--&gt;</a:t>
-            </a:r>
-          </a:p>
-          <a:p>
-            <a:r>
-              <a:rPr lang="en-US" altLang="ko-KR" dirty="0"/>
-              <a:t>		&lt;dependency&gt;</a:t>
-            </a:r>
-          </a:p>
-          <a:p>
-            <a:r>
-              <a:rPr lang="en-US" altLang="ko-KR" dirty="0"/>
-              <a:t>		    &lt;</a:t>
-            </a:r>
-            <a:r>
-              <a:rPr lang="en-US" altLang="ko-KR" dirty="0" err="1"/>
-              <a:t>groupId</a:t>
-            </a:r>
-            <a:r>
-              <a:rPr lang="en-US" altLang="ko-KR" dirty="0"/>
-              <a:t>&gt;</a:t>
-            </a:r>
-            <a:r>
-              <a:rPr lang="en-US" altLang="ko-KR" dirty="0" err="1"/>
-              <a:t>javax.mail</a:t>
-            </a:r>
-            <a:r>
-              <a:rPr lang="en-US" altLang="ko-KR" dirty="0"/>
-              <a:t>&lt;/</a:t>
-            </a:r>
-            <a:r>
-              <a:rPr lang="en-US" altLang="ko-KR" dirty="0" err="1"/>
-              <a:t>groupId</a:t>
-            </a:r>
-            <a:r>
-              <a:rPr lang="en-US" altLang="ko-KR" dirty="0"/>
-              <a:t>&gt;</a:t>
-            </a:r>
-          </a:p>
-          <a:p>
-            <a:r>
-              <a:rPr lang="en-US" altLang="ko-KR" dirty="0"/>
-              <a:t>		    &lt;</a:t>
-            </a:r>
-            <a:r>
-              <a:rPr lang="en-US" altLang="ko-KR" dirty="0" err="1"/>
-              <a:t>artifactId</a:t>
-            </a:r>
-            <a:r>
-              <a:rPr lang="en-US" altLang="ko-KR" dirty="0"/>
-              <a:t>&gt;mail&lt;/</a:t>
-            </a:r>
-            <a:r>
-              <a:rPr lang="en-US" altLang="ko-KR" dirty="0" err="1"/>
-              <a:t>artifactId</a:t>
-            </a:r>
-            <a:r>
-              <a:rPr lang="en-US" altLang="ko-KR" dirty="0"/>
-              <a:t>&gt;</a:t>
-            </a:r>
-          </a:p>
-          <a:p>
-            <a:r>
-              <a:rPr lang="en-US" altLang="ko-KR" dirty="0"/>
-              <a:t>		    &lt;version&gt;1.4.7&lt;/version&gt;</a:t>
-            </a:r>
-          </a:p>
-          <a:p>
-            <a:r>
-              <a:rPr lang="en-US" altLang="ko-KR" dirty="0"/>
-              <a:t>		&lt;/dependency&gt;</a:t>
-            </a:r>
-          </a:p>
-          <a:p>
-            <a:r>
-              <a:rPr lang="en-US" altLang="ko-KR" dirty="0"/>
-              <a:t>				</a:t>
-            </a:r>
-          </a:p>
-          <a:p>
-            <a:r>
-              <a:rPr lang="en-US" altLang="ko-KR" dirty="0"/>
-              <a:t>		&lt;!-- </a:t>
-            </a:r>
-            <a:r>
-              <a:rPr lang="ko-KR" altLang="en-US" dirty="0"/>
-              <a:t>메일 </a:t>
-            </a:r>
-            <a:r>
-              <a:rPr lang="en-US" altLang="ko-KR" dirty="0"/>
-              <a:t>--&gt;</a:t>
-            </a:r>
-          </a:p>
-          <a:p>
-            <a:r>
-              <a:rPr lang="en-US" altLang="ko-KR" dirty="0"/>
-              <a:t>		&lt;dependency&gt;		    							  &lt;</a:t>
-            </a:r>
-            <a:r>
-              <a:rPr lang="en-US" altLang="ko-KR" dirty="0" err="1"/>
-              <a:t>groupId</a:t>
-            </a:r>
-            <a:r>
-              <a:rPr lang="en-US" altLang="ko-KR" dirty="0"/>
-              <a:t>&gt;</a:t>
-            </a:r>
-            <a:r>
-              <a:rPr lang="en-US" altLang="ko-KR" dirty="0" err="1"/>
-              <a:t>javax.activation</a:t>
-            </a:r>
-            <a:r>
-              <a:rPr lang="en-US" altLang="ko-KR" dirty="0"/>
-              <a:t>&lt;/</a:t>
-            </a:r>
-            <a:r>
-              <a:rPr lang="en-US" altLang="ko-KR" dirty="0" err="1"/>
-              <a:t>groupId</a:t>
-            </a:r>
-            <a:r>
-              <a:rPr lang="en-US" altLang="ko-KR" dirty="0"/>
-              <a:t>&gt;</a:t>
-            </a:r>
-          </a:p>
-          <a:p>
-            <a:r>
-              <a:rPr lang="en-US" altLang="ko-KR" dirty="0"/>
-              <a:t>		    &lt;</a:t>
-            </a:r>
-            <a:r>
-              <a:rPr lang="en-US" altLang="ko-KR" dirty="0" err="1"/>
-              <a:t>artifactId</a:t>
-            </a:r>
-            <a:r>
-              <a:rPr lang="en-US" altLang="ko-KR" dirty="0"/>
-              <a:t>&gt;activation&lt;/</a:t>
-            </a:r>
-            <a:r>
-              <a:rPr lang="en-US" altLang="ko-KR" dirty="0" err="1"/>
-              <a:t>artifactId</a:t>
-            </a:r>
-            <a:r>
-              <a:rPr lang="en-US" altLang="ko-KR" dirty="0"/>
-              <a:t>&gt;</a:t>
-            </a:r>
-          </a:p>
-          <a:p>
-            <a:r>
-              <a:rPr lang="en-US" altLang="ko-KR" dirty="0"/>
-              <a:t>		    &lt;version&gt;1.1.1&lt;/version&gt;</a:t>
-            </a:r>
-          </a:p>
-          <a:p>
-            <a:r>
-              <a:rPr lang="en-US" altLang="ko-KR" dirty="0"/>
-              <a:t>		&lt;/dependency&gt;</a:t>
-            </a:r>
-            <a:endParaRPr lang="ko-KR" altLang="en-US" dirty="0"/>
-          </a:p>
-        </p:txBody>
-      </p:sp>
-    </p:spTree>
-    <p:extLst>
-      <p:ext uri="{BB962C8B-B14F-4D97-AF65-F5344CB8AC3E}">
-        <p14:creationId xmlns:p14="http://schemas.microsoft.com/office/powerpoint/2010/main" val="72075807"/>
+        <p14:creationId xmlns:p14="http://schemas.microsoft.com/office/powerpoint/2010/main" val="3122480312"/>
       </p:ext>
     </p:extLst>
   </p:cSld>
@@ -8869,10 +9092,10 @@
       </p:grpSpPr>
       <p:pic>
         <p:nvPicPr>
-          <p:cNvPr id="7" name="그림 6">
-            <a:extLst>
-              <a:ext uri="{FF2B5EF4-FFF2-40B4-BE49-F238E27FC236}">
-                <a16:creationId xmlns:a16="http://schemas.microsoft.com/office/drawing/2014/main" id="{0D8EB3F1-B931-CDEC-CF68-722CDD9BD315}"/>
+          <p:cNvPr id="3" name="그림 2">
+            <a:extLst>
+              <a:ext uri="{FF2B5EF4-FFF2-40B4-BE49-F238E27FC236}">
+                <a16:creationId xmlns:a16="http://schemas.microsoft.com/office/drawing/2014/main" id="{9E2013FE-DA01-4856-4747-6247819CD0E5}"/>
               </a:ext>
             </a:extLst>
           </p:cNvPr>
@@ -8889,8 +9112,8 @@
         </p:blipFill>
         <p:spPr>
           <a:xfrm>
-            <a:off x="874353" y="810026"/>
-            <a:ext cx="10323153" cy="5678621"/>
+            <a:off x="497999" y="739475"/>
+            <a:ext cx="4519235" cy="929008"/>
           </a:xfrm>
           <a:prstGeom prst="rect">
             <a:avLst/>
@@ -8899,10 +9122,10 @@
       </p:pic>
       <p:sp>
         <p:nvSpPr>
-          <p:cNvPr id="9" name="TextBox 8">
-            <a:extLst>
-              <a:ext uri="{FF2B5EF4-FFF2-40B4-BE49-F238E27FC236}">
-                <a16:creationId xmlns:a16="http://schemas.microsoft.com/office/drawing/2014/main" id="{49947A18-07CC-07C7-AF6D-9D7221923E76}"/>
+          <p:cNvPr id="7" name="TextBox 6">
+            <a:extLst>
+              <a:ext uri="{FF2B5EF4-FFF2-40B4-BE49-F238E27FC236}">
+                <a16:creationId xmlns:a16="http://schemas.microsoft.com/office/drawing/2014/main" id="{12DF87A1-5212-0B1D-539E-527CDBFE1834}"/>
               </a:ext>
             </a:extLst>
           </p:cNvPr>
@@ -8911,8 +9134,8 @@
         </p:nvSpPr>
         <p:spPr>
           <a:xfrm>
-            <a:off x="292007" y="282545"/>
-            <a:ext cx="6097112" cy="369332"/>
+            <a:off x="497999" y="198314"/>
+            <a:ext cx="6095010" cy="369332"/>
           </a:xfrm>
           <a:prstGeom prst="rect">
             <a:avLst/>
@@ -8926,8 +9149,28 @@
           <a:lstStyle/>
           <a:p>
             <a:r>
+              <a:rPr lang="ko-KR" altLang="en-US" dirty="0" err="1"/>
+              <a:t>Header.jsp</a:t>
+            </a:r>
+            <a:r>
               <a:rPr lang="ko-KR" altLang="en-US" dirty="0"/>
-              <a:t>https://myaccount.google.com/</a:t>
+              <a:t> </a:t>
+            </a:r>
+            <a:r>
+              <a:rPr lang="ko-KR" altLang="en-US" dirty="0" err="1"/>
+              <a:t>에</a:t>
+            </a:r>
+            <a:r>
+              <a:rPr lang="ko-KR" altLang="en-US" dirty="0"/>
+              <a:t> </a:t>
+            </a:r>
+            <a:r>
+              <a:rPr lang="en-US" altLang="ko-KR" dirty="0"/>
+              <a:t>admin</a:t>
+            </a:r>
+            <a:r>
+              <a:rPr lang="ko-KR" altLang="en-US" dirty="0"/>
+              <a:t>만 접속 되도록 수정</a:t>
             </a:r>
           </a:p>
         </p:txBody>
@@ -8935,7 +9178,7 @@
     </p:spTree>
     <p:extLst>
       <p:ext uri="{BB962C8B-B14F-4D97-AF65-F5344CB8AC3E}">
-        <p14:creationId xmlns:p14="http://schemas.microsoft.com/office/powerpoint/2010/main" val="637270702"/>
+        <p14:creationId xmlns:p14="http://schemas.microsoft.com/office/powerpoint/2010/main" val="2298583339"/>
       </p:ext>
     </p:extLst>
   </p:cSld>
@@ -8950,7 +9193,13 @@
   <p:cSld>
     <p:spTree>
       <p:nvGrpSpPr>
-        <p:cNvPr id="1" name=""/>
+        <p:cNvPr id="1" name="">
+          <a:extLst>
+            <a:ext uri="{FF2B5EF4-FFF2-40B4-BE49-F238E27FC236}">
+              <a16:creationId xmlns:a16="http://schemas.microsoft.com/office/drawing/2014/main" id="{8FF94728-1BB7-0C8E-BC27-6A9F7F0B2BD1}"/>
+            </a:ext>
+          </a:extLst>
+        </p:cNvPr>
         <p:cNvGrpSpPr/>
         <p:nvPr/>
       </p:nvGrpSpPr>
@@ -8964,10 +9213,10 @@
       </p:grpSpPr>
       <p:pic>
         <p:nvPicPr>
-          <p:cNvPr id="3" name="그림 2">
-            <a:extLst>
-              <a:ext uri="{FF2B5EF4-FFF2-40B4-BE49-F238E27FC236}">
-                <a16:creationId xmlns:a16="http://schemas.microsoft.com/office/drawing/2014/main" id="{D7CDF24F-3B76-8330-F151-1CE98F62E33E}"/>
+          <p:cNvPr id="4" name="그림 3">
+            <a:extLst>
+              <a:ext uri="{FF2B5EF4-FFF2-40B4-BE49-F238E27FC236}">
+                <a16:creationId xmlns:a16="http://schemas.microsoft.com/office/drawing/2014/main" id="{F96B6C8E-1CC9-BCA7-F0D9-028A25F6A1B6}"/>
               </a:ext>
             </a:extLst>
           </p:cNvPr>
@@ -8984,8 +9233,8 @@
         </p:blipFill>
         <p:spPr>
           <a:xfrm>
-            <a:off x="6010589" y="0"/>
-            <a:ext cx="5134708" cy="6858000"/>
+            <a:off x="245669" y="1221425"/>
+            <a:ext cx="5217113" cy="5290824"/>
           </a:xfrm>
           <a:prstGeom prst="rect">
             <a:avLst/>
@@ -8994,10 +9243,10 @@
       </p:pic>
       <p:sp>
         <p:nvSpPr>
-          <p:cNvPr id="2" name="TextBox 1">
-            <a:extLst>
-              <a:ext uri="{FF2B5EF4-FFF2-40B4-BE49-F238E27FC236}">
-                <a16:creationId xmlns:a16="http://schemas.microsoft.com/office/drawing/2014/main" id="{FC8C3871-F913-55CF-A7FE-C4AAA8573196}"/>
+          <p:cNvPr id="5" name="TextBox 4">
+            <a:extLst>
+              <a:ext uri="{FF2B5EF4-FFF2-40B4-BE49-F238E27FC236}">
+                <a16:creationId xmlns:a16="http://schemas.microsoft.com/office/drawing/2014/main" id="{CB330FE9-2343-8A51-F36C-28ACDCAF3262}"/>
               </a:ext>
             </a:extLst>
           </p:cNvPr>
@@ -9006,8 +9255,8 @@
         </p:nvSpPr>
         <p:spPr>
           <a:xfrm>
-            <a:off x="225631" y="368135"/>
-            <a:ext cx="3974165" cy="646331"/>
+            <a:off x="180210" y="287001"/>
+            <a:ext cx="5970352" cy="369332"/>
           </a:xfrm>
           <a:prstGeom prst="rect">
             <a:avLst/>
@@ -9021,53 +9270,33 @@
           <a:lstStyle/>
           <a:p>
             <a:r>
+              <a:rPr lang="en-US" altLang="ko-KR" dirty="0" err="1"/>
+              <a:t>admin.member.web</a:t>
+            </a:r>
+            <a:r>
+              <a:rPr lang="en-US" altLang="ko-KR" dirty="0"/>
+              <a:t> </a:t>
+            </a:r>
+            <a:r>
               <a:rPr lang="ko-KR" altLang="en-US" dirty="0"/>
-              <a:t>앱 비밀번호 안 보이는 사람은</a:t>
+              <a:t>패키지 추가 후 </a:t>
+            </a:r>
+            <a:r>
+              <a:rPr lang="en-US" altLang="ko-KR" dirty="0"/>
+              <a:t>Controller</a:t>
+            </a:r>
+            <a:r>
+              <a:rPr lang="ko-KR" altLang="en-US" dirty="0"/>
+              <a:t>부터 작업</a:t>
             </a:r>
             <a:endParaRPr lang="en-US" altLang="ko-KR" dirty="0"/>
           </a:p>
-          <a:p>
-            <a:r>
-              <a:rPr lang="ko-KR" altLang="en-US" dirty="0"/>
-              <a:t>상단 검색에서 앱 비밀번호라고 검색</a:t>
-            </a:r>
-          </a:p>
-        </p:txBody>
-      </p:sp>
-      <p:pic>
-        <p:nvPicPr>
-          <p:cNvPr id="7" name="그림 6">
-            <a:extLst>
-              <a:ext uri="{FF2B5EF4-FFF2-40B4-BE49-F238E27FC236}">
-                <a16:creationId xmlns:a16="http://schemas.microsoft.com/office/drawing/2014/main" id="{0D585FB8-0383-B606-7966-90278C5F62F7}"/>
-              </a:ext>
-            </a:extLst>
-          </p:cNvPr>
-          <p:cNvPicPr>
-            <a:picLocks noChangeAspect="1"/>
-          </p:cNvPicPr>
-          <p:nvPr/>
-        </p:nvPicPr>
-        <p:blipFill>
-          <a:blip r:embed="rId3"/>
-          <a:stretch>
-            <a:fillRect/>
-          </a:stretch>
-        </p:blipFill>
-        <p:spPr>
-          <a:xfrm>
-            <a:off x="469527" y="1061028"/>
-            <a:ext cx="4270256" cy="2254000"/>
-          </a:xfrm>
-          <a:prstGeom prst="rect">
-            <a:avLst/>
-          </a:prstGeom>
-        </p:spPr>
-      </p:pic>
+        </p:txBody>
+      </p:sp>
     </p:spTree>
     <p:extLst>
       <p:ext uri="{BB962C8B-B14F-4D97-AF65-F5344CB8AC3E}">
-        <p14:creationId xmlns:p14="http://schemas.microsoft.com/office/powerpoint/2010/main" val="3022636693"/>
+        <p14:creationId xmlns:p14="http://schemas.microsoft.com/office/powerpoint/2010/main" val="3630639112"/>
       </p:ext>
     </p:extLst>
   </p:cSld>
@@ -9094,42 +9323,12 @@
           <a:chExt cx="0" cy="0"/>
         </a:xfrm>
       </p:grpSpPr>
-      <p:pic>
-        <p:nvPicPr>
-          <p:cNvPr id="5" name="그림 4">
-            <a:extLst>
-              <a:ext uri="{FF2B5EF4-FFF2-40B4-BE49-F238E27FC236}">
-                <a16:creationId xmlns:a16="http://schemas.microsoft.com/office/drawing/2014/main" id="{8CDB420D-30B6-0AB0-10F7-666C58944DF7}"/>
-              </a:ext>
-            </a:extLst>
-          </p:cNvPr>
-          <p:cNvPicPr>
-            <a:picLocks noChangeAspect="1"/>
-          </p:cNvPicPr>
-          <p:nvPr/>
-        </p:nvPicPr>
-        <p:blipFill>
-          <a:blip r:embed="rId2"/>
-          <a:stretch>
-            <a:fillRect/>
-          </a:stretch>
-        </p:blipFill>
-        <p:spPr>
-          <a:xfrm>
-            <a:off x="1363482" y="1504937"/>
-            <a:ext cx="4538627" cy="2657363"/>
-          </a:xfrm>
-          <a:prstGeom prst="rect">
-            <a:avLst/>
-          </a:prstGeom>
-        </p:spPr>
-      </p:pic>
-      <p:sp>
-        <p:nvSpPr>
-          <p:cNvPr id="7" name="TextBox 6">
-            <a:extLst>
-              <a:ext uri="{FF2B5EF4-FFF2-40B4-BE49-F238E27FC236}">
-                <a16:creationId xmlns:a16="http://schemas.microsoft.com/office/drawing/2014/main" id="{A0C2EE11-5723-C6C2-BF2E-3F90E8B59B51}"/>
+      <p:sp>
+        <p:nvSpPr>
+          <p:cNvPr id="6" name="TextBox 5">
+            <a:extLst>
+              <a:ext uri="{FF2B5EF4-FFF2-40B4-BE49-F238E27FC236}">
+                <a16:creationId xmlns:a16="http://schemas.microsoft.com/office/drawing/2014/main" id="{50BEA759-3DCF-1AD0-A62A-AFFDD37C187D}"/>
               </a:ext>
             </a:extLst>
           </p:cNvPr>
@@ -9138,8 +9337,8 @@
         </p:nvSpPr>
         <p:spPr>
           <a:xfrm>
-            <a:off x="1739735" y="4815444"/>
-            <a:ext cx="2531462" cy="646331"/>
+            <a:off x="-1483397" y="751366"/>
+            <a:ext cx="9486066" cy="3693319"/>
           </a:xfrm>
           <a:prstGeom prst="rect">
             <a:avLst/>
@@ -9147,66 +9346,185 @@
           <a:noFill/>
         </p:spPr>
         <p:txBody>
-          <a:bodyPr wrap="none" rtlCol="0">
+          <a:bodyPr wrap="square">
             <a:spAutoFit/>
           </a:bodyPr>
           <a:lstStyle/>
           <a:p>
             <a:r>
+              <a:rPr lang="en-US" altLang="ko-KR" dirty="0"/>
+              <a:t>		&lt;!-- </a:t>
+            </a:r>
+            <a:r>
               <a:rPr lang="ko-KR" altLang="en-US" dirty="0"/>
-              <a:t>해당 부분은 </a:t>
-            </a:r>
-            <a:r>
-              <a:rPr lang="ko-KR" altLang="en-US" dirty="0" err="1"/>
-              <a:t>사라진듯</a:t>
+              <a:t>메일 </a:t>
             </a:r>
             <a:r>
               <a:rPr lang="en-US" altLang="ko-KR" dirty="0"/>
-              <a:t>?</a:t>
-            </a:r>
-          </a:p>
-          <a:p>
+              <a:t>--&gt;</a:t>
+            </a:r>
+          </a:p>
+          <a:p>
+            <a:r>
+              <a:rPr lang="en-US" altLang="ko-KR" dirty="0"/>
+              <a:t>		&lt;dependency&gt;</a:t>
+            </a:r>
+          </a:p>
+          <a:p>
+            <a:r>
+              <a:rPr lang="en-US" altLang="ko-KR" dirty="0"/>
+              <a:t>		    &lt;</a:t>
+            </a:r>
+            <a:r>
+              <a:rPr lang="en-US" altLang="ko-KR" dirty="0" err="1"/>
+              <a:t>groupId</a:t>
+            </a:r>
+            <a:r>
+              <a:rPr lang="en-US" altLang="ko-KR" dirty="0"/>
+              <a:t>&gt;</a:t>
+            </a:r>
+            <a:r>
+              <a:rPr lang="en-US" altLang="ko-KR" dirty="0" err="1"/>
+              <a:t>javax.mail</a:t>
+            </a:r>
+            <a:r>
+              <a:rPr lang="en-US" altLang="ko-KR" dirty="0"/>
+              <a:t>&lt;/</a:t>
+            </a:r>
+            <a:r>
+              <a:rPr lang="en-US" altLang="ko-KR" dirty="0" err="1"/>
+              <a:t>groupId</a:t>
+            </a:r>
+            <a:r>
+              <a:rPr lang="en-US" altLang="ko-KR" dirty="0"/>
+              <a:t>&gt;</a:t>
+            </a:r>
+          </a:p>
+          <a:p>
+            <a:r>
+              <a:rPr lang="en-US" altLang="ko-KR" dirty="0"/>
+              <a:t>		    &lt;</a:t>
+            </a:r>
+            <a:r>
+              <a:rPr lang="en-US" altLang="ko-KR" dirty="0" err="1"/>
+              <a:t>artifactId</a:t>
+            </a:r>
+            <a:r>
+              <a:rPr lang="en-US" altLang="ko-KR" dirty="0"/>
+              <a:t>&gt;mail&lt;/</a:t>
+            </a:r>
+            <a:r>
+              <a:rPr lang="en-US" altLang="ko-KR" dirty="0" err="1"/>
+              <a:t>artifactId</a:t>
+            </a:r>
+            <a:r>
+              <a:rPr lang="en-US" altLang="ko-KR" dirty="0"/>
+              <a:t>&gt;</a:t>
+            </a:r>
+          </a:p>
+          <a:p>
+            <a:r>
+              <a:rPr lang="en-US" altLang="ko-KR" dirty="0"/>
+              <a:t>		    &lt;version&gt;1.4.7&lt;/version&gt;</a:t>
+            </a:r>
+          </a:p>
+          <a:p>
+            <a:r>
+              <a:rPr lang="en-US" altLang="ko-KR" dirty="0"/>
+              <a:t>		&lt;/dependency&gt;</a:t>
+            </a:r>
+          </a:p>
+          <a:p>
+            <a:r>
+              <a:rPr lang="en-US" altLang="ko-KR" dirty="0"/>
+              <a:t>				</a:t>
+            </a:r>
+          </a:p>
+          <a:p>
+            <a:r>
+              <a:rPr lang="en-US" altLang="ko-KR" dirty="0"/>
+              <a:t>		&lt;!-- </a:t>
+            </a:r>
             <a:r>
               <a:rPr lang="ko-KR" altLang="en-US" dirty="0"/>
-              <a:t>다음페이지 참고</a:t>
-            </a:r>
-          </a:p>
-        </p:txBody>
-      </p:sp>
-      <p:pic>
-        <p:nvPicPr>
-          <p:cNvPr id="8" name="그림 7">
-            <a:extLst>
-              <a:ext uri="{FF2B5EF4-FFF2-40B4-BE49-F238E27FC236}">
-                <a16:creationId xmlns:a16="http://schemas.microsoft.com/office/drawing/2014/main" id="{1C3C289F-4D42-2816-7EAD-B84EC022891D}"/>
-              </a:ext>
-            </a:extLst>
-          </p:cNvPr>
-          <p:cNvPicPr>
-            <a:picLocks noChangeAspect="1"/>
-          </p:cNvPicPr>
-          <p:nvPr/>
-        </p:nvPicPr>
-        <p:blipFill>
-          <a:blip r:embed="rId3"/>
-          <a:stretch>
-            <a:fillRect/>
-          </a:stretch>
-        </p:blipFill>
-        <p:spPr>
-          <a:xfrm>
-            <a:off x="7036131" y="990715"/>
-            <a:ext cx="4597236" cy="4046777"/>
-          </a:xfrm>
-          <a:prstGeom prst="rect">
-            <a:avLst/>
-          </a:prstGeom>
-        </p:spPr>
-      </p:pic>
+              <a:t>메일 </a:t>
+            </a:r>
+            <a:r>
+              <a:rPr lang="en-US" altLang="ko-KR" dirty="0"/>
+              <a:t>--&gt;</a:t>
+            </a:r>
+          </a:p>
+          <a:p>
+            <a:r>
+              <a:rPr lang="en-US" altLang="ko-KR" dirty="0"/>
+              <a:t>		&lt;dependency&gt;		    							  &lt;</a:t>
+            </a:r>
+            <a:r>
+              <a:rPr lang="en-US" altLang="ko-KR" dirty="0" err="1"/>
+              <a:t>groupId</a:t>
+            </a:r>
+            <a:r>
+              <a:rPr lang="en-US" altLang="ko-KR" dirty="0"/>
+              <a:t>&gt;</a:t>
+            </a:r>
+            <a:r>
+              <a:rPr lang="en-US" altLang="ko-KR" dirty="0" err="1"/>
+              <a:t>javax.activation</a:t>
+            </a:r>
+            <a:r>
+              <a:rPr lang="en-US" altLang="ko-KR" dirty="0"/>
+              <a:t>&lt;/</a:t>
+            </a:r>
+            <a:r>
+              <a:rPr lang="en-US" altLang="ko-KR" dirty="0" err="1"/>
+              <a:t>groupId</a:t>
+            </a:r>
+            <a:r>
+              <a:rPr lang="en-US" altLang="ko-KR" dirty="0"/>
+              <a:t>&gt;</a:t>
+            </a:r>
+          </a:p>
+          <a:p>
+            <a:r>
+              <a:rPr lang="en-US" altLang="ko-KR" dirty="0"/>
+              <a:t>		    &lt;</a:t>
+            </a:r>
+            <a:r>
+              <a:rPr lang="en-US" altLang="ko-KR" dirty="0" err="1"/>
+              <a:t>artifactId</a:t>
+            </a:r>
+            <a:r>
+              <a:rPr lang="en-US" altLang="ko-KR" dirty="0"/>
+              <a:t>&gt;activation&lt;/</a:t>
+            </a:r>
+            <a:r>
+              <a:rPr lang="en-US" altLang="ko-KR" dirty="0" err="1"/>
+              <a:t>artifactId</a:t>
+            </a:r>
+            <a:r>
+              <a:rPr lang="en-US" altLang="ko-KR" dirty="0"/>
+              <a:t>&gt;</a:t>
+            </a:r>
+          </a:p>
+          <a:p>
+            <a:r>
+              <a:rPr lang="en-US" altLang="ko-KR" dirty="0"/>
+              <a:t>		    &lt;version&gt;1.1.1&lt;/version&gt;</a:t>
+            </a:r>
+          </a:p>
+          <a:p>
+            <a:r>
+              <a:rPr lang="en-US" altLang="ko-KR" dirty="0"/>
+              <a:t>		&lt;/dependency&gt;</a:t>
+            </a:r>
+            <a:endParaRPr lang="ko-KR" altLang="en-US" dirty="0"/>
+          </a:p>
+        </p:txBody>
+      </p:sp>
     </p:spTree>
     <p:extLst>
       <p:ext uri="{BB962C8B-B14F-4D97-AF65-F5344CB8AC3E}">
-        <p14:creationId xmlns:p14="http://schemas.microsoft.com/office/powerpoint/2010/main" val="565153208"/>
+        <p14:creationId xmlns:p14="http://schemas.microsoft.com/office/powerpoint/2010/main" val="72075807"/>
       </p:ext>
     </p:extLst>
   </p:cSld>
@@ -9233,12 +9551,47 @@
           <a:chExt cx="0" cy="0"/>
         </a:xfrm>
       </p:grpSpPr>
+      <p:sp>
+        <p:nvSpPr>
+          <p:cNvPr id="9" name="TextBox 8">
+            <a:extLst>
+              <a:ext uri="{FF2B5EF4-FFF2-40B4-BE49-F238E27FC236}">
+                <a16:creationId xmlns:a16="http://schemas.microsoft.com/office/drawing/2014/main" id="{49947A18-07CC-07C7-AF6D-9D7221923E76}"/>
+              </a:ext>
+            </a:extLst>
+          </p:cNvPr>
+          <p:cNvSpPr txBox="1"/>
+          <p:nvPr/>
+        </p:nvSpPr>
+        <p:spPr>
+          <a:xfrm>
+            <a:off x="292007" y="282545"/>
+            <a:ext cx="6097112" cy="369332"/>
+          </a:xfrm>
+          <a:prstGeom prst="rect">
+            <a:avLst/>
+          </a:prstGeom>
+          <a:noFill/>
+        </p:spPr>
+        <p:txBody>
+          <a:bodyPr wrap="square">
+            <a:spAutoFit/>
+          </a:bodyPr>
+          <a:lstStyle/>
+          <a:p>
+            <a:r>
+              <a:rPr lang="ko-KR" altLang="en-US" dirty="0"/>
+              <a:t>https://myaccount.google.com/</a:t>
+            </a:r>
+          </a:p>
+        </p:txBody>
+      </p:sp>
       <p:pic>
         <p:nvPicPr>
-          <p:cNvPr id="2" name="그림 1">
-            <a:extLst>
-              <a:ext uri="{FF2B5EF4-FFF2-40B4-BE49-F238E27FC236}">
-                <a16:creationId xmlns:a16="http://schemas.microsoft.com/office/drawing/2014/main" id="{D03804D6-52D7-5A26-D71F-F3B40CEE3707}"/>
+          <p:cNvPr id="3" name="그림 2">
+            <a:extLst>
+              <a:ext uri="{FF2B5EF4-FFF2-40B4-BE49-F238E27FC236}">
+                <a16:creationId xmlns:a16="http://schemas.microsoft.com/office/drawing/2014/main" id="{D7904147-2780-9F86-0A41-15C0E63FE95E}"/>
               </a:ext>
             </a:extLst>
           </p:cNvPr>
@@ -9255,38 +9608,8 @@
         </p:blipFill>
         <p:spPr>
           <a:xfrm>
-            <a:off x="2300066" y="1494569"/>
-            <a:ext cx="3177546" cy="4050800"/>
-          </a:xfrm>
-          <a:prstGeom prst="rect">
-            <a:avLst/>
-          </a:prstGeom>
-        </p:spPr>
-      </p:pic>
-      <p:pic>
-        <p:nvPicPr>
-          <p:cNvPr id="6" name="그림 5">
-            <a:extLst>
-              <a:ext uri="{FF2B5EF4-FFF2-40B4-BE49-F238E27FC236}">
-                <a16:creationId xmlns:a16="http://schemas.microsoft.com/office/drawing/2014/main" id="{7FBCE964-CE00-EC73-6D02-CB5CD2067D7E}"/>
-              </a:ext>
-            </a:extLst>
-          </p:cNvPr>
-          <p:cNvPicPr>
-            <a:picLocks noChangeAspect="1"/>
-          </p:cNvPicPr>
-          <p:nvPr/>
-        </p:nvPicPr>
-        <p:blipFill>
-          <a:blip r:embed="rId3"/>
-          <a:stretch>
-            <a:fillRect/>
-          </a:stretch>
-        </p:blipFill>
-        <p:spPr>
-          <a:xfrm>
-            <a:off x="6394060" y="1425038"/>
-            <a:ext cx="3417356" cy="4279990"/>
+            <a:off x="2114836" y="890650"/>
+            <a:ext cx="7962327" cy="5551714"/>
           </a:xfrm>
           <a:prstGeom prst="rect">
             <a:avLst/>
@@ -9296,7 +9619,7 @@
     </p:spTree>
     <p:extLst>
       <p:ext uri="{BB962C8B-B14F-4D97-AF65-F5344CB8AC3E}">
-        <p14:creationId xmlns:p14="http://schemas.microsoft.com/office/powerpoint/2010/main" val="2936461964"/>
+        <p14:creationId xmlns:p14="http://schemas.microsoft.com/office/powerpoint/2010/main" val="637270702"/>
       </p:ext>
     </p:extLst>
   </p:cSld>
@@ -9328,7 +9651,7 @@
           <p:cNvPr id="5" name="그림 4">
             <a:extLst>
               <a:ext uri="{FF2B5EF4-FFF2-40B4-BE49-F238E27FC236}">
-                <a16:creationId xmlns:a16="http://schemas.microsoft.com/office/drawing/2014/main" id="{9793FC15-83C5-D005-9EAD-2EEC48E0FF7F}"/>
+                <a16:creationId xmlns:a16="http://schemas.microsoft.com/office/drawing/2014/main" id="{E29D96F0-197A-6B0D-7969-CC7BD61917A6}"/>
               </a:ext>
             </a:extLst>
           </p:cNvPr>
@@ -9345,83 +9668,76 @@
         </p:blipFill>
         <p:spPr>
           <a:xfrm>
-            <a:off x="493238" y="696356"/>
-            <a:ext cx="2457450" cy="695325"/>
+            <a:off x="3298902" y="0"/>
+            <a:ext cx="5594195" cy="6858000"/>
           </a:xfrm>
           <a:prstGeom prst="rect">
             <a:avLst/>
           </a:prstGeom>
         </p:spPr>
       </p:pic>
-      <p:pic>
-        <p:nvPicPr>
-          <p:cNvPr id="7" name="그림 6">
-            <a:extLst>
-              <a:ext uri="{FF2B5EF4-FFF2-40B4-BE49-F238E27FC236}">
-                <a16:creationId xmlns:a16="http://schemas.microsoft.com/office/drawing/2014/main" id="{AB07FEA3-F0CF-B112-E733-055D6498898E}"/>
-              </a:ext>
-            </a:extLst>
-          </p:cNvPr>
-          <p:cNvPicPr>
-            <a:picLocks noChangeAspect="1"/>
-          </p:cNvPicPr>
-          <p:nvPr/>
-        </p:nvPicPr>
-        <p:blipFill>
-          <a:blip r:embed="rId3"/>
-          <a:stretch>
-            <a:fillRect/>
-          </a:stretch>
-        </p:blipFill>
-        <p:spPr>
-          <a:xfrm>
-            <a:off x="493238" y="2189866"/>
-            <a:ext cx="5010150" cy="819150"/>
-          </a:xfrm>
-          <a:prstGeom prst="rect">
-            <a:avLst/>
-          </a:prstGeom>
-        </p:spPr>
-      </p:pic>
-      <p:sp>
-        <p:nvSpPr>
-          <p:cNvPr id="2" name="TextBox 1">
-            <a:extLst>
-              <a:ext uri="{FF2B5EF4-FFF2-40B4-BE49-F238E27FC236}">
-                <a16:creationId xmlns:a16="http://schemas.microsoft.com/office/drawing/2014/main" id="{2516FD90-7369-EE0C-318A-7765978447E6}"/>
-              </a:ext>
-            </a:extLst>
-          </p:cNvPr>
-          <p:cNvSpPr txBox="1"/>
-          <p:nvPr/>
-        </p:nvSpPr>
-        <p:spPr>
-          <a:xfrm>
-            <a:off x="493238" y="3244334"/>
-            <a:ext cx="3281668" cy="369332"/>
+      <p:sp>
+        <p:nvSpPr>
+          <p:cNvPr id="6" name="직사각형 5">
+            <a:extLst>
+              <a:ext uri="{FF2B5EF4-FFF2-40B4-BE49-F238E27FC236}">
+                <a16:creationId xmlns:a16="http://schemas.microsoft.com/office/drawing/2014/main" id="{3FC0EC5D-A69D-3DBC-1F82-770D10F95991}"/>
+              </a:ext>
+            </a:extLst>
+          </p:cNvPr>
+          <p:cNvSpPr/>
+          <p:nvPr/>
+        </p:nvSpPr>
+        <p:spPr>
+          <a:xfrm>
+            <a:off x="3298902" y="4952010"/>
+            <a:ext cx="5690719" cy="1425039"/>
           </a:xfrm>
           <a:prstGeom prst="rect">
             <a:avLst/>
           </a:prstGeom>
           <a:noFill/>
-        </p:spPr>
-        <p:txBody>
-          <a:bodyPr wrap="none" rtlCol="0">
-            <a:spAutoFit/>
-          </a:bodyPr>
-          <a:lstStyle/>
-          <a:p>
-            <a:r>
-              <a:rPr lang="ko-KR" altLang="en-US"/>
-              <a:t>키는 띄어쓰기 없이 넣어야 함</a:t>
-            </a:r>
+          <a:ln>
+            <a:solidFill>
+              <a:srgbClr val="FF0000"/>
+            </a:solidFill>
+          </a:ln>
+        </p:spPr>
+        <p:style>
+          <a:lnRef idx="2">
+            <a:schemeClr val="accent1">
+              <a:shade val="15000"/>
+            </a:schemeClr>
+          </a:lnRef>
+          <a:fillRef idx="1">
+            <a:schemeClr val="accent1"/>
+          </a:fillRef>
+          <a:effectRef idx="0">
+            <a:schemeClr val="accent1"/>
+          </a:effectRef>
+          <a:fontRef idx="minor">
+            <a:schemeClr val="lt1"/>
+          </a:fontRef>
+        </p:style>
+        <p:txBody>
+          <a:bodyPr rtlCol="0" anchor="ctr"/>
+          <a:lstStyle/>
+          <a:p>
+            <a:pPr algn="ctr"/>
+            <a:endParaRPr lang="ko-KR" altLang="en-US">
+              <a:ln>
+                <a:solidFill>
+                  <a:srgbClr val="FF0000"/>
+                </a:solidFill>
+              </a:ln>
+            </a:endParaRPr>
           </a:p>
         </p:txBody>
       </p:sp>
     </p:spTree>
     <p:extLst>
       <p:ext uri="{BB962C8B-B14F-4D97-AF65-F5344CB8AC3E}">
-        <p14:creationId xmlns:p14="http://schemas.microsoft.com/office/powerpoint/2010/main" val="675764092"/>
+        <p14:creationId xmlns:p14="http://schemas.microsoft.com/office/powerpoint/2010/main" val="3658008245"/>
       </p:ext>
     </p:extLst>
   </p:cSld>
